--- a/docs/drawio画图/日记/review.pptx
+++ b/docs/drawio画图/日记/review.pptx
@@ -5,7 +5,7 @@
     <p:sldMasterId id="2147483648" r:id="rId1"/>
   </p:sldMasterIdLst>
   <p:notesMasterIdLst>
-    <p:notesMasterId r:id="rId7"/>
+    <p:notesMasterId r:id="rId12"/>
   </p:notesMasterIdLst>
   <p:sldIdLst>
     <p:sldId id="256" r:id="rId2"/>
@@ -13,6 +13,11 @@
     <p:sldId id="261" r:id="rId4"/>
     <p:sldId id="257" r:id="rId5"/>
     <p:sldId id="259" r:id="rId6"/>
+    <p:sldId id="262" r:id="rId7"/>
+    <p:sldId id="263" r:id="rId8"/>
+    <p:sldId id="264" r:id="rId9"/>
+    <p:sldId id="265" r:id="rId10"/>
+    <p:sldId id="266" r:id="rId11"/>
   </p:sldIdLst>
   <p:sldSz cx="12192000" cy="6858000"/>
   <p:notesSz cx="6858000" cy="9144000"/>
@@ -201,7 +206,7 @@
           <a:p>
             <a:fld id="{F025F477-E431-4287-BBCF-F0B82B99CDE8}" type="datetimeFigureOut">
               <a:rPr lang="zh-CN" altLang="en-US" smtClean="0"/>
-              <a:t>2025/8/20</a:t>
+              <a:t>2025/8/27</a:t>
             </a:fld>
             <a:endParaRPr lang="zh-CN" altLang="en-US"/>
           </a:p>
@@ -699,7 +704,7 @@
           <a:p>
             <a:fld id="{57E0CF9C-0FB6-4165-824A-A36BB34C0D04}" type="datetimeFigureOut">
               <a:rPr lang="zh-CN" altLang="en-US" smtClean="0"/>
-              <a:t>2025/8/20</a:t>
+              <a:t>2025/8/27</a:t>
             </a:fld>
             <a:endParaRPr lang="zh-CN" altLang="en-US"/>
           </a:p>
@@ -897,7 +902,7 @@
           <a:p>
             <a:fld id="{57E0CF9C-0FB6-4165-824A-A36BB34C0D04}" type="datetimeFigureOut">
               <a:rPr lang="zh-CN" altLang="en-US" smtClean="0"/>
-              <a:t>2025/8/20</a:t>
+              <a:t>2025/8/27</a:t>
             </a:fld>
             <a:endParaRPr lang="zh-CN" altLang="en-US"/>
           </a:p>
@@ -1105,7 +1110,7 @@
           <a:p>
             <a:fld id="{57E0CF9C-0FB6-4165-824A-A36BB34C0D04}" type="datetimeFigureOut">
               <a:rPr lang="zh-CN" altLang="en-US" smtClean="0"/>
-              <a:t>2025/8/20</a:t>
+              <a:t>2025/8/27</a:t>
             </a:fld>
             <a:endParaRPr lang="zh-CN" altLang="en-US"/>
           </a:p>
@@ -1303,7 +1308,7 @@
           <a:p>
             <a:fld id="{57E0CF9C-0FB6-4165-824A-A36BB34C0D04}" type="datetimeFigureOut">
               <a:rPr lang="zh-CN" altLang="en-US" smtClean="0"/>
-              <a:t>2025/8/20</a:t>
+              <a:t>2025/8/27</a:t>
             </a:fld>
             <a:endParaRPr lang="zh-CN" altLang="en-US"/>
           </a:p>
@@ -1578,7 +1583,7 @@
           <a:p>
             <a:fld id="{57E0CF9C-0FB6-4165-824A-A36BB34C0D04}" type="datetimeFigureOut">
               <a:rPr lang="zh-CN" altLang="en-US" smtClean="0"/>
-              <a:t>2025/8/20</a:t>
+              <a:t>2025/8/27</a:t>
             </a:fld>
             <a:endParaRPr lang="zh-CN" altLang="en-US"/>
           </a:p>
@@ -1843,7 +1848,7 @@
           <a:p>
             <a:fld id="{57E0CF9C-0FB6-4165-824A-A36BB34C0D04}" type="datetimeFigureOut">
               <a:rPr lang="zh-CN" altLang="en-US" smtClean="0"/>
-              <a:t>2025/8/20</a:t>
+              <a:t>2025/8/27</a:t>
             </a:fld>
             <a:endParaRPr lang="zh-CN" altLang="en-US"/>
           </a:p>
@@ -2255,7 +2260,7 @@
           <a:p>
             <a:fld id="{57E0CF9C-0FB6-4165-824A-A36BB34C0D04}" type="datetimeFigureOut">
               <a:rPr lang="zh-CN" altLang="en-US" smtClean="0"/>
-              <a:t>2025/8/20</a:t>
+              <a:t>2025/8/27</a:t>
             </a:fld>
             <a:endParaRPr lang="zh-CN" altLang="en-US"/>
           </a:p>
@@ -2396,7 +2401,7 @@
           <a:p>
             <a:fld id="{57E0CF9C-0FB6-4165-824A-A36BB34C0D04}" type="datetimeFigureOut">
               <a:rPr lang="zh-CN" altLang="en-US" smtClean="0"/>
-              <a:t>2025/8/20</a:t>
+              <a:t>2025/8/27</a:t>
             </a:fld>
             <a:endParaRPr lang="zh-CN" altLang="en-US"/>
           </a:p>
@@ -2509,7 +2514,7 @@
           <a:p>
             <a:fld id="{57E0CF9C-0FB6-4165-824A-A36BB34C0D04}" type="datetimeFigureOut">
               <a:rPr lang="zh-CN" altLang="en-US" smtClean="0"/>
-              <a:t>2025/8/20</a:t>
+              <a:t>2025/8/27</a:t>
             </a:fld>
             <a:endParaRPr lang="zh-CN" altLang="en-US"/>
           </a:p>
@@ -2820,7 +2825,7 @@
           <a:p>
             <a:fld id="{57E0CF9C-0FB6-4165-824A-A36BB34C0D04}" type="datetimeFigureOut">
               <a:rPr lang="zh-CN" altLang="en-US" smtClean="0"/>
-              <a:t>2025/8/20</a:t>
+              <a:t>2025/8/27</a:t>
             </a:fld>
             <a:endParaRPr lang="zh-CN" altLang="en-US"/>
           </a:p>
@@ -3108,7 +3113,7 @@
           <a:p>
             <a:fld id="{57E0CF9C-0FB6-4165-824A-A36BB34C0D04}" type="datetimeFigureOut">
               <a:rPr lang="zh-CN" altLang="en-US" smtClean="0"/>
-              <a:t>2025/8/20</a:t>
+              <a:t>2025/8/27</a:t>
             </a:fld>
             <a:endParaRPr lang="zh-CN" altLang="en-US"/>
           </a:p>
@@ -3349,7 +3354,7 @@
           <a:p>
             <a:fld id="{57E0CF9C-0FB6-4165-824A-A36BB34C0D04}" type="datetimeFigureOut">
               <a:rPr lang="zh-CN" altLang="en-US" smtClean="0"/>
-              <a:t>2025/8/20</a:t>
+              <a:t>2025/8/27</a:t>
             </a:fld>
             <a:endParaRPr lang="zh-CN" altLang="en-US"/>
           </a:p>
@@ -5106,6 +5111,2142 @@
 </p:sld>
 </file>
 
+<file path=ppt/slides/slide10.xml><?xml version="1.0" encoding="utf-8"?>
+<p:sld xmlns:a="http://schemas.openxmlformats.org/drawingml/2006/main" xmlns:r="http://schemas.openxmlformats.org/officeDocument/2006/relationships" xmlns:p="http://schemas.openxmlformats.org/presentationml/2006/main">
+  <p:cSld>
+    <p:spTree>
+      <p:nvGrpSpPr>
+        <p:cNvPr id="1" name=""/>
+        <p:cNvGrpSpPr/>
+        <p:nvPr/>
+      </p:nvGrpSpPr>
+      <p:grpSpPr>
+        <a:xfrm>
+          <a:off x="0" y="0"/>
+          <a:ext cx="0" cy="0"/>
+          <a:chOff x="0" y="0"/>
+          <a:chExt cx="0" cy="0"/>
+        </a:xfrm>
+      </p:grpSpPr>
+      <p:sp>
+        <p:nvSpPr>
+          <p:cNvPr id="43" name="对话气泡: 圆角矩形 42">
+            <a:extLst>
+              <a:ext uri="{FF2B5EF4-FFF2-40B4-BE49-F238E27FC236}">
+                <a16:creationId xmlns:a16="http://schemas.microsoft.com/office/drawing/2014/main" id="{357093CA-78E9-AD61-4632-EF7453214478}"/>
+              </a:ext>
+            </a:extLst>
+          </p:cNvPr>
+          <p:cNvSpPr/>
+          <p:nvPr/>
+        </p:nvSpPr>
+        <p:spPr>
+          <a:xfrm>
+            <a:off x="8559203" y="1150373"/>
+            <a:ext cx="3632795" cy="3244645"/>
+          </a:xfrm>
+          <a:prstGeom prst="wedgeRoundRectCallout">
+            <a:avLst/>
+          </a:prstGeom>
+          <a:solidFill>
+            <a:schemeClr val="bg2"/>
+          </a:solidFill>
+        </p:spPr>
+        <p:style>
+          <a:lnRef idx="2">
+            <a:schemeClr val="accent1">
+              <a:shade val="15000"/>
+            </a:schemeClr>
+          </a:lnRef>
+          <a:fillRef idx="1">
+            <a:schemeClr val="accent1"/>
+          </a:fillRef>
+          <a:effectRef idx="0">
+            <a:schemeClr val="accent1"/>
+          </a:effectRef>
+          <a:fontRef idx="minor">
+            <a:schemeClr val="lt1"/>
+          </a:fontRef>
+        </p:style>
+        <p:txBody>
+          <a:bodyPr rtlCol="0" anchor="ctr"/>
+          <a:lstStyle/>
+          <a:p>
+            <a:pPr algn="ctr"/>
+            <a:endParaRPr lang="zh-CN" altLang="en-US" dirty="0"/>
+          </a:p>
+        </p:txBody>
+      </p:sp>
+      <p:sp>
+        <p:nvSpPr>
+          <p:cNvPr id="4" name="圆柱体 3">
+            <a:extLst>
+              <a:ext uri="{FF2B5EF4-FFF2-40B4-BE49-F238E27FC236}">
+                <a16:creationId xmlns:a16="http://schemas.microsoft.com/office/drawing/2014/main" id="{6410E296-74CD-8C5E-69AD-E61144EA73EE}"/>
+              </a:ext>
+            </a:extLst>
+          </p:cNvPr>
+          <p:cNvSpPr/>
+          <p:nvPr/>
+        </p:nvSpPr>
+        <p:spPr>
+          <a:xfrm>
+            <a:off x="491614" y="1288025"/>
+            <a:ext cx="973393" cy="884903"/>
+          </a:xfrm>
+          <a:prstGeom prst="can">
+            <a:avLst/>
+          </a:prstGeom>
+        </p:spPr>
+        <p:style>
+          <a:lnRef idx="2">
+            <a:schemeClr val="accent1">
+              <a:shade val="15000"/>
+            </a:schemeClr>
+          </a:lnRef>
+          <a:fillRef idx="1">
+            <a:schemeClr val="accent1"/>
+          </a:fillRef>
+          <a:effectRef idx="0">
+            <a:schemeClr val="accent1"/>
+          </a:effectRef>
+          <a:fontRef idx="minor">
+            <a:schemeClr val="lt1"/>
+          </a:fontRef>
+        </p:style>
+        <p:txBody>
+          <a:bodyPr rtlCol="0" anchor="ctr"/>
+          <a:lstStyle/>
+          <a:p>
+            <a:pPr algn="ctr"/>
+            <a:r>
+              <a:rPr lang="en-US" altLang="zh-CN" dirty="0" err="1"/>
+              <a:t>github</a:t>
+            </a:r>
+            <a:endParaRPr lang="zh-CN" altLang="en-US" dirty="0"/>
+          </a:p>
+        </p:txBody>
+      </p:sp>
+      <p:cxnSp>
+        <p:nvCxnSpPr>
+          <p:cNvPr id="8" name="直接连接符 7">
+            <a:extLst>
+              <a:ext uri="{FF2B5EF4-FFF2-40B4-BE49-F238E27FC236}">
+                <a16:creationId xmlns:a16="http://schemas.microsoft.com/office/drawing/2014/main" id="{A5C6613B-9521-918B-00DC-9C1909C3FF93}"/>
+              </a:ext>
+            </a:extLst>
+          </p:cNvPr>
+          <p:cNvCxnSpPr/>
+          <p:nvPr/>
+        </p:nvCxnSpPr>
+        <p:spPr>
+          <a:xfrm>
+            <a:off x="3165987" y="0"/>
+            <a:ext cx="0" cy="6858000"/>
+          </a:xfrm>
+          <a:prstGeom prst="line">
+            <a:avLst/>
+          </a:prstGeom>
+        </p:spPr>
+        <p:style>
+          <a:lnRef idx="1">
+            <a:schemeClr val="accent1"/>
+          </a:lnRef>
+          <a:fillRef idx="0">
+            <a:schemeClr val="accent1"/>
+          </a:fillRef>
+          <a:effectRef idx="0">
+            <a:schemeClr val="accent1"/>
+          </a:effectRef>
+          <a:fontRef idx="minor">
+            <a:schemeClr val="tx1"/>
+          </a:fontRef>
+        </p:style>
+      </p:cxnSp>
+      <p:sp>
+        <p:nvSpPr>
+          <p:cNvPr id="9" name="文本框 8">
+            <a:extLst>
+              <a:ext uri="{FF2B5EF4-FFF2-40B4-BE49-F238E27FC236}">
+                <a16:creationId xmlns:a16="http://schemas.microsoft.com/office/drawing/2014/main" id="{6204BA5D-F4FF-1B4B-5F93-A50D5267F513}"/>
+              </a:ext>
+            </a:extLst>
+          </p:cNvPr>
+          <p:cNvSpPr txBox="1"/>
+          <p:nvPr/>
+        </p:nvSpPr>
+        <p:spPr>
+          <a:xfrm>
+            <a:off x="424312" y="383459"/>
+            <a:ext cx="1107996" cy="369332"/>
+          </a:xfrm>
+          <a:prstGeom prst="rect">
+            <a:avLst/>
+          </a:prstGeom>
+          <a:noFill/>
+        </p:spPr>
+        <p:txBody>
+          <a:bodyPr wrap="none" rtlCol="0">
+            <a:spAutoFit/>
+          </a:bodyPr>
+          <a:lstStyle/>
+          <a:p>
+            <a:r>
+              <a:rPr lang="zh-CN" altLang="en-US" dirty="0"/>
+              <a:t>数据收集</a:t>
+            </a:r>
+          </a:p>
+        </p:txBody>
+      </p:sp>
+      <p:cxnSp>
+        <p:nvCxnSpPr>
+          <p:cNvPr id="11" name="直接箭头连接符 10">
+            <a:extLst>
+              <a:ext uri="{FF2B5EF4-FFF2-40B4-BE49-F238E27FC236}">
+                <a16:creationId xmlns:a16="http://schemas.microsoft.com/office/drawing/2014/main" id="{72C5F033-36EE-8ADB-147E-B4F57B8CBDFA}"/>
+              </a:ext>
+            </a:extLst>
+          </p:cNvPr>
+          <p:cNvCxnSpPr>
+            <a:cxnSpLocks/>
+          </p:cNvCxnSpPr>
+          <p:nvPr/>
+        </p:nvCxnSpPr>
+        <p:spPr>
+          <a:xfrm>
+            <a:off x="1661651" y="2271790"/>
+            <a:ext cx="2123767" cy="3077496"/>
+          </a:xfrm>
+          <a:prstGeom prst="straightConnector1">
+            <a:avLst/>
+          </a:prstGeom>
+          <a:ln>
+            <a:tailEnd type="triangle"/>
+          </a:ln>
+        </p:spPr>
+        <p:style>
+          <a:lnRef idx="1">
+            <a:schemeClr val="accent1"/>
+          </a:lnRef>
+          <a:fillRef idx="0">
+            <a:schemeClr val="accent1"/>
+          </a:fillRef>
+          <a:effectRef idx="0">
+            <a:schemeClr val="accent1"/>
+          </a:effectRef>
+          <a:fontRef idx="minor">
+            <a:schemeClr val="tx1"/>
+          </a:fontRef>
+        </p:style>
+      </p:cxnSp>
+      <p:sp>
+        <p:nvSpPr>
+          <p:cNvPr id="13" name="文本框 12">
+            <a:extLst>
+              <a:ext uri="{FF2B5EF4-FFF2-40B4-BE49-F238E27FC236}">
+                <a16:creationId xmlns:a16="http://schemas.microsoft.com/office/drawing/2014/main" id="{7808948C-A483-7730-9429-394E4F334FF3}"/>
+              </a:ext>
+            </a:extLst>
+          </p:cNvPr>
+          <p:cNvSpPr txBox="1"/>
+          <p:nvPr/>
+        </p:nvSpPr>
+        <p:spPr>
+          <a:xfrm>
+            <a:off x="117987" y="4872335"/>
+            <a:ext cx="2556387" cy="2031325"/>
+          </a:xfrm>
+          <a:prstGeom prst="rect">
+            <a:avLst/>
+          </a:prstGeom>
+          <a:noFill/>
+        </p:spPr>
+        <p:txBody>
+          <a:bodyPr wrap="square">
+            <a:spAutoFit/>
+          </a:bodyPr>
+          <a:lstStyle/>
+          <a:p>
+            <a:pPr marL="342900" indent="-342900">
+              <a:buAutoNum type="arabicPeriod"/>
+            </a:pPr>
+            <a:r>
+              <a:rPr lang="en-US" altLang="zh-CN" sz="1800" dirty="0"/>
+              <a:t>merge-base </a:t>
+            </a:r>
+            <a:r>
+              <a:rPr lang="zh-CN" altLang="en-US" sz="1800" dirty="0"/>
+              <a:t>以及</a:t>
+            </a:r>
+            <a:r>
+              <a:rPr lang="en-US" altLang="zh-CN" sz="1800" dirty="0"/>
+              <a:t>feature</a:t>
+            </a:r>
+            <a:r>
+              <a:rPr lang="zh-CN" altLang="en-US" sz="1800" dirty="0"/>
+              <a:t>的 </a:t>
+            </a:r>
+            <a:r>
+              <a:rPr lang="en-US" altLang="zh-CN" sz="1800" dirty="0"/>
+              <a:t>repo</a:t>
+            </a:r>
+          </a:p>
+          <a:p>
+            <a:pPr marL="1257300" lvl="2" indent="-342900">
+              <a:buAutoNum type="arabicPeriod"/>
+            </a:pPr>
+            <a:endParaRPr lang="en-US" altLang="zh-CN" dirty="0"/>
+          </a:p>
+          <a:p>
+            <a:pPr marL="342900" indent="-342900">
+              <a:buAutoNum type="arabicPeriod"/>
+            </a:pPr>
+            <a:r>
+              <a:rPr lang="en-US" altLang="zh-CN" dirty="0"/>
+              <a:t>Closed </a:t>
+            </a:r>
+            <a:r>
+              <a:rPr lang="en-US" altLang="zh-CN" sz="1800" dirty="0"/>
+              <a:t>pr</a:t>
+            </a:r>
+            <a:r>
+              <a:rPr lang="zh-CN" altLang="en-US" sz="1800" dirty="0"/>
+              <a:t>的 </a:t>
+            </a:r>
+            <a:r>
+              <a:rPr lang="en-US" altLang="zh-CN" sz="1800" dirty="0"/>
+              <a:t>&lt;</a:t>
+            </a:r>
+            <a:r>
+              <a:rPr lang="en-US" altLang="zh-CN" sz="1800" dirty="0" err="1"/>
+              <a:t>diff_hunk</a:t>
+            </a:r>
+            <a:r>
+              <a:rPr lang="en-US" altLang="zh-CN" sz="1800" dirty="0"/>
+              <a:t>,  review comment,  revised code&gt; </a:t>
+            </a:r>
+            <a:r>
+              <a:rPr lang="zh-CN" altLang="en-US" sz="1800" dirty="0"/>
+              <a:t>三元组</a:t>
+            </a:r>
+            <a:endParaRPr lang="en-US" altLang="zh-CN" sz="1800" dirty="0"/>
+          </a:p>
+        </p:txBody>
+      </p:sp>
+      <p:sp>
+        <p:nvSpPr>
+          <p:cNvPr id="15" name="文本框 14">
+            <a:extLst>
+              <a:ext uri="{FF2B5EF4-FFF2-40B4-BE49-F238E27FC236}">
+                <a16:creationId xmlns:a16="http://schemas.microsoft.com/office/drawing/2014/main" id="{A1C49CC6-6C27-6B58-1D50-22D467C02409}"/>
+              </a:ext>
+            </a:extLst>
+          </p:cNvPr>
+          <p:cNvSpPr txBox="1"/>
+          <p:nvPr/>
+        </p:nvSpPr>
+        <p:spPr>
+          <a:xfrm>
+            <a:off x="3637934" y="383459"/>
+            <a:ext cx="1338828" cy="369332"/>
+          </a:xfrm>
+          <a:prstGeom prst="rect">
+            <a:avLst/>
+          </a:prstGeom>
+          <a:noFill/>
+        </p:spPr>
+        <p:txBody>
+          <a:bodyPr wrap="none" rtlCol="0">
+            <a:spAutoFit/>
+          </a:bodyPr>
+          <a:lstStyle/>
+          <a:p>
+            <a:r>
+              <a:rPr lang="zh-CN" altLang="en-US" dirty="0"/>
+              <a:t>上下文构建</a:t>
+            </a:r>
+          </a:p>
+        </p:txBody>
+      </p:sp>
+      <p:sp>
+        <p:nvSpPr>
+          <p:cNvPr id="16" name="矩形: 圆角 15">
+            <a:extLst>
+              <a:ext uri="{FF2B5EF4-FFF2-40B4-BE49-F238E27FC236}">
+                <a16:creationId xmlns:a16="http://schemas.microsoft.com/office/drawing/2014/main" id="{26CA8B97-69FC-42BE-CB42-3A376784AF15}"/>
+              </a:ext>
+            </a:extLst>
+          </p:cNvPr>
+          <p:cNvSpPr/>
+          <p:nvPr/>
+        </p:nvSpPr>
+        <p:spPr>
+          <a:xfrm>
+            <a:off x="3220729" y="2071835"/>
+            <a:ext cx="757077" cy="550607"/>
+          </a:xfrm>
+          <a:prstGeom prst="roundRect">
+            <a:avLst/>
+          </a:prstGeom>
+        </p:spPr>
+        <p:style>
+          <a:lnRef idx="2">
+            <a:schemeClr val="accent1">
+              <a:shade val="15000"/>
+            </a:schemeClr>
+          </a:lnRef>
+          <a:fillRef idx="1">
+            <a:schemeClr val="accent1"/>
+          </a:fillRef>
+          <a:effectRef idx="0">
+            <a:schemeClr val="accent1"/>
+          </a:effectRef>
+          <a:fontRef idx="minor">
+            <a:schemeClr val="lt1"/>
+          </a:fontRef>
+        </p:style>
+        <p:txBody>
+          <a:bodyPr rtlCol="0" anchor="ctr"/>
+          <a:lstStyle/>
+          <a:p>
+            <a:pPr algn="ctr"/>
+            <a:r>
+              <a:rPr lang="en-US" altLang="zh-CN" dirty="0"/>
+              <a:t>repo</a:t>
+            </a:r>
+            <a:endParaRPr lang="zh-CN" altLang="en-US" dirty="0"/>
+          </a:p>
+        </p:txBody>
+      </p:sp>
+      <p:cxnSp>
+        <p:nvCxnSpPr>
+          <p:cNvPr id="18" name="直接箭头连接符 17">
+            <a:extLst>
+              <a:ext uri="{FF2B5EF4-FFF2-40B4-BE49-F238E27FC236}">
+                <a16:creationId xmlns:a16="http://schemas.microsoft.com/office/drawing/2014/main" id="{8C089254-FF0E-9425-5357-4D992A66B82F}"/>
+              </a:ext>
+            </a:extLst>
+          </p:cNvPr>
+          <p:cNvCxnSpPr>
+            <a:cxnSpLocks/>
+          </p:cNvCxnSpPr>
+          <p:nvPr/>
+        </p:nvCxnSpPr>
+        <p:spPr>
+          <a:xfrm flipV="1">
+            <a:off x="3856815" y="1782656"/>
+            <a:ext cx="480848" cy="221820"/>
+          </a:xfrm>
+          <a:prstGeom prst="straightConnector1">
+            <a:avLst/>
+          </a:prstGeom>
+          <a:ln>
+            <a:tailEnd type="triangle"/>
+          </a:ln>
+        </p:spPr>
+        <p:style>
+          <a:lnRef idx="1">
+            <a:schemeClr val="accent1"/>
+          </a:lnRef>
+          <a:fillRef idx="0">
+            <a:schemeClr val="accent1"/>
+          </a:fillRef>
+          <a:effectRef idx="0">
+            <a:schemeClr val="accent1"/>
+          </a:effectRef>
+          <a:fontRef idx="minor">
+            <a:schemeClr val="tx1"/>
+          </a:fontRef>
+        </p:style>
+      </p:cxnSp>
+      <p:cxnSp>
+        <p:nvCxnSpPr>
+          <p:cNvPr id="19" name="直接箭头连接符 18">
+            <a:extLst>
+              <a:ext uri="{FF2B5EF4-FFF2-40B4-BE49-F238E27FC236}">
+                <a16:creationId xmlns:a16="http://schemas.microsoft.com/office/drawing/2014/main" id="{AC94F91A-3024-8713-1FAB-CCD0A9D993D1}"/>
+              </a:ext>
+            </a:extLst>
+          </p:cNvPr>
+          <p:cNvCxnSpPr>
+            <a:cxnSpLocks/>
+          </p:cNvCxnSpPr>
+          <p:nvPr/>
+        </p:nvCxnSpPr>
+        <p:spPr>
+          <a:xfrm>
+            <a:off x="3774738" y="2588207"/>
+            <a:ext cx="518362" cy="503414"/>
+          </a:xfrm>
+          <a:prstGeom prst="straightConnector1">
+            <a:avLst/>
+          </a:prstGeom>
+          <a:ln>
+            <a:tailEnd type="triangle"/>
+          </a:ln>
+        </p:spPr>
+        <p:style>
+          <a:lnRef idx="1">
+            <a:schemeClr val="accent1"/>
+          </a:lnRef>
+          <a:fillRef idx="0">
+            <a:schemeClr val="accent1"/>
+          </a:fillRef>
+          <a:effectRef idx="0">
+            <a:schemeClr val="accent1"/>
+          </a:effectRef>
+          <a:fontRef idx="minor">
+            <a:schemeClr val="tx1"/>
+          </a:fontRef>
+        </p:style>
+      </p:cxnSp>
+      <p:sp>
+        <p:nvSpPr>
+          <p:cNvPr id="21" name="椭圆 20">
+            <a:extLst>
+              <a:ext uri="{FF2B5EF4-FFF2-40B4-BE49-F238E27FC236}">
+                <a16:creationId xmlns:a16="http://schemas.microsoft.com/office/drawing/2014/main" id="{B7798ACD-01BF-4FF1-3462-E88429C6C955}"/>
+              </a:ext>
+            </a:extLst>
+          </p:cNvPr>
+          <p:cNvSpPr/>
+          <p:nvPr/>
+        </p:nvSpPr>
+        <p:spPr>
+          <a:xfrm>
+            <a:off x="4401575" y="1195157"/>
+            <a:ext cx="1582993" cy="1076633"/>
+          </a:xfrm>
+          <a:prstGeom prst="ellipse">
+            <a:avLst/>
+          </a:prstGeom>
+        </p:spPr>
+        <p:style>
+          <a:lnRef idx="2">
+            <a:schemeClr val="accent1">
+              <a:shade val="15000"/>
+            </a:schemeClr>
+          </a:lnRef>
+          <a:fillRef idx="1">
+            <a:schemeClr val="accent1"/>
+          </a:fillRef>
+          <a:effectRef idx="0">
+            <a:schemeClr val="accent1"/>
+          </a:effectRef>
+          <a:fontRef idx="minor">
+            <a:schemeClr val="lt1"/>
+          </a:fontRef>
+        </p:style>
+        <p:txBody>
+          <a:bodyPr rtlCol="0" anchor="ctr"/>
+          <a:lstStyle/>
+          <a:p>
+            <a:pPr algn="ctr"/>
+            <a:r>
+              <a:rPr lang="en-US" altLang="zh-CN" dirty="0"/>
+              <a:t>Tree structure</a:t>
+            </a:r>
+            <a:endParaRPr lang="zh-CN" altLang="en-US" dirty="0"/>
+          </a:p>
+        </p:txBody>
+      </p:sp>
+      <p:sp>
+        <p:nvSpPr>
+          <p:cNvPr id="24" name="椭圆 23">
+            <a:extLst>
+              <a:ext uri="{FF2B5EF4-FFF2-40B4-BE49-F238E27FC236}">
+                <a16:creationId xmlns:a16="http://schemas.microsoft.com/office/drawing/2014/main" id="{CEABB3A5-8EC9-D739-987C-35E975F1C68E}"/>
+              </a:ext>
+            </a:extLst>
+          </p:cNvPr>
+          <p:cNvSpPr/>
+          <p:nvPr/>
+        </p:nvSpPr>
+        <p:spPr>
+          <a:xfrm>
+            <a:off x="4334904" y="2339924"/>
+            <a:ext cx="1582993" cy="2163721"/>
+          </a:xfrm>
+          <a:prstGeom prst="ellipse">
+            <a:avLst/>
+          </a:prstGeom>
+        </p:spPr>
+        <p:style>
+          <a:lnRef idx="2">
+            <a:schemeClr val="accent1">
+              <a:shade val="15000"/>
+            </a:schemeClr>
+          </a:lnRef>
+          <a:fillRef idx="1">
+            <a:schemeClr val="accent1"/>
+          </a:fillRef>
+          <a:effectRef idx="0">
+            <a:schemeClr val="accent1"/>
+          </a:effectRef>
+          <a:fontRef idx="minor">
+            <a:schemeClr val="lt1"/>
+          </a:fontRef>
+        </p:style>
+        <p:txBody>
+          <a:bodyPr rtlCol="0" anchor="ctr"/>
+          <a:lstStyle/>
+          <a:p>
+            <a:pPr algn="ctr"/>
+            <a:r>
+              <a:rPr lang="zh-CN" altLang="en-US" dirty="0"/>
+              <a:t>受</a:t>
+            </a:r>
+            <a:r>
+              <a:rPr lang="en-US" altLang="zh-CN" dirty="0"/>
+              <a:t>depth</a:t>
+            </a:r>
+            <a:r>
+              <a:rPr lang="zh-CN" altLang="en-US" dirty="0"/>
+              <a:t>限制的可获得内容的 </a:t>
+            </a:r>
+            <a:r>
+              <a:rPr lang="en-US" altLang="zh-CN" dirty="0"/>
+              <a:t>callee</a:t>
+            </a:r>
+            <a:r>
+              <a:rPr lang="zh-CN" altLang="en-US" dirty="0"/>
+              <a:t>和 </a:t>
+            </a:r>
+            <a:r>
+              <a:rPr lang="en-US" altLang="zh-CN" dirty="0"/>
+              <a:t>caller tree</a:t>
+            </a:r>
+          </a:p>
+        </p:txBody>
+      </p:sp>
+      <p:cxnSp>
+        <p:nvCxnSpPr>
+          <p:cNvPr id="26" name="直接连接符 25">
+            <a:extLst>
+              <a:ext uri="{FF2B5EF4-FFF2-40B4-BE49-F238E27FC236}">
+                <a16:creationId xmlns:a16="http://schemas.microsoft.com/office/drawing/2014/main" id="{73282BEA-5A56-C272-C64A-EEF22B8B3565}"/>
+              </a:ext>
+            </a:extLst>
+          </p:cNvPr>
+          <p:cNvCxnSpPr/>
+          <p:nvPr/>
+        </p:nvCxnSpPr>
+        <p:spPr>
+          <a:xfrm>
+            <a:off x="6567948" y="0"/>
+            <a:ext cx="0" cy="6858000"/>
+          </a:xfrm>
+          <a:prstGeom prst="line">
+            <a:avLst/>
+          </a:prstGeom>
+        </p:spPr>
+        <p:style>
+          <a:lnRef idx="1">
+            <a:schemeClr val="accent1"/>
+          </a:lnRef>
+          <a:fillRef idx="0">
+            <a:schemeClr val="accent1"/>
+          </a:fillRef>
+          <a:effectRef idx="0">
+            <a:schemeClr val="accent1"/>
+          </a:effectRef>
+          <a:fontRef idx="minor">
+            <a:schemeClr val="tx1"/>
+          </a:fontRef>
+        </p:style>
+      </p:cxnSp>
+      <p:sp>
+        <p:nvSpPr>
+          <p:cNvPr id="27" name="文本框 26">
+            <a:extLst>
+              <a:ext uri="{FF2B5EF4-FFF2-40B4-BE49-F238E27FC236}">
+                <a16:creationId xmlns:a16="http://schemas.microsoft.com/office/drawing/2014/main" id="{95167361-87AC-9AF2-7BA3-958BA3173008}"/>
+              </a:ext>
+            </a:extLst>
+          </p:cNvPr>
+          <p:cNvSpPr txBox="1"/>
+          <p:nvPr/>
+        </p:nvSpPr>
+        <p:spPr>
+          <a:xfrm>
+            <a:off x="6866195" y="383459"/>
+            <a:ext cx="1338828" cy="369332"/>
+          </a:xfrm>
+          <a:prstGeom prst="rect">
+            <a:avLst/>
+          </a:prstGeom>
+          <a:noFill/>
+        </p:spPr>
+        <p:txBody>
+          <a:bodyPr wrap="none" rtlCol="0">
+            <a:spAutoFit/>
+          </a:bodyPr>
+          <a:lstStyle/>
+          <a:p>
+            <a:r>
+              <a:rPr lang="zh-CN" altLang="en-US" dirty="0"/>
+              <a:t>两阶段生成</a:t>
+            </a:r>
+          </a:p>
+        </p:txBody>
+      </p:sp>
+      <p:grpSp>
+        <p:nvGrpSpPr>
+          <p:cNvPr id="28" name="组合 27">
+            <a:extLst>
+              <a:ext uri="{FF2B5EF4-FFF2-40B4-BE49-F238E27FC236}">
+                <a16:creationId xmlns:a16="http://schemas.microsoft.com/office/drawing/2014/main" id="{F2F0C5F8-6CD1-0C8C-D21A-02ED6E5F53E2}"/>
+              </a:ext>
+            </a:extLst>
+          </p:cNvPr>
+          <p:cNvGrpSpPr/>
+          <p:nvPr/>
+        </p:nvGrpSpPr>
+        <p:grpSpPr>
+          <a:xfrm>
+            <a:off x="8544456" y="1967674"/>
+            <a:ext cx="3549222" cy="1069258"/>
+            <a:chOff x="6656439" y="3394547"/>
+            <a:chExt cx="4564296" cy="2120772"/>
+          </a:xfrm>
+        </p:grpSpPr>
+        <p:sp>
+          <p:nvSpPr>
+            <p:cNvPr id="29" name="椭圆 28">
+              <a:extLst>
+                <a:ext uri="{FF2B5EF4-FFF2-40B4-BE49-F238E27FC236}">
+                  <a16:creationId xmlns:a16="http://schemas.microsoft.com/office/drawing/2014/main" id="{791B9B40-AAEA-21EC-E59C-C04B77F2F0DC}"/>
+                </a:ext>
+              </a:extLst>
+            </p:cNvPr>
+            <p:cNvSpPr/>
+            <p:nvPr/>
+          </p:nvSpPr>
+          <p:spPr>
+            <a:xfrm>
+              <a:off x="6656439" y="3394547"/>
+              <a:ext cx="4564296" cy="2120772"/>
+            </a:xfrm>
+            <a:prstGeom prst="ellipse">
+              <a:avLst/>
+            </a:prstGeom>
+            <a:solidFill>
+              <a:schemeClr val="bg1"/>
+            </a:solidFill>
+          </p:spPr>
+          <p:style>
+            <a:lnRef idx="2">
+              <a:schemeClr val="accent1">
+                <a:shade val="15000"/>
+              </a:schemeClr>
+            </a:lnRef>
+            <a:fillRef idx="1">
+              <a:schemeClr val="accent1"/>
+            </a:fillRef>
+            <a:effectRef idx="0">
+              <a:schemeClr val="accent1"/>
+            </a:effectRef>
+            <a:fontRef idx="minor">
+              <a:schemeClr val="lt1"/>
+            </a:fontRef>
+          </p:style>
+          <p:txBody>
+            <a:bodyPr rtlCol="0" anchor="ctr"/>
+            <a:lstStyle/>
+            <a:p>
+              <a:pPr algn="ctr"/>
+              <a:endParaRPr lang="zh-CN" altLang="en-US"/>
+            </a:p>
+          </p:txBody>
+        </p:sp>
+        <p:pic>
+          <p:nvPicPr>
+            <p:cNvPr id="30" name="图形 29" descr="机器人 纯色填充">
+              <a:extLst>
+                <a:ext uri="{FF2B5EF4-FFF2-40B4-BE49-F238E27FC236}">
+                  <a16:creationId xmlns:a16="http://schemas.microsoft.com/office/drawing/2014/main" id="{FDC2CA4C-D9FD-652D-D9F7-B40DE80B2BCB}"/>
+                </a:ext>
+              </a:extLst>
+            </p:cNvPr>
+            <p:cNvPicPr>
+              <a:picLocks noChangeAspect="1"/>
+            </p:cNvPicPr>
+            <p:nvPr/>
+          </p:nvPicPr>
+          <p:blipFill>
+            <a:blip r:embed="rId2">
+              <a:extLst>
+                <a:ext uri="{96DAC541-7B7A-43D3-8B79-37D633B846F1}">
+                  <asvg:svgBlip xmlns:asvg="http://schemas.microsoft.com/office/drawing/2016/SVG/main" r:embed="rId3"/>
+                </a:ext>
+              </a:extLst>
+            </a:blip>
+            <a:stretch>
+              <a:fillRect/>
+            </a:stretch>
+          </p:blipFill>
+          <p:spPr>
+            <a:xfrm>
+              <a:off x="7369277" y="3543197"/>
+              <a:ext cx="914400" cy="914400"/>
+            </a:xfrm>
+            <a:prstGeom prst="rect">
+              <a:avLst/>
+            </a:prstGeom>
+          </p:spPr>
+        </p:pic>
+        <p:pic>
+          <p:nvPicPr>
+            <p:cNvPr id="31" name="图形 30" descr="机器人 纯色填充">
+              <a:extLst>
+                <a:ext uri="{FF2B5EF4-FFF2-40B4-BE49-F238E27FC236}">
+                  <a16:creationId xmlns:a16="http://schemas.microsoft.com/office/drawing/2014/main" id="{BD4E682C-4AFF-23A6-8CF1-77550C03CE2D}"/>
+                </a:ext>
+              </a:extLst>
+            </p:cNvPr>
+            <p:cNvPicPr>
+              <a:picLocks noChangeAspect="1"/>
+            </p:cNvPicPr>
+            <p:nvPr/>
+          </p:nvPicPr>
+          <p:blipFill>
+            <a:blip r:embed="rId4">
+              <a:extLst>
+                <a:ext uri="{96DAC541-7B7A-43D3-8B79-37D633B846F1}">
+                  <asvg:svgBlip xmlns:asvg="http://schemas.microsoft.com/office/drawing/2016/SVG/main" r:embed="rId5"/>
+                </a:ext>
+              </a:extLst>
+            </a:blip>
+            <a:stretch>
+              <a:fillRect/>
+            </a:stretch>
+          </p:blipFill>
+          <p:spPr>
+            <a:xfrm>
+              <a:off x="8008374" y="3543197"/>
+              <a:ext cx="914400" cy="914400"/>
+            </a:xfrm>
+            <a:prstGeom prst="rect">
+              <a:avLst/>
+            </a:prstGeom>
+          </p:spPr>
+        </p:pic>
+        <p:pic>
+          <p:nvPicPr>
+            <p:cNvPr id="32" name="图形 31" descr="机器人 纯色填充">
+              <a:extLst>
+                <a:ext uri="{FF2B5EF4-FFF2-40B4-BE49-F238E27FC236}">
+                  <a16:creationId xmlns:a16="http://schemas.microsoft.com/office/drawing/2014/main" id="{23459BAA-8612-D2F5-CFCE-083F352053EA}"/>
+                </a:ext>
+              </a:extLst>
+            </p:cNvPr>
+            <p:cNvPicPr>
+              <a:picLocks noChangeAspect="1"/>
+            </p:cNvPicPr>
+            <p:nvPr/>
+          </p:nvPicPr>
+          <p:blipFill>
+            <a:blip r:embed="rId6">
+              <a:extLst>
+                <a:ext uri="{96DAC541-7B7A-43D3-8B79-37D633B846F1}">
+                  <asvg:svgBlip xmlns:asvg="http://schemas.microsoft.com/office/drawing/2016/SVG/main" r:embed="rId7"/>
+                </a:ext>
+              </a:extLst>
+            </a:blip>
+            <a:stretch>
+              <a:fillRect/>
+            </a:stretch>
+          </p:blipFill>
+          <p:spPr>
+            <a:xfrm>
+              <a:off x="8647471" y="3541865"/>
+              <a:ext cx="914400" cy="914400"/>
+            </a:xfrm>
+            <a:prstGeom prst="rect">
+              <a:avLst/>
+            </a:prstGeom>
+          </p:spPr>
+        </p:pic>
+        <p:pic>
+          <p:nvPicPr>
+            <p:cNvPr id="33" name="图形 32" descr="机器人 纯色填充">
+              <a:extLst>
+                <a:ext uri="{FF2B5EF4-FFF2-40B4-BE49-F238E27FC236}">
+                  <a16:creationId xmlns:a16="http://schemas.microsoft.com/office/drawing/2014/main" id="{F1B53883-244B-C2F0-02AD-4F5FB56FBC53}"/>
+                </a:ext>
+              </a:extLst>
+            </p:cNvPr>
+            <p:cNvPicPr>
+              <a:picLocks noChangeAspect="1"/>
+            </p:cNvPicPr>
+            <p:nvPr/>
+          </p:nvPicPr>
+          <p:blipFill>
+            <a:blip r:embed="rId8">
+              <a:extLst>
+                <a:ext uri="{96DAC541-7B7A-43D3-8B79-37D633B846F1}">
+                  <asvg:svgBlip xmlns:asvg="http://schemas.microsoft.com/office/drawing/2016/SVG/main" r:embed="rId9"/>
+                </a:ext>
+              </a:extLst>
+            </a:blip>
+            <a:stretch>
+              <a:fillRect/>
+            </a:stretch>
+          </p:blipFill>
+          <p:spPr>
+            <a:xfrm>
+              <a:off x="9207910" y="3540533"/>
+              <a:ext cx="914400" cy="914400"/>
+            </a:xfrm>
+            <a:prstGeom prst="rect">
+              <a:avLst/>
+            </a:prstGeom>
+          </p:spPr>
+        </p:pic>
+        <p:sp>
+          <p:nvSpPr>
+            <p:cNvPr id="34" name="矩形 33">
+              <a:extLst>
+                <a:ext uri="{FF2B5EF4-FFF2-40B4-BE49-F238E27FC236}">
+                  <a16:creationId xmlns:a16="http://schemas.microsoft.com/office/drawing/2014/main" id="{EF570E48-6CA9-43D0-5C3F-F0C67C89105E}"/>
+                </a:ext>
+              </a:extLst>
+            </p:cNvPr>
+            <p:cNvSpPr/>
+            <p:nvPr/>
+          </p:nvSpPr>
+          <p:spPr>
+            <a:xfrm>
+              <a:off x="7844105" y="4625315"/>
+              <a:ext cx="1278192" cy="559694"/>
+            </a:xfrm>
+            <a:prstGeom prst="rect">
+              <a:avLst/>
+            </a:prstGeom>
+            <a:noFill/>
+          </p:spPr>
+          <p:txBody>
+            <a:bodyPr wrap="square" lIns="91440" tIns="45720" rIns="91440" bIns="45720">
+              <a:spAutoFit/>
+            </a:bodyPr>
+            <a:lstStyle/>
+            <a:p>
+              <a:pPr algn="ctr"/>
+              <a:r>
+                <a:rPr lang="en-US" altLang="zh-CN" sz="1200" b="0" cap="none" spc="0" dirty="0">
+                  <a:ln w="0"/>
+                  <a:solidFill>
+                    <a:schemeClr val="accent1"/>
+                  </a:solidFill>
+                  <a:effectLst>
+                    <a:outerShdw blurRad="38100" dist="25400" dir="5400000" algn="ctr" rotWithShape="0">
+                      <a:srgbClr val="6E747A">
+                        <a:alpha val="43000"/>
+                      </a:srgbClr>
+                    </a:outerShdw>
+                  </a:effectLst>
+                </a:rPr>
+                <a:t>security</a:t>
+              </a:r>
+              <a:endParaRPr lang="zh-CN" altLang="en-US" sz="1200" b="0" cap="none" spc="0" dirty="0">
+                <a:ln w="0"/>
+                <a:solidFill>
+                  <a:schemeClr val="accent1"/>
+                </a:solidFill>
+                <a:effectLst>
+                  <a:outerShdw blurRad="38100" dist="25400" dir="5400000" algn="ctr" rotWithShape="0">
+                    <a:srgbClr val="6E747A">
+                      <a:alpha val="43000"/>
+                    </a:srgbClr>
+                  </a:outerShdw>
+                </a:effectLst>
+              </a:endParaRPr>
+            </a:p>
+          </p:txBody>
+        </p:sp>
+        <p:sp>
+          <p:nvSpPr>
+            <p:cNvPr id="35" name="矩形 34">
+              <a:extLst>
+                <a:ext uri="{FF2B5EF4-FFF2-40B4-BE49-F238E27FC236}">
+                  <a16:creationId xmlns:a16="http://schemas.microsoft.com/office/drawing/2014/main" id="{B77D3FC0-50B9-2433-2EE7-640E55BE7584}"/>
+                </a:ext>
+              </a:extLst>
+            </p:cNvPr>
+            <p:cNvSpPr/>
+            <p:nvPr/>
+          </p:nvSpPr>
+          <p:spPr>
+            <a:xfrm>
+              <a:off x="9227244" y="4606502"/>
+              <a:ext cx="1920887" cy="559694"/>
+            </a:xfrm>
+            <a:prstGeom prst="rect">
+              <a:avLst/>
+            </a:prstGeom>
+            <a:noFill/>
+          </p:spPr>
+          <p:txBody>
+            <a:bodyPr wrap="square" lIns="91440" tIns="45720" rIns="91440" bIns="45720">
+              <a:spAutoFit/>
+            </a:bodyPr>
+            <a:lstStyle/>
+            <a:p>
+              <a:pPr algn="ctr"/>
+              <a:r>
+                <a:rPr lang="en-US" altLang="zh-CN" sz="1200" dirty="0">
+                  <a:ln w="0"/>
+                  <a:solidFill>
+                    <a:schemeClr val="accent1"/>
+                  </a:solidFill>
+                  <a:effectLst>
+                    <a:outerShdw blurRad="38100" dist="25400" dir="5400000" algn="ctr" rotWithShape="0">
+                      <a:srgbClr val="6E747A">
+                        <a:alpha val="43000"/>
+                      </a:srgbClr>
+                    </a:outerShdw>
+                  </a:effectLst>
+                </a:rPr>
+                <a:t>performance</a:t>
+              </a:r>
+              <a:endParaRPr lang="zh-CN" altLang="en-US" sz="1200" b="0" cap="none" spc="0" dirty="0">
+                <a:ln w="0"/>
+                <a:solidFill>
+                  <a:schemeClr val="accent1"/>
+                </a:solidFill>
+                <a:effectLst>
+                  <a:outerShdw blurRad="38100" dist="25400" dir="5400000" algn="ctr" rotWithShape="0">
+                    <a:srgbClr val="6E747A">
+                      <a:alpha val="43000"/>
+                    </a:srgbClr>
+                  </a:outerShdw>
+                </a:effectLst>
+              </a:endParaRPr>
+            </a:p>
+          </p:txBody>
+        </p:sp>
+        <p:sp>
+          <p:nvSpPr>
+            <p:cNvPr id="36" name="矩形 35">
+              <a:extLst>
+                <a:ext uri="{FF2B5EF4-FFF2-40B4-BE49-F238E27FC236}">
+                  <a16:creationId xmlns:a16="http://schemas.microsoft.com/office/drawing/2014/main" id="{C895FF9B-374E-13BC-9C93-60CDEB7D6E49}"/>
+                </a:ext>
+              </a:extLst>
+            </p:cNvPr>
+            <p:cNvSpPr/>
+            <p:nvPr/>
+          </p:nvSpPr>
+          <p:spPr>
+            <a:xfrm>
+              <a:off x="8608142" y="4315755"/>
+              <a:ext cx="914400" cy="559694"/>
+            </a:xfrm>
+            <a:prstGeom prst="rect">
+              <a:avLst/>
+            </a:prstGeom>
+            <a:noFill/>
+          </p:spPr>
+          <p:txBody>
+            <a:bodyPr wrap="square" lIns="91440" tIns="45720" rIns="91440" bIns="45720">
+              <a:spAutoFit/>
+            </a:bodyPr>
+            <a:lstStyle/>
+            <a:p>
+              <a:pPr algn="ctr"/>
+              <a:r>
+                <a:rPr lang="en-US" altLang="zh-CN" sz="1200" dirty="0">
+                  <a:ln w="0"/>
+                  <a:solidFill>
+                    <a:schemeClr val="accent1"/>
+                  </a:solidFill>
+                  <a:effectLst>
+                    <a:outerShdw blurRad="38100" dist="25400" dir="5400000" algn="ctr" rotWithShape="0">
+                      <a:srgbClr val="6E747A">
+                        <a:alpha val="43000"/>
+                      </a:srgbClr>
+                    </a:outerShdw>
+                  </a:effectLst>
+                </a:rPr>
+                <a:t>style</a:t>
+              </a:r>
+              <a:endParaRPr lang="zh-CN" altLang="en-US" sz="1200" b="0" cap="none" spc="0" dirty="0">
+                <a:ln w="0"/>
+                <a:solidFill>
+                  <a:schemeClr val="accent1"/>
+                </a:solidFill>
+                <a:effectLst>
+                  <a:outerShdw blurRad="38100" dist="25400" dir="5400000" algn="ctr" rotWithShape="0">
+                    <a:srgbClr val="6E747A">
+                      <a:alpha val="43000"/>
+                    </a:srgbClr>
+                  </a:outerShdw>
+                </a:effectLst>
+              </a:endParaRPr>
+            </a:p>
+          </p:txBody>
+        </p:sp>
+        <p:sp>
+          <p:nvSpPr>
+            <p:cNvPr id="37" name="矩形 36">
+              <a:extLst>
+                <a:ext uri="{FF2B5EF4-FFF2-40B4-BE49-F238E27FC236}">
+                  <a16:creationId xmlns:a16="http://schemas.microsoft.com/office/drawing/2014/main" id="{1B3EF33E-076B-CD28-CB6C-514FBBC83926}"/>
+                </a:ext>
+              </a:extLst>
+            </p:cNvPr>
+            <p:cNvSpPr/>
+            <p:nvPr/>
+          </p:nvSpPr>
+          <p:spPr>
+            <a:xfrm>
+              <a:off x="6789504" y="4329290"/>
+              <a:ext cx="1837972" cy="559694"/>
+            </a:xfrm>
+            <a:prstGeom prst="rect">
+              <a:avLst/>
+            </a:prstGeom>
+            <a:noFill/>
+          </p:spPr>
+          <p:txBody>
+            <a:bodyPr wrap="square" lIns="91440" tIns="45720" rIns="91440" bIns="45720">
+              <a:spAutoFit/>
+            </a:bodyPr>
+            <a:lstStyle/>
+            <a:p>
+              <a:pPr algn="ctr"/>
+              <a:r>
+                <a:rPr lang="en-US" altLang="zh-CN" sz="1200" dirty="0">
+                  <a:ln w="0"/>
+                  <a:solidFill>
+                    <a:schemeClr val="accent1"/>
+                  </a:solidFill>
+                  <a:effectLst>
+                    <a:outerShdw blurRad="38100" dist="25400" dir="5400000" algn="ctr" rotWithShape="0">
+                      <a:srgbClr val="6E747A">
+                        <a:alpha val="43000"/>
+                      </a:srgbClr>
+                    </a:outerShdw>
+                  </a:effectLst>
+                </a:rPr>
+                <a:t>functionality</a:t>
+              </a:r>
+              <a:endParaRPr lang="zh-CN" altLang="en-US" sz="1200" b="0" cap="none" spc="0" dirty="0">
+                <a:ln w="0"/>
+                <a:solidFill>
+                  <a:schemeClr val="accent1"/>
+                </a:solidFill>
+                <a:effectLst>
+                  <a:outerShdw blurRad="38100" dist="25400" dir="5400000" algn="ctr" rotWithShape="0">
+                    <a:srgbClr val="6E747A">
+                      <a:alpha val="43000"/>
+                    </a:srgbClr>
+                  </a:outerShdw>
+                </a:effectLst>
+              </a:endParaRPr>
+            </a:p>
+          </p:txBody>
+        </p:sp>
+      </p:grpSp>
+      <p:pic>
+        <p:nvPicPr>
+          <p:cNvPr id="38" name="图形 37" descr="用户 纯色填充">
+            <a:extLst>
+              <a:ext uri="{FF2B5EF4-FFF2-40B4-BE49-F238E27FC236}">
+                <a16:creationId xmlns:a16="http://schemas.microsoft.com/office/drawing/2014/main" id="{B4C96D25-E2BE-D8A1-E3CA-E01C53A31273}"/>
+              </a:ext>
+            </a:extLst>
+          </p:cNvPr>
+          <p:cNvPicPr>
+            <a:picLocks noChangeAspect="1"/>
+          </p:cNvPicPr>
+          <p:nvPr/>
+        </p:nvPicPr>
+        <p:blipFill>
+          <a:blip r:embed="rId10">
+            <a:extLst>
+              <a:ext uri="{96DAC541-7B7A-43D3-8B79-37D633B846F1}">
+                <asvg:svgBlip xmlns:asvg="http://schemas.microsoft.com/office/drawing/2016/SVG/main" r:embed="rId11"/>
+              </a:ext>
+            </a:extLst>
+          </a:blip>
+          <a:stretch>
+            <a:fillRect/>
+          </a:stretch>
+        </p:blipFill>
+        <p:spPr>
+          <a:xfrm>
+            <a:off x="7121513" y="2093958"/>
+            <a:ext cx="602520" cy="602520"/>
+          </a:xfrm>
+          <a:prstGeom prst="rect">
+            <a:avLst/>
+          </a:prstGeom>
+        </p:spPr>
+      </p:pic>
+      <p:sp>
+        <p:nvSpPr>
+          <p:cNvPr id="39" name="矩形 38">
+            <a:extLst>
+              <a:ext uri="{FF2B5EF4-FFF2-40B4-BE49-F238E27FC236}">
+                <a16:creationId xmlns:a16="http://schemas.microsoft.com/office/drawing/2014/main" id="{77EB8210-A93D-38BD-598A-03B5DC0866AA}"/>
+              </a:ext>
+            </a:extLst>
+          </p:cNvPr>
+          <p:cNvSpPr/>
+          <p:nvPr/>
+        </p:nvSpPr>
+        <p:spPr>
+          <a:xfrm>
+            <a:off x="6695171" y="2640543"/>
+            <a:ext cx="1514987" cy="338554"/>
+          </a:xfrm>
+          <a:prstGeom prst="rect">
+            <a:avLst/>
+          </a:prstGeom>
+          <a:noFill/>
+        </p:spPr>
+        <p:txBody>
+          <a:bodyPr wrap="square" lIns="91440" tIns="45720" rIns="91440" bIns="45720">
+            <a:spAutoFit/>
+          </a:bodyPr>
+          <a:lstStyle/>
+          <a:p>
+            <a:pPr algn="ctr"/>
+            <a:r>
+              <a:rPr lang="en-US" altLang="zh-CN" sz="1600" dirty="0">
+                <a:ln w="0"/>
+                <a:solidFill>
+                  <a:schemeClr val="accent1"/>
+                </a:solidFill>
+                <a:effectLst>
+                  <a:outerShdw blurRad="38100" dist="25400" dir="5400000" algn="ctr" rotWithShape="0">
+                    <a:srgbClr val="6E747A">
+                      <a:alpha val="43000"/>
+                    </a:srgbClr>
+                  </a:outerShdw>
+                </a:effectLst>
+              </a:rPr>
+              <a:t>contributor</a:t>
+            </a:r>
+            <a:endParaRPr lang="zh-CN" altLang="en-US" sz="1600" b="0" cap="none" spc="0" dirty="0">
+              <a:ln w="0"/>
+              <a:solidFill>
+                <a:schemeClr val="accent1"/>
+              </a:solidFill>
+              <a:effectLst>
+                <a:outerShdw blurRad="38100" dist="25400" dir="5400000" algn="ctr" rotWithShape="0">
+                  <a:srgbClr val="6E747A">
+                    <a:alpha val="43000"/>
+                  </a:srgbClr>
+                </a:outerShdw>
+              </a:effectLst>
+            </a:endParaRPr>
+          </a:p>
+        </p:txBody>
+      </p:sp>
+      <p:sp>
+        <p:nvSpPr>
+          <p:cNvPr id="40" name="矩形 39">
+            <a:extLst>
+              <a:ext uri="{FF2B5EF4-FFF2-40B4-BE49-F238E27FC236}">
+                <a16:creationId xmlns:a16="http://schemas.microsoft.com/office/drawing/2014/main" id="{160FB247-34F6-2C29-F752-D38BAB9684AC}"/>
+              </a:ext>
+            </a:extLst>
+          </p:cNvPr>
+          <p:cNvSpPr/>
+          <p:nvPr/>
+        </p:nvSpPr>
+        <p:spPr>
+          <a:xfrm>
+            <a:off x="6757150" y="3005751"/>
+            <a:ext cx="1192760" cy="369332"/>
+          </a:xfrm>
+          <a:prstGeom prst="rect">
+            <a:avLst/>
+          </a:prstGeom>
+          <a:solidFill>
+            <a:schemeClr val="accent2">
+              <a:lumMod val="75000"/>
+            </a:schemeClr>
+          </a:solidFill>
+        </p:spPr>
+        <p:style>
+          <a:lnRef idx="2">
+            <a:schemeClr val="accent1">
+              <a:shade val="15000"/>
+            </a:schemeClr>
+          </a:lnRef>
+          <a:fillRef idx="1">
+            <a:schemeClr val="accent1"/>
+          </a:fillRef>
+          <a:effectRef idx="0">
+            <a:schemeClr val="accent1"/>
+          </a:effectRef>
+          <a:fontRef idx="minor">
+            <a:schemeClr val="lt1"/>
+          </a:fontRef>
+        </p:style>
+        <p:txBody>
+          <a:bodyPr rtlCol="0" anchor="ctr"/>
+          <a:lstStyle/>
+          <a:p>
+            <a:pPr algn="ctr"/>
+            <a:r>
+              <a:rPr lang="en-US" altLang="zh-CN" sz="1200" dirty="0"/>
+              <a:t>1.Answer  2.Change</a:t>
+            </a:r>
+            <a:endParaRPr lang="zh-CN" altLang="en-US" sz="1200" dirty="0"/>
+          </a:p>
+        </p:txBody>
+      </p:sp>
+      <p:sp>
+        <p:nvSpPr>
+          <p:cNvPr id="41" name="矩形 40">
+            <a:extLst>
+              <a:ext uri="{FF2B5EF4-FFF2-40B4-BE49-F238E27FC236}">
+                <a16:creationId xmlns:a16="http://schemas.microsoft.com/office/drawing/2014/main" id="{2F0AAD30-AA71-20D5-7B74-CD779C388366}"/>
+              </a:ext>
+            </a:extLst>
+          </p:cNvPr>
+          <p:cNvSpPr/>
+          <p:nvPr/>
+        </p:nvSpPr>
+        <p:spPr>
+          <a:xfrm>
+            <a:off x="9804028" y="3185602"/>
+            <a:ext cx="1938252" cy="776798"/>
+          </a:xfrm>
+          <a:prstGeom prst="rect">
+            <a:avLst/>
+          </a:prstGeom>
+          <a:solidFill>
+            <a:schemeClr val="accent2">
+              <a:lumMod val="75000"/>
+            </a:schemeClr>
+          </a:solidFill>
+        </p:spPr>
+        <p:style>
+          <a:lnRef idx="2">
+            <a:schemeClr val="accent1">
+              <a:shade val="15000"/>
+            </a:schemeClr>
+          </a:lnRef>
+          <a:fillRef idx="1">
+            <a:schemeClr val="accent1"/>
+          </a:fillRef>
+          <a:effectRef idx="0">
+            <a:schemeClr val="accent1"/>
+          </a:effectRef>
+          <a:fontRef idx="minor">
+            <a:schemeClr val="lt1"/>
+          </a:fontRef>
+        </p:style>
+        <p:txBody>
+          <a:bodyPr lIns="137160" tIns="137160" rIns="137160" bIns="137160" rtlCol="0" anchor="t"/>
+          <a:lstStyle/>
+          <a:p>
+            <a:r>
+              <a:rPr lang="en-US" altLang="zh-CN" sz="1200" dirty="0"/>
+              <a:t>1.Question</a:t>
+            </a:r>
+          </a:p>
+          <a:p>
+            <a:r>
+              <a:rPr lang="en-US" altLang="zh-CN" sz="1200" dirty="0"/>
+              <a:t>2.Request Change</a:t>
+            </a:r>
+          </a:p>
+          <a:p>
+            <a:r>
+              <a:rPr lang="en-US" altLang="zh-CN" sz="1200" dirty="0"/>
+              <a:t>3.Approve</a:t>
+            </a:r>
+          </a:p>
+          <a:p>
+            <a:endParaRPr lang="zh-CN" altLang="en-US" sz="1200" dirty="0"/>
+          </a:p>
+        </p:txBody>
+      </p:sp>
+      <p:sp>
+        <p:nvSpPr>
+          <p:cNvPr id="42" name="矩形 41">
+            <a:extLst>
+              <a:ext uri="{FF2B5EF4-FFF2-40B4-BE49-F238E27FC236}">
+                <a16:creationId xmlns:a16="http://schemas.microsoft.com/office/drawing/2014/main" id="{8FBE5665-FC48-E229-1239-AA3BC71CEA3C}"/>
+              </a:ext>
+            </a:extLst>
+          </p:cNvPr>
+          <p:cNvSpPr/>
+          <p:nvPr/>
+        </p:nvSpPr>
+        <p:spPr>
+          <a:xfrm>
+            <a:off x="9831348" y="2821085"/>
+            <a:ext cx="1493692" cy="369332"/>
+          </a:xfrm>
+          <a:prstGeom prst="rect">
+            <a:avLst/>
+          </a:prstGeom>
+          <a:noFill/>
+        </p:spPr>
+        <p:txBody>
+          <a:bodyPr wrap="square" lIns="91440" tIns="45720" rIns="91440" bIns="45720">
+            <a:spAutoFit/>
+          </a:bodyPr>
+          <a:lstStyle/>
+          <a:p>
+            <a:pPr algn="ctr"/>
+            <a:r>
+              <a:rPr lang="en-US" altLang="zh-CN" b="0" cap="none" spc="0" dirty="0">
+                <a:ln w="0"/>
+                <a:solidFill>
+                  <a:schemeClr val="accent1"/>
+                </a:solidFill>
+                <a:effectLst>
+                  <a:outerShdw blurRad="38100" dist="25400" dir="5400000" algn="ctr" rotWithShape="0">
+                    <a:srgbClr val="6E747A">
+                      <a:alpha val="43000"/>
+                    </a:srgbClr>
+                  </a:outerShdw>
+                </a:effectLst>
+              </a:rPr>
+              <a:t>Actions</a:t>
+            </a:r>
+            <a:endParaRPr lang="zh-CN" altLang="en-US" b="0" cap="none" spc="0" dirty="0">
+              <a:ln w="0"/>
+              <a:solidFill>
+                <a:schemeClr val="accent1"/>
+              </a:solidFill>
+              <a:effectLst>
+                <a:outerShdw blurRad="38100" dist="25400" dir="5400000" algn="ctr" rotWithShape="0">
+                  <a:srgbClr val="6E747A">
+                    <a:alpha val="43000"/>
+                  </a:srgbClr>
+                </a:outerShdw>
+              </a:effectLst>
+            </a:endParaRPr>
+          </a:p>
+        </p:txBody>
+      </p:sp>
+      <p:sp>
+        <p:nvSpPr>
+          <p:cNvPr id="44" name="矩形 43">
+            <a:extLst>
+              <a:ext uri="{FF2B5EF4-FFF2-40B4-BE49-F238E27FC236}">
+                <a16:creationId xmlns:a16="http://schemas.microsoft.com/office/drawing/2014/main" id="{98ACCE5E-4FFD-B1F6-A24E-DBB8D90734E8}"/>
+              </a:ext>
+            </a:extLst>
+          </p:cNvPr>
+          <p:cNvSpPr/>
+          <p:nvPr/>
+        </p:nvSpPr>
+        <p:spPr>
+          <a:xfrm>
+            <a:off x="8314073" y="1080085"/>
+            <a:ext cx="1937555" cy="461665"/>
+          </a:xfrm>
+          <a:prstGeom prst="rect">
+            <a:avLst/>
+          </a:prstGeom>
+          <a:noFill/>
+        </p:spPr>
+        <p:txBody>
+          <a:bodyPr wrap="square" lIns="91440" tIns="45720" rIns="91440" bIns="45720">
+            <a:spAutoFit/>
+          </a:bodyPr>
+          <a:lstStyle/>
+          <a:p>
+            <a:pPr algn="ctr"/>
+            <a:r>
+              <a:rPr lang="en-US" altLang="zh-CN" sz="2400" dirty="0">
+                <a:ln w="0"/>
+                <a:solidFill>
+                  <a:schemeClr val="accent1"/>
+                </a:solidFill>
+                <a:effectLst>
+                  <a:outerShdw blurRad="38100" dist="25400" dir="5400000" algn="ctr" rotWithShape="0">
+                    <a:srgbClr val="6E747A">
+                      <a:alpha val="43000"/>
+                    </a:srgbClr>
+                  </a:outerShdw>
+                </a:effectLst>
+              </a:rPr>
+              <a:t>plan</a:t>
+            </a:r>
+            <a:endParaRPr lang="zh-CN" altLang="en-US" sz="2400" b="0" cap="none" spc="0" dirty="0">
+              <a:ln w="0"/>
+              <a:solidFill>
+                <a:schemeClr val="accent1"/>
+              </a:solidFill>
+              <a:effectLst>
+                <a:outerShdw blurRad="38100" dist="25400" dir="5400000" algn="ctr" rotWithShape="0">
+                  <a:srgbClr val="6E747A">
+                    <a:alpha val="43000"/>
+                  </a:srgbClr>
+                </a:outerShdw>
+              </a:effectLst>
+            </a:endParaRPr>
+          </a:p>
+        </p:txBody>
+      </p:sp>
+      <p:cxnSp>
+        <p:nvCxnSpPr>
+          <p:cNvPr id="46" name="直接箭头连接符 45">
+            <a:extLst>
+              <a:ext uri="{FF2B5EF4-FFF2-40B4-BE49-F238E27FC236}">
+                <a16:creationId xmlns:a16="http://schemas.microsoft.com/office/drawing/2014/main" id="{5712AD9C-A128-4F8F-2EA0-E33A5BA475BE}"/>
+              </a:ext>
+            </a:extLst>
+          </p:cNvPr>
+          <p:cNvCxnSpPr/>
+          <p:nvPr/>
+        </p:nvCxnSpPr>
+        <p:spPr>
+          <a:xfrm>
+            <a:off x="8013290" y="3091621"/>
+            <a:ext cx="1085473" cy="0"/>
+          </a:xfrm>
+          <a:prstGeom prst="straightConnector1">
+            <a:avLst/>
+          </a:prstGeom>
+          <a:ln>
+            <a:headEnd type="triangle"/>
+            <a:tailEnd type="triangle"/>
+          </a:ln>
+        </p:spPr>
+        <p:style>
+          <a:lnRef idx="1">
+            <a:schemeClr val="accent1"/>
+          </a:lnRef>
+          <a:fillRef idx="0">
+            <a:schemeClr val="accent1"/>
+          </a:fillRef>
+          <a:effectRef idx="0">
+            <a:schemeClr val="accent1"/>
+          </a:effectRef>
+          <a:fontRef idx="minor">
+            <a:schemeClr val="tx1"/>
+          </a:fontRef>
+        </p:style>
+      </p:cxnSp>
+      <p:cxnSp>
+        <p:nvCxnSpPr>
+          <p:cNvPr id="47" name="直接箭头连接符 46">
+            <a:extLst>
+              <a:ext uri="{FF2B5EF4-FFF2-40B4-BE49-F238E27FC236}">
+                <a16:creationId xmlns:a16="http://schemas.microsoft.com/office/drawing/2014/main" id="{91D660B6-0EF9-2437-B414-71650B15BC31}"/>
+              </a:ext>
+            </a:extLst>
+          </p:cNvPr>
+          <p:cNvCxnSpPr/>
+          <p:nvPr/>
+        </p:nvCxnSpPr>
+        <p:spPr>
+          <a:xfrm>
+            <a:off x="8013290" y="3273517"/>
+            <a:ext cx="1085473" cy="0"/>
+          </a:xfrm>
+          <a:prstGeom prst="straightConnector1">
+            <a:avLst/>
+          </a:prstGeom>
+          <a:ln>
+            <a:headEnd type="triangle"/>
+            <a:tailEnd type="triangle"/>
+          </a:ln>
+        </p:spPr>
+        <p:style>
+          <a:lnRef idx="1">
+            <a:schemeClr val="accent1"/>
+          </a:lnRef>
+          <a:fillRef idx="0">
+            <a:schemeClr val="accent1"/>
+          </a:fillRef>
+          <a:effectRef idx="0">
+            <a:schemeClr val="accent1"/>
+          </a:effectRef>
+          <a:fontRef idx="minor">
+            <a:schemeClr val="tx1"/>
+          </a:fontRef>
+        </p:style>
+      </p:cxnSp>
+      <p:sp>
+        <p:nvSpPr>
+          <p:cNvPr id="48" name="矩形: 圆角 47">
+            <a:extLst>
+              <a:ext uri="{FF2B5EF4-FFF2-40B4-BE49-F238E27FC236}">
+                <a16:creationId xmlns:a16="http://schemas.microsoft.com/office/drawing/2014/main" id="{985467CD-1A8E-89BB-D78C-8886659E7CF7}"/>
+              </a:ext>
+            </a:extLst>
+          </p:cNvPr>
+          <p:cNvSpPr/>
+          <p:nvPr/>
+        </p:nvSpPr>
+        <p:spPr>
+          <a:xfrm>
+            <a:off x="4051717" y="5155799"/>
+            <a:ext cx="1030740" cy="550607"/>
+          </a:xfrm>
+          <a:prstGeom prst="roundRect">
+            <a:avLst/>
+          </a:prstGeom>
+        </p:spPr>
+        <p:style>
+          <a:lnRef idx="2">
+            <a:schemeClr val="accent1">
+              <a:shade val="15000"/>
+            </a:schemeClr>
+          </a:lnRef>
+          <a:fillRef idx="1">
+            <a:schemeClr val="accent1"/>
+          </a:fillRef>
+          <a:effectRef idx="0">
+            <a:schemeClr val="accent1"/>
+          </a:effectRef>
+          <a:fontRef idx="minor">
+            <a:schemeClr val="lt1"/>
+          </a:fontRef>
+        </p:style>
+        <p:txBody>
+          <a:bodyPr rtlCol="0" anchor="ctr"/>
+          <a:lstStyle/>
+          <a:p>
+            <a:pPr algn="ctr"/>
+            <a:r>
+              <a:rPr lang="zh-CN" altLang="en-US" dirty="0"/>
+              <a:t>三元组</a:t>
+            </a:r>
+          </a:p>
+        </p:txBody>
+      </p:sp>
+      <p:cxnSp>
+        <p:nvCxnSpPr>
+          <p:cNvPr id="51" name="直接箭头连接符 50">
+            <a:extLst>
+              <a:ext uri="{FF2B5EF4-FFF2-40B4-BE49-F238E27FC236}">
+                <a16:creationId xmlns:a16="http://schemas.microsoft.com/office/drawing/2014/main" id="{3F39D42F-A285-2D78-81F1-58E26A36F829}"/>
+              </a:ext>
+            </a:extLst>
+          </p:cNvPr>
+          <p:cNvCxnSpPr/>
+          <p:nvPr/>
+        </p:nvCxnSpPr>
+        <p:spPr>
+          <a:xfrm flipV="1">
+            <a:off x="1691148" y="1967674"/>
+            <a:ext cx="1337187" cy="73604"/>
+          </a:xfrm>
+          <a:prstGeom prst="straightConnector1">
+            <a:avLst/>
+          </a:prstGeom>
+          <a:ln>
+            <a:tailEnd type="triangle"/>
+          </a:ln>
+        </p:spPr>
+        <p:style>
+          <a:lnRef idx="1">
+            <a:schemeClr val="accent1"/>
+          </a:lnRef>
+          <a:fillRef idx="0">
+            <a:schemeClr val="accent1"/>
+          </a:fillRef>
+          <a:effectRef idx="0">
+            <a:schemeClr val="accent1"/>
+          </a:effectRef>
+          <a:fontRef idx="minor">
+            <a:schemeClr val="tx1"/>
+          </a:fontRef>
+        </p:style>
+      </p:cxnSp>
+      <p:sp>
+        <p:nvSpPr>
+          <p:cNvPr id="52" name="箭头: 右 51">
+            <a:extLst>
+              <a:ext uri="{FF2B5EF4-FFF2-40B4-BE49-F238E27FC236}">
+                <a16:creationId xmlns:a16="http://schemas.microsoft.com/office/drawing/2014/main" id="{7716B40D-8924-FA43-BEC1-74AB57E6D079}"/>
+              </a:ext>
+            </a:extLst>
+          </p:cNvPr>
+          <p:cNvSpPr/>
+          <p:nvPr/>
+        </p:nvSpPr>
+        <p:spPr>
+          <a:xfrm>
+            <a:off x="2802194" y="2821085"/>
+            <a:ext cx="703636" cy="270536"/>
+          </a:xfrm>
+          <a:prstGeom prst="rightArrow">
+            <a:avLst/>
+          </a:prstGeom>
+        </p:spPr>
+        <p:style>
+          <a:lnRef idx="2">
+            <a:schemeClr val="accent1">
+              <a:shade val="15000"/>
+            </a:schemeClr>
+          </a:lnRef>
+          <a:fillRef idx="1">
+            <a:schemeClr val="accent1"/>
+          </a:fillRef>
+          <a:effectRef idx="0">
+            <a:schemeClr val="accent1"/>
+          </a:effectRef>
+          <a:fontRef idx="minor">
+            <a:schemeClr val="lt1"/>
+          </a:fontRef>
+        </p:style>
+        <p:txBody>
+          <a:bodyPr rtlCol="0" anchor="ctr"/>
+          <a:lstStyle/>
+          <a:p>
+            <a:pPr algn="ctr"/>
+            <a:endParaRPr lang="zh-CN" altLang="en-US"/>
+          </a:p>
+        </p:txBody>
+      </p:sp>
+      <p:sp>
+        <p:nvSpPr>
+          <p:cNvPr id="53" name="箭头: 右 52">
+            <a:extLst>
+              <a:ext uri="{FF2B5EF4-FFF2-40B4-BE49-F238E27FC236}">
+                <a16:creationId xmlns:a16="http://schemas.microsoft.com/office/drawing/2014/main" id="{C9950FE1-4539-BCA8-0B97-17E0D7AA6648}"/>
+              </a:ext>
+            </a:extLst>
+          </p:cNvPr>
+          <p:cNvSpPr/>
+          <p:nvPr/>
+        </p:nvSpPr>
+        <p:spPr>
+          <a:xfrm>
+            <a:off x="6121700" y="2877069"/>
+            <a:ext cx="676355" cy="230711"/>
+          </a:xfrm>
+          <a:prstGeom prst="rightArrow">
+            <a:avLst/>
+          </a:prstGeom>
+        </p:spPr>
+        <p:style>
+          <a:lnRef idx="2">
+            <a:schemeClr val="accent1">
+              <a:shade val="15000"/>
+            </a:schemeClr>
+          </a:lnRef>
+          <a:fillRef idx="1">
+            <a:schemeClr val="accent1"/>
+          </a:fillRef>
+          <a:effectRef idx="0">
+            <a:schemeClr val="accent1"/>
+          </a:effectRef>
+          <a:fontRef idx="minor">
+            <a:schemeClr val="lt1"/>
+          </a:fontRef>
+        </p:style>
+        <p:txBody>
+          <a:bodyPr rtlCol="0" anchor="ctr"/>
+          <a:lstStyle/>
+          <a:p>
+            <a:pPr algn="ctr"/>
+            <a:endParaRPr lang="zh-CN" altLang="en-US"/>
+          </a:p>
+        </p:txBody>
+      </p:sp>
+      <p:cxnSp>
+        <p:nvCxnSpPr>
+          <p:cNvPr id="60" name="直接箭头连接符 59">
+            <a:extLst>
+              <a:ext uri="{FF2B5EF4-FFF2-40B4-BE49-F238E27FC236}">
+                <a16:creationId xmlns:a16="http://schemas.microsoft.com/office/drawing/2014/main" id="{29448552-A17C-A7C3-9C2B-ED7C62AA4EB0}"/>
+              </a:ext>
+            </a:extLst>
+          </p:cNvPr>
+          <p:cNvCxnSpPr/>
+          <p:nvPr/>
+        </p:nvCxnSpPr>
+        <p:spPr>
+          <a:xfrm>
+            <a:off x="6121700" y="1782656"/>
+            <a:ext cx="180777" cy="1057258"/>
+          </a:xfrm>
+          <a:prstGeom prst="straightConnector1">
+            <a:avLst/>
+          </a:prstGeom>
+          <a:ln>
+            <a:tailEnd type="triangle"/>
+          </a:ln>
+        </p:spPr>
+        <p:style>
+          <a:lnRef idx="1">
+            <a:schemeClr val="accent1"/>
+          </a:lnRef>
+          <a:fillRef idx="0">
+            <a:schemeClr val="accent1"/>
+          </a:fillRef>
+          <a:effectRef idx="0">
+            <a:schemeClr val="accent1"/>
+          </a:effectRef>
+          <a:fontRef idx="minor">
+            <a:schemeClr val="tx1"/>
+          </a:fontRef>
+        </p:style>
+      </p:cxnSp>
+      <p:cxnSp>
+        <p:nvCxnSpPr>
+          <p:cNvPr id="62" name="直接箭头连接符 61">
+            <a:extLst>
+              <a:ext uri="{FF2B5EF4-FFF2-40B4-BE49-F238E27FC236}">
+                <a16:creationId xmlns:a16="http://schemas.microsoft.com/office/drawing/2014/main" id="{A2BC426F-D2EF-5897-FB2E-2FB385B9E230}"/>
+              </a:ext>
+            </a:extLst>
+          </p:cNvPr>
+          <p:cNvCxnSpPr/>
+          <p:nvPr/>
+        </p:nvCxnSpPr>
+        <p:spPr>
+          <a:xfrm flipV="1">
+            <a:off x="5270090" y="3185602"/>
+            <a:ext cx="1032387" cy="2163684"/>
+          </a:xfrm>
+          <a:prstGeom prst="straightConnector1">
+            <a:avLst/>
+          </a:prstGeom>
+          <a:ln>
+            <a:tailEnd type="triangle"/>
+          </a:ln>
+        </p:spPr>
+        <p:style>
+          <a:lnRef idx="1">
+            <a:schemeClr val="accent1"/>
+          </a:lnRef>
+          <a:fillRef idx="0">
+            <a:schemeClr val="accent1"/>
+          </a:fillRef>
+          <a:effectRef idx="0">
+            <a:schemeClr val="accent1"/>
+          </a:effectRef>
+          <a:fontRef idx="minor">
+            <a:schemeClr val="tx1"/>
+          </a:fontRef>
+        </p:style>
+      </p:cxnSp>
+      <p:cxnSp>
+        <p:nvCxnSpPr>
+          <p:cNvPr id="63" name="直接箭头连接符 62">
+            <a:extLst>
+              <a:ext uri="{FF2B5EF4-FFF2-40B4-BE49-F238E27FC236}">
+                <a16:creationId xmlns:a16="http://schemas.microsoft.com/office/drawing/2014/main" id="{55B050CA-11FB-789C-CEC3-32BC0B9786A3}"/>
+              </a:ext>
+            </a:extLst>
+          </p:cNvPr>
+          <p:cNvCxnSpPr>
+            <a:cxnSpLocks/>
+          </p:cNvCxnSpPr>
+          <p:nvPr/>
+        </p:nvCxnSpPr>
+        <p:spPr>
+          <a:xfrm flipV="1">
+            <a:off x="5901359" y="3117468"/>
+            <a:ext cx="335518" cy="126774"/>
+          </a:xfrm>
+          <a:prstGeom prst="straightConnector1">
+            <a:avLst/>
+          </a:prstGeom>
+          <a:ln>
+            <a:tailEnd type="triangle"/>
+          </a:ln>
+        </p:spPr>
+        <p:style>
+          <a:lnRef idx="1">
+            <a:schemeClr val="accent1"/>
+          </a:lnRef>
+          <a:fillRef idx="0">
+            <a:schemeClr val="accent1"/>
+          </a:fillRef>
+          <a:effectRef idx="0">
+            <a:schemeClr val="accent1"/>
+          </a:effectRef>
+          <a:fontRef idx="minor">
+            <a:schemeClr val="tx1"/>
+          </a:fontRef>
+        </p:style>
+      </p:cxnSp>
+      <p:sp>
+        <p:nvSpPr>
+          <p:cNvPr id="68" name="箭头: 右弧形 67">
+            <a:extLst>
+              <a:ext uri="{FF2B5EF4-FFF2-40B4-BE49-F238E27FC236}">
+                <a16:creationId xmlns:a16="http://schemas.microsoft.com/office/drawing/2014/main" id="{0DCBE249-D454-DD19-B242-855C8FA3987F}"/>
+              </a:ext>
+            </a:extLst>
+          </p:cNvPr>
+          <p:cNvSpPr/>
+          <p:nvPr/>
+        </p:nvSpPr>
+        <p:spPr>
+          <a:xfrm>
+            <a:off x="11330969" y="4290976"/>
+            <a:ext cx="609202" cy="1162718"/>
+          </a:xfrm>
+          <a:prstGeom prst="curvedLeftArrow">
+            <a:avLst/>
+          </a:prstGeom>
+        </p:spPr>
+        <p:style>
+          <a:lnRef idx="2">
+            <a:schemeClr val="accent1">
+              <a:shade val="15000"/>
+            </a:schemeClr>
+          </a:lnRef>
+          <a:fillRef idx="1">
+            <a:schemeClr val="accent1"/>
+          </a:fillRef>
+          <a:effectRef idx="0">
+            <a:schemeClr val="accent1"/>
+          </a:effectRef>
+          <a:fontRef idx="minor">
+            <a:schemeClr val="lt1"/>
+          </a:fontRef>
+        </p:style>
+        <p:txBody>
+          <a:bodyPr rtlCol="0" anchor="ctr"/>
+          <a:lstStyle/>
+          <a:p>
+            <a:pPr algn="ctr"/>
+            <a:endParaRPr lang="zh-CN" altLang="en-US">
+              <a:solidFill>
+                <a:schemeClr val="tx1"/>
+              </a:solidFill>
+            </a:endParaRPr>
+          </a:p>
+        </p:txBody>
+      </p:sp>
+      <p:pic>
+        <p:nvPicPr>
+          <p:cNvPr id="70" name="图形 69" descr="机器人 纯色填充">
+            <a:extLst>
+              <a:ext uri="{FF2B5EF4-FFF2-40B4-BE49-F238E27FC236}">
+                <a16:creationId xmlns:a16="http://schemas.microsoft.com/office/drawing/2014/main" id="{C705CC79-0C25-D66E-7A73-DCF167E5F63D}"/>
+              </a:ext>
+            </a:extLst>
+          </p:cNvPr>
+          <p:cNvPicPr>
+            <a:picLocks noChangeAspect="1"/>
+          </p:cNvPicPr>
+          <p:nvPr/>
+        </p:nvPicPr>
+        <p:blipFill>
+          <a:blip r:embed="rId12">
+            <a:extLst>
+              <a:ext uri="{96DAC541-7B7A-43D3-8B79-37D633B846F1}">
+                <asvg:svgBlip xmlns:asvg="http://schemas.microsoft.com/office/drawing/2016/SVG/main" r:embed="rId13"/>
+              </a:ext>
+            </a:extLst>
+          </a:blip>
+          <a:stretch>
+            <a:fillRect/>
+          </a:stretch>
+        </p:blipFill>
+        <p:spPr>
+          <a:xfrm>
+            <a:off x="10297336" y="5212319"/>
+            <a:ext cx="669740" cy="669740"/>
+          </a:xfrm>
+          <a:prstGeom prst="rect">
+            <a:avLst/>
+          </a:prstGeom>
+        </p:spPr>
+      </p:pic>
+      <p:sp>
+        <p:nvSpPr>
+          <p:cNvPr id="72" name="文本框 71">
+            <a:extLst>
+              <a:ext uri="{FF2B5EF4-FFF2-40B4-BE49-F238E27FC236}">
+                <a16:creationId xmlns:a16="http://schemas.microsoft.com/office/drawing/2014/main" id="{B6E245B8-E912-FD11-EA2C-E18EC94D6E3B}"/>
+              </a:ext>
+            </a:extLst>
+          </p:cNvPr>
+          <p:cNvSpPr txBox="1"/>
+          <p:nvPr/>
+        </p:nvSpPr>
+        <p:spPr>
+          <a:xfrm>
+            <a:off x="9332581" y="5777915"/>
+            <a:ext cx="2607587" cy="369332"/>
+          </a:xfrm>
+          <a:prstGeom prst="rect">
+            <a:avLst/>
+          </a:prstGeom>
+          <a:noFill/>
+        </p:spPr>
+        <p:txBody>
+          <a:bodyPr wrap="square">
+            <a:spAutoFit/>
+          </a:bodyPr>
+          <a:lstStyle/>
+          <a:p>
+            <a:pPr algn="ctr"/>
+            <a:r>
+              <a:rPr lang="en-US" altLang="zh-CN" sz="1800" dirty="0">
+                <a:ln w="0"/>
+                <a:solidFill>
+                  <a:schemeClr val="accent1"/>
+                </a:solidFill>
+                <a:effectLst>
+                  <a:outerShdw blurRad="38100" dist="25400" dir="5400000" algn="ctr" rotWithShape="0">
+                    <a:srgbClr val="6E747A">
+                      <a:alpha val="43000"/>
+                    </a:srgbClr>
+                  </a:outerShdw>
+                </a:effectLst>
+              </a:rPr>
+              <a:t>Validate and Being clear</a:t>
+            </a:r>
+            <a:endParaRPr lang="zh-CN" altLang="en-US" sz="1800" b="0" cap="none" spc="0" dirty="0">
+              <a:ln w="0"/>
+              <a:solidFill>
+                <a:schemeClr val="accent1"/>
+              </a:solidFill>
+              <a:effectLst>
+                <a:outerShdw blurRad="38100" dist="25400" dir="5400000" algn="ctr" rotWithShape="0">
+                  <a:srgbClr val="6E747A">
+                    <a:alpha val="43000"/>
+                  </a:srgbClr>
+                </a:outerShdw>
+              </a:effectLst>
+            </a:endParaRPr>
+          </a:p>
+        </p:txBody>
+      </p:sp>
+      <p:sp>
+        <p:nvSpPr>
+          <p:cNvPr id="73" name="矩形 72">
+            <a:extLst>
+              <a:ext uri="{FF2B5EF4-FFF2-40B4-BE49-F238E27FC236}">
+                <a16:creationId xmlns:a16="http://schemas.microsoft.com/office/drawing/2014/main" id="{34A141EA-8BD3-CFE6-FDB7-719F72E2682C}"/>
+              </a:ext>
+            </a:extLst>
+          </p:cNvPr>
+          <p:cNvSpPr/>
+          <p:nvPr/>
+        </p:nvSpPr>
+        <p:spPr>
+          <a:xfrm>
+            <a:off x="6798055" y="5212320"/>
+            <a:ext cx="2170631" cy="772530"/>
+          </a:xfrm>
+          <a:prstGeom prst="rect">
+            <a:avLst/>
+          </a:prstGeom>
+          <a:solidFill>
+            <a:srgbClr val="92D050"/>
+          </a:solidFill>
+        </p:spPr>
+        <p:style>
+          <a:lnRef idx="2">
+            <a:schemeClr val="accent1">
+              <a:shade val="15000"/>
+            </a:schemeClr>
+          </a:lnRef>
+          <a:fillRef idx="1">
+            <a:schemeClr val="accent1"/>
+          </a:fillRef>
+          <a:effectRef idx="0">
+            <a:schemeClr val="accent1"/>
+          </a:effectRef>
+          <a:fontRef idx="minor">
+            <a:schemeClr val="lt1"/>
+          </a:fontRef>
+        </p:style>
+        <p:txBody>
+          <a:bodyPr rtlCol="0" anchor="ctr"/>
+          <a:lstStyle/>
+          <a:p>
+            <a:pPr algn="ctr"/>
+            <a:r>
+              <a:rPr lang="en-US" altLang="zh-CN" sz="1600" dirty="0" err="1">
+                <a:solidFill>
+                  <a:schemeClr val="tx1"/>
+                </a:solidFill>
+              </a:rPr>
+              <a:t>review_comment</a:t>
+            </a:r>
+            <a:endParaRPr lang="en-US" altLang="zh-CN" sz="1600" dirty="0">
+              <a:solidFill>
+                <a:schemeClr val="tx1"/>
+              </a:solidFill>
+            </a:endParaRPr>
+          </a:p>
+          <a:p>
+            <a:pPr algn="ctr"/>
+            <a:r>
+              <a:rPr lang="en-US" altLang="zh-CN" sz="1600" dirty="0" err="1">
+                <a:solidFill>
+                  <a:schemeClr val="tx1"/>
+                </a:solidFill>
+              </a:rPr>
+              <a:t>revised_code</a:t>
+            </a:r>
+            <a:endParaRPr lang="zh-CN" altLang="en-US" sz="1600" dirty="0">
+              <a:solidFill>
+                <a:schemeClr val="tx1"/>
+              </a:solidFill>
+            </a:endParaRPr>
+          </a:p>
+        </p:txBody>
+      </p:sp>
+      <p:cxnSp>
+        <p:nvCxnSpPr>
+          <p:cNvPr id="75" name="直接箭头连接符 74">
+            <a:extLst>
+              <a:ext uri="{FF2B5EF4-FFF2-40B4-BE49-F238E27FC236}">
+                <a16:creationId xmlns:a16="http://schemas.microsoft.com/office/drawing/2014/main" id="{C977C908-844F-AA2E-7DAC-2D07A2CCF666}"/>
+              </a:ext>
+            </a:extLst>
+          </p:cNvPr>
+          <p:cNvCxnSpPr>
+            <a:cxnSpLocks/>
+          </p:cNvCxnSpPr>
+          <p:nvPr/>
+        </p:nvCxnSpPr>
+        <p:spPr>
+          <a:xfrm flipH="1">
+            <a:off x="9098763" y="5675111"/>
+            <a:ext cx="864683" cy="0"/>
+          </a:xfrm>
+          <a:prstGeom prst="straightConnector1">
+            <a:avLst/>
+          </a:prstGeom>
+          <a:ln>
+            <a:tailEnd type="triangle"/>
+          </a:ln>
+        </p:spPr>
+        <p:style>
+          <a:lnRef idx="1">
+            <a:schemeClr val="accent1"/>
+          </a:lnRef>
+          <a:fillRef idx="0">
+            <a:schemeClr val="accent1"/>
+          </a:fillRef>
+          <a:effectRef idx="0">
+            <a:schemeClr val="accent1"/>
+          </a:effectRef>
+          <a:fontRef idx="minor">
+            <a:schemeClr val="tx1"/>
+          </a:fontRef>
+        </p:style>
+      </p:cxnSp>
+    </p:spTree>
+    <p:extLst>
+      <p:ext uri="{BB962C8B-B14F-4D97-AF65-F5344CB8AC3E}">
+        <p14:creationId xmlns:p14="http://schemas.microsoft.com/office/powerpoint/2010/main" val="2927476381"/>
+      </p:ext>
+    </p:extLst>
+  </p:cSld>
+  <p:clrMapOvr>
+    <a:masterClrMapping/>
+  </p:clrMapOvr>
+</p:sld>
+</file>
+
 <file path=ppt/slides/slide2.xml><?xml version="1.0" encoding="utf-8"?>
 <p:sld xmlns:a="http://schemas.openxmlformats.org/drawingml/2006/main" xmlns:r="http://schemas.openxmlformats.org/officeDocument/2006/relationships" xmlns:p="http://schemas.openxmlformats.org/presentationml/2006/main">
   <p:cSld>
@@ -10214,6 +12355,1594 @@
     <p:extLst>
       <p:ext uri="{BB962C8B-B14F-4D97-AF65-F5344CB8AC3E}">
         <p14:creationId xmlns:p14="http://schemas.microsoft.com/office/powerpoint/2010/main" val="2359137102"/>
+      </p:ext>
+    </p:extLst>
+  </p:cSld>
+  <p:clrMapOvr>
+    <a:masterClrMapping/>
+  </p:clrMapOvr>
+</p:sld>
+</file>
+
+<file path=ppt/slides/slide6.xml><?xml version="1.0" encoding="utf-8"?>
+<p:sld xmlns:a="http://schemas.openxmlformats.org/drawingml/2006/main" xmlns:r="http://schemas.openxmlformats.org/officeDocument/2006/relationships" xmlns:p="http://schemas.openxmlformats.org/presentationml/2006/main">
+  <p:cSld>
+    <p:spTree>
+      <p:nvGrpSpPr>
+        <p:cNvPr id="1" name=""/>
+        <p:cNvGrpSpPr/>
+        <p:nvPr/>
+      </p:nvGrpSpPr>
+      <p:grpSpPr>
+        <a:xfrm>
+          <a:off x="0" y="0"/>
+          <a:ext cx="0" cy="0"/>
+          <a:chOff x="0" y="0"/>
+          <a:chExt cx="0" cy="0"/>
+        </a:xfrm>
+      </p:grpSpPr>
+      <p:sp>
+        <p:nvSpPr>
+          <p:cNvPr id="2" name="标题 1">
+            <a:extLst>
+              <a:ext uri="{FF2B5EF4-FFF2-40B4-BE49-F238E27FC236}">
+                <a16:creationId xmlns:a16="http://schemas.microsoft.com/office/drawing/2014/main" id="{E08CED3F-3E99-CE30-1897-90DF8536A2DB}"/>
+              </a:ext>
+            </a:extLst>
+          </p:cNvPr>
+          <p:cNvSpPr>
+            <a:spLocks noGrp="1"/>
+          </p:cNvSpPr>
+          <p:nvPr>
+            <p:ph type="title"/>
+          </p:nvPr>
+        </p:nvSpPr>
+        <p:spPr/>
+        <p:txBody>
+          <a:bodyPr/>
+          <a:lstStyle/>
+          <a:p>
+            <a:r>
+              <a:rPr lang="zh-CN" altLang="en-US" dirty="0"/>
+              <a:t>数据收集</a:t>
+            </a:r>
+          </a:p>
+        </p:txBody>
+      </p:sp>
+      <p:pic>
+        <p:nvPicPr>
+          <p:cNvPr id="7" name="图片 6">
+            <a:extLst>
+              <a:ext uri="{FF2B5EF4-FFF2-40B4-BE49-F238E27FC236}">
+                <a16:creationId xmlns:a16="http://schemas.microsoft.com/office/drawing/2014/main" id="{98DA0610-3FA2-4FC8-91EB-C435E80774DC}"/>
+              </a:ext>
+            </a:extLst>
+          </p:cNvPr>
+          <p:cNvPicPr>
+            <a:picLocks noChangeAspect="1"/>
+          </p:cNvPicPr>
+          <p:nvPr/>
+        </p:nvPicPr>
+        <p:blipFill>
+          <a:blip r:embed="rId2"/>
+          <a:stretch>
+            <a:fillRect/>
+          </a:stretch>
+        </p:blipFill>
+        <p:spPr>
+          <a:xfrm>
+            <a:off x="1017494" y="2435879"/>
+            <a:ext cx="6067425" cy="2495350"/>
+          </a:xfrm>
+          <a:prstGeom prst="rect">
+            <a:avLst/>
+          </a:prstGeom>
+        </p:spPr>
+      </p:pic>
+      <p:sp>
+        <p:nvSpPr>
+          <p:cNvPr id="8" name="文本框 7">
+            <a:extLst>
+              <a:ext uri="{FF2B5EF4-FFF2-40B4-BE49-F238E27FC236}">
+                <a16:creationId xmlns:a16="http://schemas.microsoft.com/office/drawing/2014/main" id="{77371CFB-5BCC-867D-E102-B60BED477D9E}"/>
+              </a:ext>
+            </a:extLst>
+          </p:cNvPr>
+          <p:cNvSpPr txBox="1"/>
+          <p:nvPr/>
+        </p:nvSpPr>
+        <p:spPr>
+          <a:xfrm>
+            <a:off x="1017494" y="1910443"/>
+            <a:ext cx="3684022" cy="369332"/>
+          </a:xfrm>
+          <a:prstGeom prst="rect">
+            <a:avLst/>
+          </a:prstGeom>
+          <a:noFill/>
+        </p:spPr>
+        <p:txBody>
+          <a:bodyPr wrap="none" rtlCol="0">
+            <a:spAutoFit/>
+          </a:bodyPr>
+          <a:lstStyle/>
+          <a:p>
+            <a:r>
+              <a:rPr lang="zh-CN" altLang="en-US" dirty="0"/>
+              <a:t>利用</a:t>
+            </a:r>
+            <a:r>
+              <a:rPr lang="en-US" altLang="zh-CN" dirty="0" err="1"/>
+              <a:t>graphql</a:t>
+            </a:r>
+            <a:r>
+              <a:rPr lang="en-US" altLang="zh-CN" dirty="0"/>
+              <a:t> </a:t>
+            </a:r>
+            <a:r>
+              <a:rPr lang="zh-CN" altLang="en-US" dirty="0"/>
+              <a:t>以及 </a:t>
+            </a:r>
+            <a:r>
+              <a:rPr lang="en-US" altLang="zh-CN" dirty="0" err="1"/>
+              <a:t>github</a:t>
+            </a:r>
+            <a:r>
+              <a:rPr lang="en-US" altLang="zh-CN" dirty="0"/>
+              <a:t> restful </a:t>
+            </a:r>
+            <a:r>
+              <a:rPr lang="en-US" altLang="zh-CN" dirty="0" err="1"/>
+              <a:t>api</a:t>
+            </a:r>
+            <a:endParaRPr lang="zh-CN" altLang="en-US" dirty="0"/>
+          </a:p>
+        </p:txBody>
+      </p:sp>
+      <p:sp>
+        <p:nvSpPr>
+          <p:cNvPr id="9" name="文本框 8">
+            <a:extLst>
+              <a:ext uri="{FF2B5EF4-FFF2-40B4-BE49-F238E27FC236}">
+                <a16:creationId xmlns:a16="http://schemas.microsoft.com/office/drawing/2014/main" id="{7A7A8C2B-366C-2BE1-4224-2A2970F2C2B9}"/>
+              </a:ext>
+            </a:extLst>
+          </p:cNvPr>
+          <p:cNvSpPr txBox="1"/>
+          <p:nvPr/>
+        </p:nvSpPr>
+        <p:spPr>
+          <a:xfrm>
+            <a:off x="908317" y="5182382"/>
+            <a:ext cx="9324989" cy="1815882"/>
+          </a:xfrm>
+          <a:prstGeom prst="rect">
+            <a:avLst/>
+          </a:prstGeom>
+          <a:noFill/>
+        </p:spPr>
+        <p:txBody>
+          <a:bodyPr wrap="none" rtlCol="0">
+            <a:spAutoFit/>
+          </a:bodyPr>
+          <a:lstStyle/>
+          <a:p>
+            <a:r>
+              <a:rPr lang="zh-CN" altLang="en-US" sz="2800" dirty="0"/>
+              <a:t>获取了：</a:t>
+            </a:r>
+            <a:endParaRPr lang="en-US" altLang="zh-CN" sz="2800" dirty="0"/>
+          </a:p>
+          <a:p>
+            <a:pPr marL="342900" indent="-342900">
+              <a:buAutoNum type="arabicPeriod"/>
+            </a:pPr>
+            <a:r>
+              <a:rPr lang="en-US" altLang="zh-CN" sz="2800" dirty="0"/>
+              <a:t>merge-base </a:t>
+            </a:r>
+            <a:r>
+              <a:rPr lang="zh-CN" altLang="en-US" sz="2800" dirty="0"/>
+              <a:t>以及</a:t>
+            </a:r>
+            <a:r>
+              <a:rPr lang="en-US" altLang="zh-CN" sz="2800" dirty="0"/>
+              <a:t>feature</a:t>
+            </a:r>
+            <a:r>
+              <a:rPr lang="zh-CN" altLang="en-US" sz="2800" dirty="0"/>
+              <a:t>的 </a:t>
+            </a:r>
+            <a:r>
+              <a:rPr lang="en-US" altLang="zh-CN" sz="2800" dirty="0"/>
+              <a:t>repo</a:t>
+            </a:r>
+          </a:p>
+          <a:p>
+            <a:pPr marL="342900" indent="-342900">
+              <a:buAutoNum type="arabicPeriod"/>
+            </a:pPr>
+            <a:r>
+              <a:rPr lang="zh-CN" altLang="en-US" sz="2800" dirty="0"/>
+              <a:t>获取该</a:t>
+            </a:r>
+            <a:r>
+              <a:rPr lang="en-US" altLang="zh-CN" sz="2800" dirty="0"/>
+              <a:t>pr</a:t>
+            </a:r>
+            <a:r>
+              <a:rPr lang="zh-CN" altLang="en-US" sz="2800" dirty="0"/>
+              <a:t>的 </a:t>
+            </a:r>
+            <a:r>
+              <a:rPr lang="en-US" altLang="zh-CN" sz="2800" dirty="0"/>
+              <a:t>&lt;</a:t>
+            </a:r>
+            <a:r>
+              <a:rPr lang="en-US" altLang="zh-CN" sz="2800" dirty="0" err="1"/>
+              <a:t>diff_hunk</a:t>
+            </a:r>
+            <a:r>
+              <a:rPr lang="en-US" altLang="zh-CN" sz="2800" dirty="0"/>
+              <a:t>,  review comment,  revised code&gt;</a:t>
+            </a:r>
+          </a:p>
+          <a:p>
+            <a:pPr marL="342900" indent="-342900">
+              <a:buAutoNum type="arabicPeriod"/>
+            </a:pPr>
+            <a:endParaRPr lang="zh-CN" altLang="en-US" sz="2800" dirty="0"/>
+          </a:p>
+        </p:txBody>
+      </p:sp>
+    </p:spTree>
+    <p:extLst>
+      <p:ext uri="{BB962C8B-B14F-4D97-AF65-F5344CB8AC3E}">
+        <p14:creationId xmlns:p14="http://schemas.microsoft.com/office/powerpoint/2010/main" val="4268274294"/>
+      </p:ext>
+    </p:extLst>
+  </p:cSld>
+  <p:clrMapOvr>
+    <a:masterClrMapping/>
+  </p:clrMapOvr>
+</p:sld>
+</file>
+
+<file path=ppt/slides/slide7.xml><?xml version="1.0" encoding="utf-8"?>
+<p:sld xmlns:a="http://schemas.openxmlformats.org/drawingml/2006/main" xmlns:r="http://schemas.openxmlformats.org/officeDocument/2006/relationships" xmlns:p="http://schemas.openxmlformats.org/presentationml/2006/main">
+  <p:cSld>
+    <p:spTree>
+      <p:nvGrpSpPr>
+        <p:cNvPr id="1" name=""/>
+        <p:cNvGrpSpPr/>
+        <p:nvPr/>
+      </p:nvGrpSpPr>
+      <p:grpSpPr>
+        <a:xfrm>
+          <a:off x="0" y="0"/>
+          <a:ext cx="0" cy="0"/>
+          <a:chOff x="0" y="0"/>
+          <a:chExt cx="0" cy="0"/>
+        </a:xfrm>
+      </p:grpSpPr>
+      <p:sp>
+        <p:nvSpPr>
+          <p:cNvPr id="37" name="矩形 36">
+            <a:extLst>
+              <a:ext uri="{FF2B5EF4-FFF2-40B4-BE49-F238E27FC236}">
+                <a16:creationId xmlns:a16="http://schemas.microsoft.com/office/drawing/2014/main" id="{AD7C75D8-ECF5-B28A-1105-8630C56D00B8}"/>
+              </a:ext>
+            </a:extLst>
+          </p:cNvPr>
+          <p:cNvSpPr/>
+          <p:nvPr/>
+        </p:nvSpPr>
+        <p:spPr>
+          <a:xfrm>
+            <a:off x="9788013" y="2186594"/>
+            <a:ext cx="1794387" cy="1461796"/>
+          </a:xfrm>
+          <a:prstGeom prst="rect">
+            <a:avLst/>
+          </a:prstGeom>
+          <a:solidFill>
+            <a:schemeClr val="bg2"/>
+          </a:solidFill>
+        </p:spPr>
+        <p:style>
+          <a:lnRef idx="2">
+            <a:schemeClr val="accent1">
+              <a:shade val="15000"/>
+            </a:schemeClr>
+          </a:lnRef>
+          <a:fillRef idx="1">
+            <a:schemeClr val="accent1"/>
+          </a:fillRef>
+          <a:effectRef idx="0">
+            <a:schemeClr val="accent1"/>
+          </a:effectRef>
+          <a:fontRef idx="minor">
+            <a:schemeClr val="lt1"/>
+          </a:fontRef>
+        </p:style>
+        <p:txBody>
+          <a:bodyPr rtlCol="0" anchor="ctr"/>
+          <a:lstStyle/>
+          <a:p>
+            <a:pPr algn="ctr"/>
+            <a:r>
+              <a:rPr lang="zh-CN" altLang="en-US" dirty="0">
+                <a:solidFill>
+                  <a:schemeClr val="tx1"/>
+                </a:solidFill>
+              </a:rPr>
+              <a:t>由</a:t>
+            </a:r>
+            <a:r>
+              <a:rPr lang="en-US" altLang="zh-CN" dirty="0">
+                <a:solidFill>
+                  <a:schemeClr val="tx1"/>
+                </a:solidFill>
+              </a:rPr>
+              <a:t>depth</a:t>
+            </a:r>
+            <a:r>
+              <a:rPr lang="zh-CN" altLang="en-US" dirty="0">
+                <a:solidFill>
+                  <a:schemeClr val="tx1"/>
+                </a:solidFill>
+              </a:rPr>
+              <a:t>限制的可获取具体内容的</a:t>
+            </a:r>
+            <a:endParaRPr lang="en-US" altLang="zh-CN" dirty="0">
+              <a:solidFill>
+                <a:schemeClr val="tx1"/>
+              </a:solidFill>
+            </a:endParaRPr>
+          </a:p>
+          <a:p>
+            <a:pPr algn="ctr"/>
+            <a:r>
+              <a:rPr lang="en-US" altLang="zh-CN" dirty="0">
+                <a:solidFill>
+                  <a:schemeClr val="tx1"/>
+                </a:solidFill>
+              </a:rPr>
+              <a:t>Callee </a:t>
+            </a:r>
+            <a:r>
+              <a:rPr lang="zh-CN" altLang="en-US" dirty="0">
+                <a:solidFill>
+                  <a:schemeClr val="tx1"/>
+                </a:solidFill>
+              </a:rPr>
+              <a:t>和</a:t>
+            </a:r>
+            <a:r>
+              <a:rPr lang="en-US" altLang="zh-CN" dirty="0">
+                <a:solidFill>
+                  <a:schemeClr val="tx1"/>
+                </a:solidFill>
+              </a:rPr>
+              <a:t> Caller Tree</a:t>
+            </a:r>
+          </a:p>
+        </p:txBody>
+      </p:sp>
+      <p:sp>
+        <p:nvSpPr>
+          <p:cNvPr id="30" name="矩形 29">
+            <a:extLst>
+              <a:ext uri="{FF2B5EF4-FFF2-40B4-BE49-F238E27FC236}">
+                <a16:creationId xmlns:a16="http://schemas.microsoft.com/office/drawing/2014/main" id="{3CC7D9DC-8AB8-B7D6-B365-88FA85F305C2}"/>
+              </a:ext>
+            </a:extLst>
+          </p:cNvPr>
+          <p:cNvSpPr/>
+          <p:nvPr/>
+        </p:nvSpPr>
+        <p:spPr>
+          <a:xfrm>
+            <a:off x="4129548" y="244138"/>
+            <a:ext cx="2546555" cy="2813861"/>
+          </a:xfrm>
+          <a:prstGeom prst="rect">
+            <a:avLst/>
+          </a:prstGeom>
+          <a:solidFill>
+            <a:schemeClr val="bg2"/>
+          </a:solidFill>
+        </p:spPr>
+        <p:style>
+          <a:lnRef idx="2">
+            <a:schemeClr val="accent1">
+              <a:shade val="15000"/>
+            </a:schemeClr>
+          </a:lnRef>
+          <a:fillRef idx="1">
+            <a:schemeClr val="accent1"/>
+          </a:fillRef>
+          <a:effectRef idx="0">
+            <a:schemeClr val="accent1"/>
+          </a:effectRef>
+          <a:fontRef idx="minor">
+            <a:schemeClr val="lt1"/>
+          </a:fontRef>
+        </p:style>
+        <p:txBody>
+          <a:bodyPr rtlCol="0" anchor="ctr"/>
+          <a:lstStyle/>
+          <a:p>
+            <a:pPr algn="ctr"/>
+            <a:endParaRPr lang="zh-CN" altLang="en-US"/>
+          </a:p>
+        </p:txBody>
+      </p:sp>
+      <p:sp>
+        <p:nvSpPr>
+          <p:cNvPr id="2" name="标题 1">
+            <a:extLst>
+              <a:ext uri="{FF2B5EF4-FFF2-40B4-BE49-F238E27FC236}">
+                <a16:creationId xmlns:a16="http://schemas.microsoft.com/office/drawing/2014/main" id="{5C0E5B60-BB1C-F1E5-FB6A-E3DE77BF41BF}"/>
+              </a:ext>
+            </a:extLst>
+          </p:cNvPr>
+          <p:cNvSpPr>
+            <a:spLocks noGrp="1"/>
+          </p:cNvSpPr>
+          <p:nvPr>
+            <p:ph type="title"/>
+          </p:nvPr>
+        </p:nvSpPr>
+        <p:spPr/>
+        <p:txBody>
+          <a:bodyPr/>
+          <a:lstStyle/>
+          <a:p>
+            <a:r>
+              <a:rPr lang="zh-CN" altLang="en-US" dirty="0"/>
+              <a:t>输入</a:t>
+            </a:r>
+            <a:r>
+              <a:rPr lang="en-US" altLang="zh-CN" dirty="0"/>
+              <a:t>Context</a:t>
+            </a:r>
+            <a:endParaRPr lang="zh-CN" altLang="en-US" dirty="0"/>
+          </a:p>
+        </p:txBody>
+      </p:sp>
+      <p:sp>
+        <p:nvSpPr>
+          <p:cNvPr id="4" name="椭圆 3">
+            <a:extLst>
+              <a:ext uri="{FF2B5EF4-FFF2-40B4-BE49-F238E27FC236}">
+                <a16:creationId xmlns:a16="http://schemas.microsoft.com/office/drawing/2014/main" id="{BFD6E864-79E2-A0B2-61C1-41E106C7C384}"/>
+              </a:ext>
+            </a:extLst>
+          </p:cNvPr>
+          <p:cNvSpPr/>
+          <p:nvPr/>
+        </p:nvSpPr>
+        <p:spPr>
+          <a:xfrm>
+            <a:off x="838200" y="2703871"/>
+            <a:ext cx="1101212" cy="1150374"/>
+          </a:xfrm>
+          <a:prstGeom prst="ellipse">
+            <a:avLst/>
+          </a:prstGeom>
+        </p:spPr>
+        <p:style>
+          <a:lnRef idx="2">
+            <a:schemeClr val="accent1">
+              <a:shade val="15000"/>
+            </a:schemeClr>
+          </a:lnRef>
+          <a:fillRef idx="1">
+            <a:schemeClr val="accent1"/>
+          </a:fillRef>
+          <a:effectRef idx="0">
+            <a:schemeClr val="accent1"/>
+          </a:effectRef>
+          <a:fontRef idx="minor">
+            <a:schemeClr val="lt1"/>
+          </a:fontRef>
+        </p:style>
+        <p:txBody>
+          <a:bodyPr rtlCol="0" anchor="ctr"/>
+          <a:lstStyle/>
+          <a:p>
+            <a:pPr algn="ctr"/>
+            <a:r>
+              <a:rPr lang="en-US" altLang="zh-CN" dirty="0"/>
+              <a:t>repo</a:t>
+            </a:r>
+            <a:endParaRPr lang="zh-CN" altLang="en-US" dirty="0"/>
+          </a:p>
+        </p:txBody>
+      </p:sp>
+      <p:cxnSp>
+        <p:nvCxnSpPr>
+          <p:cNvPr id="6" name="直接箭头连接符 5">
+            <a:extLst>
+              <a:ext uri="{FF2B5EF4-FFF2-40B4-BE49-F238E27FC236}">
+                <a16:creationId xmlns:a16="http://schemas.microsoft.com/office/drawing/2014/main" id="{9D3837D1-D5E9-B400-4DAD-2EB43599229A}"/>
+              </a:ext>
+            </a:extLst>
+          </p:cNvPr>
+          <p:cNvCxnSpPr/>
+          <p:nvPr/>
+        </p:nvCxnSpPr>
+        <p:spPr>
+          <a:xfrm flipV="1">
+            <a:off x="2035277" y="2231923"/>
+            <a:ext cx="2094271" cy="609600"/>
+          </a:xfrm>
+          <a:prstGeom prst="straightConnector1">
+            <a:avLst/>
+          </a:prstGeom>
+          <a:ln>
+            <a:tailEnd type="triangle"/>
+          </a:ln>
+        </p:spPr>
+        <p:style>
+          <a:lnRef idx="1">
+            <a:schemeClr val="accent1"/>
+          </a:lnRef>
+          <a:fillRef idx="0">
+            <a:schemeClr val="accent1"/>
+          </a:fillRef>
+          <a:effectRef idx="0">
+            <a:schemeClr val="accent1"/>
+          </a:effectRef>
+          <a:fontRef idx="minor">
+            <a:schemeClr val="tx1"/>
+          </a:fontRef>
+        </p:style>
+      </p:cxnSp>
+      <p:sp>
+        <p:nvSpPr>
+          <p:cNvPr id="7" name="文本框 6">
+            <a:extLst>
+              <a:ext uri="{FF2B5EF4-FFF2-40B4-BE49-F238E27FC236}">
+                <a16:creationId xmlns:a16="http://schemas.microsoft.com/office/drawing/2014/main" id="{7AD3DA91-0455-68FA-07B2-7EC25B78C83A}"/>
+              </a:ext>
+            </a:extLst>
+          </p:cNvPr>
+          <p:cNvSpPr txBox="1"/>
+          <p:nvPr/>
+        </p:nvSpPr>
+        <p:spPr>
+          <a:xfrm>
+            <a:off x="2418736" y="2186594"/>
+            <a:ext cx="1640193" cy="369332"/>
+          </a:xfrm>
+          <a:prstGeom prst="rect">
+            <a:avLst/>
+          </a:prstGeom>
+          <a:noFill/>
+        </p:spPr>
+        <p:txBody>
+          <a:bodyPr wrap="none" rtlCol="0">
+            <a:spAutoFit/>
+          </a:bodyPr>
+          <a:lstStyle/>
+          <a:p>
+            <a:r>
+              <a:rPr lang="en-US" altLang="zh-CN" dirty="0"/>
+              <a:t>Repo structure</a:t>
+            </a:r>
+            <a:endParaRPr lang="zh-CN" altLang="en-US" dirty="0"/>
+          </a:p>
+        </p:txBody>
+      </p:sp>
+      <p:sp>
+        <p:nvSpPr>
+          <p:cNvPr id="9" name="文本框 8">
+            <a:extLst>
+              <a:ext uri="{FF2B5EF4-FFF2-40B4-BE49-F238E27FC236}">
+                <a16:creationId xmlns:a16="http://schemas.microsoft.com/office/drawing/2014/main" id="{0B910E0E-125A-1BEE-B60C-E684297F8D74}"/>
+              </a:ext>
+            </a:extLst>
+          </p:cNvPr>
+          <p:cNvSpPr txBox="1"/>
+          <p:nvPr/>
+        </p:nvSpPr>
+        <p:spPr>
+          <a:xfrm>
+            <a:off x="4225413" y="244138"/>
+            <a:ext cx="2902974" cy="2893100"/>
+          </a:xfrm>
+          <a:prstGeom prst="rect">
+            <a:avLst/>
+          </a:prstGeom>
+          <a:noFill/>
+        </p:spPr>
+        <p:txBody>
+          <a:bodyPr wrap="square">
+            <a:spAutoFit/>
+          </a:bodyPr>
+          <a:lstStyle/>
+          <a:p>
+            <a:r>
+              <a:rPr lang="zh-CN" altLang="en-US" sz="1400" dirty="0"/>
+              <a:t>fixed_test_project/</a:t>
+            </a:r>
+          </a:p>
+          <a:p>
+            <a:r>
+              <a:rPr lang="zh-CN" altLang="en-US" sz="1400" dirty="0"/>
+              <a:t>├── features/</a:t>
+            </a:r>
+          </a:p>
+          <a:p>
+            <a:r>
+              <a:rPr lang="zh-CN" altLang="en-US" sz="1400" dirty="0"/>
+              <a:t>│   ├── __init__.py</a:t>
+            </a:r>
+          </a:p>
+          <a:p>
+            <a:r>
+              <a:rPr lang="zh-CN" altLang="en-US" sz="1400" dirty="0"/>
+              <a:t>│   ├── dynamic_features.py</a:t>
+            </a:r>
+          </a:p>
+          <a:p>
+            <a:r>
+              <a:rPr lang="zh-CN" altLang="en-US" sz="1400" dirty="0"/>
+              <a:t>│   └── special_methods.py</a:t>
+            </a:r>
+          </a:p>
+          <a:p>
+            <a:r>
+              <a:rPr lang="zh-CN" altLang="en-US" sz="1400" dirty="0"/>
+              <a:t>├── helpers/</a:t>
+            </a:r>
+          </a:p>
+          <a:p>
+            <a:r>
+              <a:rPr lang="zh-CN" altLang="en-US" sz="1400" dirty="0"/>
+              <a:t>│   ├── __init__.py</a:t>
+            </a:r>
+          </a:p>
+          <a:p>
+            <a:r>
+              <a:rPr lang="zh-CN" altLang="en-US" sz="1400" dirty="0"/>
+              <a:t>│   └── string_utils.py</a:t>
+            </a:r>
+          </a:p>
+          <a:p>
+            <a:r>
+              <a:rPr lang="zh-CN" altLang="en-US" sz="1400" dirty="0"/>
+              <a:t>├── models/</a:t>
+            </a:r>
+          </a:p>
+          <a:p>
+            <a:r>
+              <a:rPr lang="zh-CN" altLang="en-US" sz="1400" dirty="0"/>
+              <a:t>│   ├── __init__.py</a:t>
+            </a:r>
+          </a:p>
+          <a:p>
+            <a:r>
+              <a:rPr lang="zh-CN" altLang="en-US" sz="1400" dirty="0"/>
+              <a:t>│   ├── base.py</a:t>
+            </a:r>
+          </a:p>
+          <a:p>
+            <a:r>
+              <a:rPr lang="zh-CN" altLang="en-US" sz="1400" dirty="0"/>
+              <a:t>│   └── pets.py</a:t>
+            </a:r>
+          </a:p>
+          <a:p>
+            <a:r>
+              <a:rPr lang="zh-CN" altLang="en-US" sz="1400" dirty="0"/>
+              <a:t>└── main.py</a:t>
+            </a:r>
+          </a:p>
+        </p:txBody>
+      </p:sp>
+      <p:pic>
+        <p:nvPicPr>
+          <p:cNvPr id="12" name="图片 11">
+            <a:extLst>
+              <a:ext uri="{FF2B5EF4-FFF2-40B4-BE49-F238E27FC236}">
+                <a16:creationId xmlns:a16="http://schemas.microsoft.com/office/drawing/2014/main" id="{0B30BE5B-EC6D-982C-10B1-D0C04C2C316F}"/>
+              </a:ext>
+            </a:extLst>
+          </p:cNvPr>
+          <p:cNvPicPr>
+            <a:picLocks noChangeAspect="1"/>
+          </p:cNvPicPr>
+          <p:nvPr/>
+        </p:nvPicPr>
+        <p:blipFill>
+          <a:blip r:embed="rId2"/>
+          <a:stretch>
+            <a:fillRect/>
+          </a:stretch>
+        </p:blipFill>
+        <p:spPr>
+          <a:xfrm>
+            <a:off x="2940233" y="3565238"/>
+            <a:ext cx="4249605" cy="2599126"/>
+          </a:xfrm>
+          <a:prstGeom prst="rect">
+            <a:avLst/>
+          </a:prstGeom>
+        </p:spPr>
+      </p:pic>
+      <p:cxnSp>
+        <p:nvCxnSpPr>
+          <p:cNvPr id="14" name="直接箭头连接符 13">
+            <a:extLst>
+              <a:ext uri="{FF2B5EF4-FFF2-40B4-BE49-F238E27FC236}">
+                <a16:creationId xmlns:a16="http://schemas.microsoft.com/office/drawing/2014/main" id="{A40C8E20-DD4A-FADC-30B6-B6DA02060558}"/>
+              </a:ext>
+            </a:extLst>
+          </p:cNvPr>
+          <p:cNvCxnSpPr/>
+          <p:nvPr/>
+        </p:nvCxnSpPr>
+        <p:spPr>
+          <a:xfrm>
+            <a:off x="1388806" y="4041058"/>
+            <a:ext cx="1216742" cy="1052052"/>
+          </a:xfrm>
+          <a:prstGeom prst="straightConnector1">
+            <a:avLst/>
+          </a:prstGeom>
+          <a:ln>
+            <a:tailEnd type="triangle"/>
+          </a:ln>
+        </p:spPr>
+        <p:style>
+          <a:lnRef idx="1">
+            <a:schemeClr val="accent1"/>
+          </a:lnRef>
+          <a:fillRef idx="0">
+            <a:schemeClr val="accent1"/>
+          </a:fillRef>
+          <a:effectRef idx="0">
+            <a:schemeClr val="accent1"/>
+          </a:effectRef>
+          <a:fontRef idx="minor">
+            <a:schemeClr val="tx1"/>
+          </a:fontRef>
+        </p:style>
+      </p:cxnSp>
+      <p:sp>
+        <p:nvSpPr>
+          <p:cNvPr id="15" name="文本框 14">
+            <a:extLst>
+              <a:ext uri="{FF2B5EF4-FFF2-40B4-BE49-F238E27FC236}">
+                <a16:creationId xmlns:a16="http://schemas.microsoft.com/office/drawing/2014/main" id="{1276F4F4-DF67-4FCA-CF71-0CFB713EA4B1}"/>
+              </a:ext>
+            </a:extLst>
+          </p:cNvPr>
+          <p:cNvSpPr txBox="1"/>
+          <p:nvPr/>
+        </p:nvSpPr>
+        <p:spPr>
+          <a:xfrm>
+            <a:off x="1061884" y="4483510"/>
+            <a:ext cx="1338828" cy="369332"/>
+          </a:xfrm>
+          <a:prstGeom prst="rect">
+            <a:avLst/>
+          </a:prstGeom>
+          <a:noFill/>
+        </p:spPr>
+        <p:txBody>
+          <a:bodyPr wrap="none" rtlCol="0">
+            <a:spAutoFit/>
+          </a:bodyPr>
+          <a:lstStyle/>
+          <a:p>
+            <a:r>
+              <a:rPr lang="zh-CN" altLang="en-US" dirty="0"/>
+              <a:t>调用链构造</a:t>
+            </a:r>
+          </a:p>
+        </p:txBody>
+      </p:sp>
+      <p:cxnSp>
+        <p:nvCxnSpPr>
+          <p:cNvPr id="17" name="直接箭头连接符 16">
+            <a:extLst>
+              <a:ext uri="{FF2B5EF4-FFF2-40B4-BE49-F238E27FC236}">
+                <a16:creationId xmlns:a16="http://schemas.microsoft.com/office/drawing/2014/main" id="{5ADD682C-7ED0-4BC4-404E-9858275E6540}"/>
+              </a:ext>
+            </a:extLst>
+          </p:cNvPr>
+          <p:cNvCxnSpPr>
+            <a:cxnSpLocks/>
+          </p:cNvCxnSpPr>
+          <p:nvPr/>
+        </p:nvCxnSpPr>
+        <p:spPr>
+          <a:xfrm>
+            <a:off x="6302477" y="4897211"/>
+            <a:ext cx="1170039" cy="0"/>
+          </a:xfrm>
+          <a:prstGeom prst="straightConnector1">
+            <a:avLst/>
+          </a:prstGeom>
+          <a:ln>
+            <a:tailEnd type="triangle"/>
+          </a:ln>
+        </p:spPr>
+        <p:style>
+          <a:lnRef idx="1">
+            <a:schemeClr val="accent1"/>
+          </a:lnRef>
+          <a:fillRef idx="0">
+            <a:schemeClr val="accent1"/>
+          </a:fillRef>
+          <a:effectRef idx="0">
+            <a:schemeClr val="accent1"/>
+          </a:effectRef>
+          <a:fontRef idx="minor">
+            <a:schemeClr val="tx1"/>
+          </a:fontRef>
+        </p:style>
+      </p:cxnSp>
+      <p:sp>
+        <p:nvSpPr>
+          <p:cNvPr id="19" name="文本框 18">
+            <a:extLst>
+              <a:ext uri="{FF2B5EF4-FFF2-40B4-BE49-F238E27FC236}">
+                <a16:creationId xmlns:a16="http://schemas.microsoft.com/office/drawing/2014/main" id="{954B5648-C6B4-CAD4-39A6-3AB1AE2EA146}"/>
+              </a:ext>
+            </a:extLst>
+          </p:cNvPr>
+          <p:cNvSpPr txBox="1"/>
+          <p:nvPr/>
+        </p:nvSpPr>
+        <p:spPr>
+          <a:xfrm>
+            <a:off x="3238832" y="6371171"/>
+            <a:ext cx="5202065" cy="369332"/>
+          </a:xfrm>
+          <a:prstGeom prst="rect">
+            <a:avLst/>
+          </a:prstGeom>
+          <a:noFill/>
+        </p:spPr>
+        <p:txBody>
+          <a:bodyPr wrap="none" rtlCol="0">
+            <a:spAutoFit/>
+          </a:bodyPr>
+          <a:lstStyle/>
+          <a:p>
+            <a:r>
+              <a:rPr lang="zh-CN" altLang="en-US" dirty="0"/>
+              <a:t>利用</a:t>
+            </a:r>
+            <a:r>
+              <a:rPr lang="en-US" altLang="zh-CN" dirty="0"/>
+              <a:t>pyre</a:t>
+            </a:r>
+            <a:r>
+              <a:rPr lang="zh-CN" altLang="en-US" dirty="0"/>
+              <a:t>查询各个</a:t>
+            </a:r>
+            <a:r>
+              <a:rPr lang="en-US" altLang="zh-CN" dirty="0" err="1"/>
+              <a:t>func</a:t>
+            </a:r>
+            <a:r>
+              <a:rPr lang="zh-CN" altLang="en-US" dirty="0"/>
+              <a:t>的调用关系，构造一个</a:t>
+            </a:r>
+            <a:r>
+              <a:rPr lang="en-US" altLang="zh-CN" dirty="0"/>
+              <a:t>DAG</a:t>
+            </a:r>
+            <a:endParaRPr lang="zh-CN" altLang="en-US" dirty="0"/>
+          </a:p>
+        </p:txBody>
+      </p:sp>
+      <p:sp>
+        <p:nvSpPr>
+          <p:cNvPr id="21" name="文本框 20">
+            <a:extLst>
+              <a:ext uri="{FF2B5EF4-FFF2-40B4-BE49-F238E27FC236}">
+                <a16:creationId xmlns:a16="http://schemas.microsoft.com/office/drawing/2014/main" id="{827080DC-CD39-D2BB-7F6A-5915B1CD4698}"/>
+              </a:ext>
+            </a:extLst>
+          </p:cNvPr>
+          <p:cNvSpPr txBox="1"/>
+          <p:nvPr/>
+        </p:nvSpPr>
+        <p:spPr>
+          <a:xfrm>
+            <a:off x="7426200" y="4769944"/>
+            <a:ext cx="3778599" cy="646331"/>
+          </a:xfrm>
+          <a:prstGeom prst="rect">
+            <a:avLst/>
+          </a:prstGeom>
+          <a:noFill/>
+        </p:spPr>
+        <p:txBody>
+          <a:bodyPr wrap="none" rtlCol="0">
+            <a:spAutoFit/>
+          </a:bodyPr>
+          <a:lstStyle/>
+          <a:p>
+            <a:r>
+              <a:rPr lang="zh-CN" altLang="en-US" dirty="0"/>
+              <a:t>对于给定的</a:t>
+            </a:r>
+            <a:r>
+              <a:rPr lang="en-US" altLang="zh-CN" dirty="0" err="1"/>
+              <a:t>func</a:t>
+            </a:r>
+            <a:r>
+              <a:rPr lang="zh-CN" altLang="en-US" dirty="0"/>
+              <a:t>如</a:t>
+            </a:r>
+            <a:r>
+              <a:rPr lang="en-US" altLang="zh-CN" dirty="0" err="1"/>
+              <a:t>main.run_oo_tests</a:t>
+            </a:r>
+            <a:endParaRPr lang="en-US" altLang="zh-CN" dirty="0"/>
+          </a:p>
+          <a:p>
+            <a:r>
+              <a:rPr lang="en-US" altLang="zh-CN" dirty="0"/>
+              <a:t>BFS</a:t>
+            </a:r>
+            <a:r>
+              <a:rPr lang="zh-CN" altLang="en-US" dirty="0"/>
+              <a:t>获取其 </a:t>
+            </a:r>
+            <a:r>
+              <a:rPr lang="en-US" altLang="zh-CN" dirty="0"/>
+              <a:t>callee</a:t>
+            </a:r>
+            <a:r>
+              <a:rPr lang="zh-CN" altLang="en-US" dirty="0"/>
+              <a:t>和</a:t>
+            </a:r>
+            <a:r>
+              <a:rPr lang="en-US" altLang="zh-CN" dirty="0"/>
+              <a:t>caller tree</a:t>
+            </a:r>
+          </a:p>
+        </p:txBody>
+      </p:sp>
+      <p:cxnSp>
+        <p:nvCxnSpPr>
+          <p:cNvPr id="23" name="直接箭头连接符 22">
+            <a:extLst>
+              <a:ext uri="{FF2B5EF4-FFF2-40B4-BE49-F238E27FC236}">
+                <a16:creationId xmlns:a16="http://schemas.microsoft.com/office/drawing/2014/main" id="{0781538C-CFF3-5E4B-9A9E-44DDE46A8983}"/>
+              </a:ext>
+            </a:extLst>
+          </p:cNvPr>
+          <p:cNvCxnSpPr>
+            <a:cxnSpLocks/>
+          </p:cNvCxnSpPr>
+          <p:nvPr/>
+        </p:nvCxnSpPr>
+        <p:spPr>
+          <a:xfrm flipV="1">
+            <a:off x="2123768" y="3146406"/>
+            <a:ext cx="4552335" cy="282594"/>
+          </a:xfrm>
+          <a:prstGeom prst="straightConnector1">
+            <a:avLst/>
+          </a:prstGeom>
+          <a:ln>
+            <a:tailEnd type="triangle"/>
+          </a:ln>
+        </p:spPr>
+        <p:style>
+          <a:lnRef idx="1">
+            <a:schemeClr val="accent1"/>
+          </a:lnRef>
+          <a:fillRef idx="0">
+            <a:schemeClr val="accent1"/>
+          </a:fillRef>
+          <a:effectRef idx="0">
+            <a:schemeClr val="accent1"/>
+          </a:effectRef>
+          <a:fontRef idx="minor">
+            <a:schemeClr val="tx1"/>
+          </a:fontRef>
+        </p:style>
+      </p:cxnSp>
+      <p:sp>
+        <p:nvSpPr>
+          <p:cNvPr id="24" name="文本框 23">
+            <a:extLst>
+              <a:ext uri="{FF2B5EF4-FFF2-40B4-BE49-F238E27FC236}">
+                <a16:creationId xmlns:a16="http://schemas.microsoft.com/office/drawing/2014/main" id="{DEA13C96-89F7-FD9A-101B-2C6F11B3FC03}"/>
+              </a:ext>
+            </a:extLst>
+          </p:cNvPr>
+          <p:cNvSpPr txBox="1"/>
+          <p:nvPr/>
+        </p:nvSpPr>
+        <p:spPr>
+          <a:xfrm>
+            <a:off x="2703871" y="3279058"/>
+            <a:ext cx="1176925" cy="369332"/>
+          </a:xfrm>
+          <a:prstGeom prst="rect">
+            <a:avLst/>
+          </a:prstGeom>
+          <a:noFill/>
+        </p:spPr>
+        <p:txBody>
+          <a:bodyPr wrap="none" rtlCol="0">
+            <a:spAutoFit/>
+          </a:bodyPr>
+          <a:lstStyle/>
+          <a:p>
+            <a:r>
+              <a:rPr lang="en-US" altLang="zh-CN" dirty="0"/>
+              <a:t>Func </a:t>
+            </a:r>
+            <a:r>
+              <a:rPr lang="zh-CN" altLang="en-US" dirty="0"/>
+              <a:t>映射</a:t>
+            </a:r>
+          </a:p>
+        </p:txBody>
+      </p:sp>
+      <p:sp>
+        <p:nvSpPr>
+          <p:cNvPr id="29" name="文本框 28">
+            <a:extLst>
+              <a:ext uri="{FF2B5EF4-FFF2-40B4-BE49-F238E27FC236}">
+                <a16:creationId xmlns:a16="http://schemas.microsoft.com/office/drawing/2014/main" id="{FBC224AE-3945-199A-4CB4-A6CCDF2AFFAB}"/>
+              </a:ext>
+            </a:extLst>
+          </p:cNvPr>
+          <p:cNvSpPr txBox="1"/>
+          <p:nvPr/>
+        </p:nvSpPr>
+        <p:spPr>
+          <a:xfrm>
+            <a:off x="5884607" y="2971261"/>
+            <a:ext cx="3048000" cy="369332"/>
+          </a:xfrm>
+          <a:prstGeom prst="rect">
+            <a:avLst/>
+          </a:prstGeom>
+          <a:noFill/>
+        </p:spPr>
+        <p:txBody>
+          <a:bodyPr wrap="square">
+            <a:spAutoFit/>
+          </a:bodyPr>
+          <a:lstStyle/>
+          <a:p>
+            <a:pPr algn="ctr"/>
+            <a:r>
+              <a:rPr lang="en-US" altLang="zh-CN" dirty="0" err="1"/>
+              <a:t>dict</a:t>
+            </a:r>
+            <a:r>
+              <a:rPr lang="en-US" altLang="zh-CN" dirty="0"/>
+              <a:t>(  </a:t>
+            </a:r>
+            <a:r>
+              <a:rPr lang="en-US" altLang="zh-CN" dirty="0" err="1"/>
+              <a:t>func</a:t>
+            </a:r>
+            <a:r>
+              <a:rPr lang="en-US" altLang="zh-CN" dirty="0"/>
+              <a:t> -&gt; </a:t>
+            </a:r>
+            <a:r>
+              <a:rPr lang="en-US" altLang="zh-CN" dirty="0" err="1"/>
+              <a:t>func</a:t>
+            </a:r>
+            <a:r>
+              <a:rPr lang="en-US" altLang="zh-CN" dirty="0"/>
+              <a:t> content)</a:t>
+            </a:r>
+            <a:endParaRPr lang="zh-CN" altLang="en-US" dirty="0"/>
+          </a:p>
+        </p:txBody>
+      </p:sp>
+      <p:cxnSp>
+        <p:nvCxnSpPr>
+          <p:cNvPr id="32" name="直接箭头连接符 31">
+            <a:extLst>
+              <a:ext uri="{FF2B5EF4-FFF2-40B4-BE49-F238E27FC236}">
+                <a16:creationId xmlns:a16="http://schemas.microsoft.com/office/drawing/2014/main" id="{A327D7DC-B891-59CF-E4E1-0B6F94E67CF9}"/>
+              </a:ext>
+            </a:extLst>
+          </p:cNvPr>
+          <p:cNvCxnSpPr>
+            <a:cxnSpLocks/>
+            <a:stCxn id="29" idx="3"/>
+          </p:cNvCxnSpPr>
+          <p:nvPr/>
+        </p:nvCxnSpPr>
+        <p:spPr>
+          <a:xfrm>
+            <a:off x="8932607" y="3155927"/>
+            <a:ext cx="865239" cy="147586"/>
+          </a:xfrm>
+          <a:prstGeom prst="straightConnector1">
+            <a:avLst/>
+          </a:prstGeom>
+          <a:ln>
+            <a:tailEnd type="triangle"/>
+          </a:ln>
+        </p:spPr>
+        <p:style>
+          <a:lnRef idx="1">
+            <a:schemeClr val="accent1"/>
+          </a:lnRef>
+          <a:fillRef idx="0">
+            <a:schemeClr val="accent1"/>
+          </a:fillRef>
+          <a:effectRef idx="0">
+            <a:schemeClr val="accent1"/>
+          </a:effectRef>
+          <a:fontRef idx="minor">
+            <a:schemeClr val="tx1"/>
+          </a:fontRef>
+        </p:style>
+      </p:cxnSp>
+      <p:cxnSp>
+        <p:nvCxnSpPr>
+          <p:cNvPr id="34" name="直接箭头连接符 33">
+            <a:extLst>
+              <a:ext uri="{FF2B5EF4-FFF2-40B4-BE49-F238E27FC236}">
+                <a16:creationId xmlns:a16="http://schemas.microsoft.com/office/drawing/2014/main" id="{968A9EBA-90CB-CD86-BD03-09AD24637CDE}"/>
+              </a:ext>
+            </a:extLst>
+          </p:cNvPr>
+          <p:cNvCxnSpPr/>
+          <p:nvPr/>
+        </p:nvCxnSpPr>
+        <p:spPr>
+          <a:xfrm flipV="1">
+            <a:off x="9606116" y="3429000"/>
+            <a:ext cx="363794" cy="1201994"/>
+          </a:xfrm>
+          <a:prstGeom prst="straightConnector1">
+            <a:avLst/>
+          </a:prstGeom>
+          <a:ln>
+            <a:tailEnd type="triangle"/>
+          </a:ln>
+        </p:spPr>
+        <p:style>
+          <a:lnRef idx="1">
+            <a:schemeClr val="accent1"/>
+          </a:lnRef>
+          <a:fillRef idx="0">
+            <a:schemeClr val="accent1"/>
+          </a:fillRef>
+          <a:effectRef idx="0">
+            <a:schemeClr val="accent1"/>
+          </a:effectRef>
+          <a:fontRef idx="minor">
+            <a:schemeClr val="tx1"/>
+          </a:fontRef>
+        </p:style>
+      </p:cxnSp>
+    </p:spTree>
+    <p:extLst>
+      <p:ext uri="{BB962C8B-B14F-4D97-AF65-F5344CB8AC3E}">
+        <p14:creationId xmlns:p14="http://schemas.microsoft.com/office/powerpoint/2010/main" val="1765514633"/>
+      </p:ext>
+    </p:extLst>
+  </p:cSld>
+  <p:clrMapOvr>
+    <a:masterClrMapping/>
+  </p:clrMapOvr>
+</p:sld>
+</file>
+
+<file path=ppt/slides/slide8.xml><?xml version="1.0" encoding="utf-8"?>
+<p:sld xmlns:a="http://schemas.openxmlformats.org/drawingml/2006/main" xmlns:r="http://schemas.openxmlformats.org/officeDocument/2006/relationships" xmlns:p="http://schemas.openxmlformats.org/presentationml/2006/main">
+  <p:cSld>
+    <p:spTree>
+      <p:nvGrpSpPr>
+        <p:cNvPr id="1" name=""/>
+        <p:cNvGrpSpPr/>
+        <p:nvPr/>
+      </p:nvGrpSpPr>
+      <p:grpSpPr>
+        <a:xfrm>
+          <a:off x="0" y="0"/>
+          <a:ext cx="0" cy="0"/>
+          <a:chOff x="0" y="0"/>
+          <a:chExt cx="0" cy="0"/>
+        </a:xfrm>
+      </p:grpSpPr>
+      <p:pic>
+        <p:nvPicPr>
+          <p:cNvPr id="4" name="图片 3">
+            <a:extLst>
+              <a:ext uri="{FF2B5EF4-FFF2-40B4-BE49-F238E27FC236}">
+                <a16:creationId xmlns:a16="http://schemas.microsoft.com/office/drawing/2014/main" id="{4B2C28CF-E2F1-94E3-4FD3-53B2A5981EAA}"/>
+              </a:ext>
+            </a:extLst>
+          </p:cNvPr>
+          <p:cNvPicPr>
+            <a:picLocks noChangeAspect="1"/>
+          </p:cNvPicPr>
+          <p:nvPr/>
+        </p:nvPicPr>
+        <p:blipFill>
+          <a:blip r:embed="rId2"/>
+          <a:stretch>
+            <a:fillRect/>
+          </a:stretch>
+        </p:blipFill>
+        <p:spPr>
+          <a:xfrm>
+            <a:off x="452670" y="222269"/>
+            <a:ext cx="11288299" cy="6355512"/>
+          </a:xfrm>
+          <a:prstGeom prst="rect">
+            <a:avLst/>
+          </a:prstGeom>
+        </p:spPr>
+      </p:pic>
+      <p:sp>
+        <p:nvSpPr>
+          <p:cNvPr id="7" name="文本框 6">
+            <a:extLst>
+              <a:ext uri="{FF2B5EF4-FFF2-40B4-BE49-F238E27FC236}">
+                <a16:creationId xmlns:a16="http://schemas.microsoft.com/office/drawing/2014/main" id="{D01FD632-451A-0AB8-BA49-A499E0F29076}"/>
+              </a:ext>
+            </a:extLst>
+          </p:cNvPr>
+          <p:cNvSpPr txBox="1"/>
+          <p:nvPr/>
+        </p:nvSpPr>
+        <p:spPr>
+          <a:xfrm>
+            <a:off x="9722021" y="3736258"/>
+            <a:ext cx="1107996" cy="369332"/>
+          </a:xfrm>
+          <a:prstGeom prst="rect">
+            <a:avLst/>
+          </a:prstGeom>
+          <a:noFill/>
+        </p:spPr>
+        <p:txBody>
+          <a:bodyPr wrap="none" rtlCol="0">
+            <a:spAutoFit/>
+          </a:bodyPr>
+          <a:lstStyle/>
+          <a:p>
+            <a:r>
+              <a:rPr lang="zh-CN" altLang="en-US" dirty="0"/>
+              <a:t>函数参数</a:t>
+            </a:r>
+          </a:p>
+        </p:txBody>
+      </p:sp>
+      <p:sp>
+        <p:nvSpPr>
+          <p:cNvPr id="8" name="文本框 7">
+            <a:extLst>
+              <a:ext uri="{FF2B5EF4-FFF2-40B4-BE49-F238E27FC236}">
+                <a16:creationId xmlns:a16="http://schemas.microsoft.com/office/drawing/2014/main" id="{416DB542-EAEF-FBE4-9485-BB4D455AA681}"/>
+              </a:ext>
+            </a:extLst>
+          </p:cNvPr>
+          <p:cNvSpPr txBox="1"/>
+          <p:nvPr/>
+        </p:nvSpPr>
+        <p:spPr>
+          <a:xfrm>
+            <a:off x="7521677" y="1681316"/>
+            <a:ext cx="646331" cy="369332"/>
+          </a:xfrm>
+          <a:prstGeom prst="rect">
+            <a:avLst/>
+          </a:prstGeom>
+          <a:noFill/>
+        </p:spPr>
+        <p:txBody>
+          <a:bodyPr wrap="none" rtlCol="0">
+            <a:spAutoFit/>
+          </a:bodyPr>
+          <a:lstStyle/>
+          <a:p>
+            <a:r>
+              <a:rPr lang="zh-CN" altLang="en-US" dirty="0">
+                <a:solidFill>
+                  <a:srgbClr val="FF0000"/>
+                </a:solidFill>
+              </a:rPr>
+              <a:t>多态</a:t>
+            </a:r>
+          </a:p>
+        </p:txBody>
+      </p:sp>
+      <p:sp>
+        <p:nvSpPr>
+          <p:cNvPr id="10" name="文本框 9">
+            <a:extLst>
+              <a:ext uri="{FF2B5EF4-FFF2-40B4-BE49-F238E27FC236}">
+                <a16:creationId xmlns:a16="http://schemas.microsoft.com/office/drawing/2014/main" id="{16CEEE07-D7FC-EC1B-3233-16A0D9C25671}"/>
+              </a:ext>
+            </a:extLst>
+          </p:cNvPr>
+          <p:cNvSpPr txBox="1"/>
+          <p:nvPr/>
+        </p:nvSpPr>
+        <p:spPr>
+          <a:xfrm>
+            <a:off x="7846142" y="6263148"/>
+            <a:ext cx="2545890" cy="369332"/>
+          </a:xfrm>
+          <a:prstGeom prst="rect">
+            <a:avLst/>
+          </a:prstGeom>
+          <a:noFill/>
+        </p:spPr>
+        <p:txBody>
+          <a:bodyPr wrap="none" rtlCol="0">
+            <a:spAutoFit/>
+          </a:bodyPr>
+          <a:lstStyle/>
+          <a:p>
+            <a:r>
+              <a:rPr lang="en-US" altLang="zh-CN" dirty="0">
+                <a:solidFill>
+                  <a:srgbClr val="FF0000"/>
+                </a:solidFill>
+              </a:rPr>
+              <a:t>Special magical method</a:t>
+            </a:r>
+            <a:endParaRPr lang="zh-CN" altLang="en-US" dirty="0">
+              <a:solidFill>
+                <a:srgbClr val="FF0000"/>
+              </a:solidFill>
+            </a:endParaRPr>
+          </a:p>
+        </p:txBody>
+      </p:sp>
+      <p:sp>
+        <p:nvSpPr>
+          <p:cNvPr id="11" name="文本框 10">
+            <a:extLst>
+              <a:ext uri="{FF2B5EF4-FFF2-40B4-BE49-F238E27FC236}">
+                <a16:creationId xmlns:a16="http://schemas.microsoft.com/office/drawing/2014/main" id="{C1139468-1913-6B56-6BA9-0C7FC4E9C625}"/>
+              </a:ext>
+            </a:extLst>
+          </p:cNvPr>
+          <p:cNvSpPr txBox="1"/>
+          <p:nvPr/>
+        </p:nvSpPr>
+        <p:spPr>
+          <a:xfrm>
+            <a:off x="8035789" y="4508090"/>
+            <a:ext cx="1800493" cy="369332"/>
+          </a:xfrm>
+          <a:prstGeom prst="rect">
+            <a:avLst/>
+          </a:prstGeom>
+          <a:noFill/>
+        </p:spPr>
+        <p:txBody>
+          <a:bodyPr wrap="none" rtlCol="0">
+            <a:spAutoFit/>
+          </a:bodyPr>
+          <a:lstStyle/>
+          <a:p>
+            <a:r>
+              <a:rPr lang="zh-CN" altLang="en-US" dirty="0"/>
+              <a:t>变量</a:t>
+            </a:r>
+            <a:r>
+              <a:rPr lang="zh-CN" altLang="en-US" dirty="0">
+                <a:solidFill>
+                  <a:srgbClr val="FF0000"/>
+                </a:solidFill>
+              </a:rPr>
+              <a:t>作用域遮掩</a:t>
+            </a:r>
+          </a:p>
+        </p:txBody>
+      </p:sp>
+      <p:sp>
+        <p:nvSpPr>
+          <p:cNvPr id="12" name="文本框 11">
+            <a:extLst>
+              <a:ext uri="{FF2B5EF4-FFF2-40B4-BE49-F238E27FC236}">
+                <a16:creationId xmlns:a16="http://schemas.microsoft.com/office/drawing/2014/main" id="{03FB84B4-3274-FA79-A540-8B1F2E53F7C2}"/>
+              </a:ext>
+            </a:extLst>
+          </p:cNvPr>
+          <p:cNvSpPr txBox="1"/>
+          <p:nvPr/>
+        </p:nvSpPr>
+        <p:spPr>
+          <a:xfrm>
+            <a:off x="2269169" y="2871019"/>
+            <a:ext cx="877163" cy="369332"/>
+          </a:xfrm>
+          <a:prstGeom prst="rect">
+            <a:avLst/>
+          </a:prstGeom>
+          <a:noFill/>
+        </p:spPr>
+        <p:txBody>
+          <a:bodyPr wrap="none" rtlCol="0">
+            <a:spAutoFit/>
+          </a:bodyPr>
+          <a:lstStyle/>
+          <a:p>
+            <a:r>
+              <a:rPr lang="zh-CN" altLang="en-US" dirty="0">
+                <a:solidFill>
+                  <a:srgbClr val="FF0000"/>
+                </a:solidFill>
+              </a:rPr>
+              <a:t>跨文件</a:t>
+            </a:r>
+          </a:p>
+        </p:txBody>
+      </p:sp>
+    </p:spTree>
+    <p:extLst>
+      <p:ext uri="{BB962C8B-B14F-4D97-AF65-F5344CB8AC3E}">
+        <p14:creationId xmlns:p14="http://schemas.microsoft.com/office/powerpoint/2010/main" val="625646478"/>
+      </p:ext>
+    </p:extLst>
+  </p:cSld>
+  <p:clrMapOvr>
+    <a:masterClrMapping/>
+  </p:clrMapOvr>
+</p:sld>
+</file>
+
+<file path=ppt/slides/slide9.xml><?xml version="1.0" encoding="utf-8"?>
+<p:sld xmlns:a="http://schemas.openxmlformats.org/drawingml/2006/main" xmlns:r="http://schemas.openxmlformats.org/officeDocument/2006/relationships" xmlns:p="http://schemas.openxmlformats.org/presentationml/2006/main">
+  <p:cSld>
+    <p:spTree>
+      <p:nvGrpSpPr>
+        <p:cNvPr id="1" name=""/>
+        <p:cNvGrpSpPr/>
+        <p:nvPr/>
+      </p:nvGrpSpPr>
+      <p:grpSpPr>
+        <a:xfrm>
+          <a:off x="0" y="0"/>
+          <a:ext cx="0" cy="0"/>
+          <a:chOff x="0" y="0"/>
+          <a:chExt cx="0" cy="0"/>
+        </a:xfrm>
+      </p:grpSpPr>
+      <p:sp>
+        <p:nvSpPr>
+          <p:cNvPr id="4" name="文本框 3">
+            <a:extLst>
+              <a:ext uri="{FF2B5EF4-FFF2-40B4-BE49-F238E27FC236}">
+                <a16:creationId xmlns:a16="http://schemas.microsoft.com/office/drawing/2014/main" id="{FF72A31B-AB18-32FB-9344-BB3A256F133E}"/>
+              </a:ext>
+            </a:extLst>
+          </p:cNvPr>
+          <p:cNvSpPr txBox="1"/>
+          <p:nvPr/>
+        </p:nvSpPr>
+        <p:spPr>
+          <a:xfrm>
+            <a:off x="1160206" y="1278194"/>
+            <a:ext cx="6542176" cy="1754326"/>
+          </a:xfrm>
+          <a:prstGeom prst="rect">
+            <a:avLst/>
+          </a:prstGeom>
+          <a:noFill/>
+        </p:spPr>
+        <p:txBody>
+          <a:bodyPr wrap="none" rtlCol="0">
+            <a:spAutoFit/>
+          </a:bodyPr>
+          <a:lstStyle/>
+          <a:p>
+            <a:r>
+              <a:rPr lang="zh-CN" altLang="en-US" dirty="0"/>
+              <a:t>实际扫描了</a:t>
+            </a:r>
+            <a:r>
+              <a:rPr lang="en-US" altLang="zh-CN" dirty="0" err="1"/>
+              <a:t>pytorch</a:t>
+            </a:r>
+            <a:r>
+              <a:rPr lang="zh-CN" altLang="en-US" dirty="0"/>
+              <a:t>项目， 结果发现有</a:t>
+            </a:r>
+            <a:r>
+              <a:rPr lang="en-US" altLang="zh-CN" dirty="0"/>
+              <a:t>1800</a:t>
+            </a:r>
+            <a:r>
+              <a:rPr lang="zh-CN" altLang="en-US" dirty="0"/>
+              <a:t>个</a:t>
+            </a:r>
+            <a:r>
+              <a:rPr lang="en-US" altLang="zh-CN" dirty="0"/>
+              <a:t>function</a:t>
+            </a:r>
+            <a:r>
+              <a:rPr lang="zh-CN" altLang="en-US" dirty="0"/>
+              <a:t>、</a:t>
+            </a:r>
+            <a:r>
+              <a:rPr lang="en-US" altLang="zh-CN" dirty="0"/>
+              <a:t>method</a:t>
+            </a:r>
+          </a:p>
+          <a:p>
+            <a:endParaRPr lang="en-US" altLang="zh-CN" dirty="0"/>
+          </a:p>
+          <a:p>
+            <a:r>
+              <a:rPr lang="zh-CN" altLang="en-US" dirty="0"/>
+              <a:t>构建</a:t>
+            </a:r>
+            <a:r>
+              <a:rPr lang="en-US" altLang="zh-CN" dirty="0"/>
+              <a:t>DAG</a:t>
+            </a:r>
+            <a:r>
+              <a:rPr lang="zh-CN" altLang="en-US" dirty="0"/>
+              <a:t>用了</a:t>
+            </a:r>
+            <a:r>
+              <a:rPr lang="en-US" altLang="zh-CN" dirty="0"/>
+              <a:t>30</a:t>
+            </a:r>
+            <a:r>
+              <a:rPr lang="zh-CN" altLang="en-US" dirty="0"/>
+              <a:t>分钟，一个非常大的图</a:t>
+            </a:r>
+            <a:endParaRPr lang="en-US" altLang="zh-CN" dirty="0"/>
+          </a:p>
+          <a:p>
+            <a:endParaRPr lang="en-US" altLang="zh-CN" dirty="0"/>
+          </a:p>
+          <a:p>
+            <a:endParaRPr lang="en-US" altLang="zh-CN" dirty="0"/>
+          </a:p>
+          <a:p>
+            <a:r>
+              <a:rPr lang="zh-CN" altLang="en-US" dirty="0"/>
+              <a:t>下一步应该考虑基于给定的</a:t>
+            </a:r>
+            <a:r>
+              <a:rPr lang="en-US" altLang="zh-CN" dirty="0"/>
+              <a:t>function</a:t>
+            </a:r>
+            <a:r>
+              <a:rPr lang="zh-CN" altLang="en-US" dirty="0"/>
+              <a:t>、</a:t>
+            </a:r>
+            <a:r>
+              <a:rPr lang="en-US" altLang="zh-CN" dirty="0"/>
+              <a:t>method </a:t>
+            </a:r>
+            <a:r>
+              <a:rPr lang="zh-CN" altLang="en-US" dirty="0"/>
+              <a:t>边查边构建</a:t>
+            </a:r>
+          </a:p>
+        </p:txBody>
+      </p:sp>
+    </p:spTree>
+    <p:extLst>
+      <p:ext uri="{BB962C8B-B14F-4D97-AF65-F5344CB8AC3E}">
+        <p14:creationId xmlns:p14="http://schemas.microsoft.com/office/powerpoint/2010/main" val="1589981041"/>
       </p:ext>
     </p:extLst>
   </p:cSld>

--- a/docs/drawio画图/日记/review.pptx
+++ b/docs/drawio画图/日记/review.pptx
@@ -5,7 +5,7 @@
     <p:sldMasterId id="2147483648" r:id="rId1"/>
   </p:sldMasterIdLst>
   <p:notesMasterIdLst>
-    <p:notesMasterId r:id="rId12"/>
+    <p:notesMasterId r:id="rId24"/>
   </p:notesMasterIdLst>
   <p:sldIdLst>
     <p:sldId id="256" r:id="rId2"/>
@@ -18,6 +18,18 @@
     <p:sldId id="264" r:id="rId9"/>
     <p:sldId id="265" r:id="rId10"/>
     <p:sldId id="266" r:id="rId11"/>
+    <p:sldId id="268" r:id="rId12"/>
+    <p:sldId id="269" r:id="rId13"/>
+    <p:sldId id="270" r:id="rId14"/>
+    <p:sldId id="271" r:id="rId15"/>
+    <p:sldId id="272" r:id="rId16"/>
+    <p:sldId id="273" r:id="rId17"/>
+    <p:sldId id="274" r:id="rId18"/>
+    <p:sldId id="275" r:id="rId19"/>
+    <p:sldId id="277" r:id="rId20"/>
+    <p:sldId id="276" r:id="rId21"/>
+    <p:sldId id="278" r:id="rId22"/>
+    <p:sldId id="279" r:id="rId23"/>
   </p:sldIdLst>
   <p:sldSz cx="12192000" cy="6858000"/>
   <p:notesSz cx="6858000" cy="9144000"/>
@@ -206,7 +218,7 @@
           <a:p>
             <a:fld id="{F025F477-E431-4287-BBCF-F0B82B99CDE8}" type="datetimeFigureOut">
               <a:rPr lang="zh-CN" altLang="en-US" smtClean="0"/>
-              <a:t>2025/8/27</a:t>
+              <a:t>2025/9/28</a:t>
             </a:fld>
             <a:endParaRPr lang="zh-CN" altLang="en-US"/>
           </a:p>
@@ -704,7 +716,7 @@
           <a:p>
             <a:fld id="{57E0CF9C-0FB6-4165-824A-A36BB34C0D04}" type="datetimeFigureOut">
               <a:rPr lang="zh-CN" altLang="en-US" smtClean="0"/>
-              <a:t>2025/8/27</a:t>
+              <a:t>2025/9/28</a:t>
             </a:fld>
             <a:endParaRPr lang="zh-CN" altLang="en-US"/>
           </a:p>
@@ -902,7 +914,7 @@
           <a:p>
             <a:fld id="{57E0CF9C-0FB6-4165-824A-A36BB34C0D04}" type="datetimeFigureOut">
               <a:rPr lang="zh-CN" altLang="en-US" smtClean="0"/>
-              <a:t>2025/8/27</a:t>
+              <a:t>2025/9/28</a:t>
             </a:fld>
             <a:endParaRPr lang="zh-CN" altLang="en-US"/>
           </a:p>
@@ -1110,7 +1122,7 @@
           <a:p>
             <a:fld id="{57E0CF9C-0FB6-4165-824A-A36BB34C0D04}" type="datetimeFigureOut">
               <a:rPr lang="zh-CN" altLang="en-US" smtClean="0"/>
-              <a:t>2025/8/27</a:t>
+              <a:t>2025/9/28</a:t>
             </a:fld>
             <a:endParaRPr lang="zh-CN" altLang="en-US"/>
           </a:p>
@@ -1308,7 +1320,7 @@
           <a:p>
             <a:fld id="{57E0CF9C-0FB6-4165-824A-A36BB34C0D04}" type="datetimeFigureOut">
               <a:rPr lang="zh-CN" altLang="en-US" smtClean="0"/>
-              <a:t>2025/8/27</a:t>
+              <a:t>2025/9/28</a:t>
             </a:fld>
             <a:endParaRPr lang="zh-CN" altLang="en-US"/>
           </a:p>
@@ -1583,7 +1595,7 @@
           <a:p>
             <a:fld id="{57E0CF9C-0FB6-4165-824A-A36BB34C0D04}" type="datetimeFigureOut">
               <a:rPr lang="zh-CN" altLang="en-US" smtClean="0"/>
-              <a:t>2025/8/27</a:t>
+              <a:t>2025/9/28</a:t>
             </a:fld>
             <a:endParaRPr lang="zh-CN" altLang="en-US"/>
           </a:p>
@@ -1848,7 +1860,7 @@
           <a:p>
             <a:fld id="{57E0CF9C-0FB6-4165-824A-A36BB34C0D04}" type="datetimeFigureOut">
               <a:rPr lang="zh-CN" altLang="en-US" smtClean="0"/>
-              <a:t>2025/8/27</a:t>
+              <a:t>2025/9/28</a:t>
             </a:fld>
             <a:endParaRPr lang="zh-CN" altLang="en-US"/>
           </a:p>
@@ -2260,7 +2272,7 @@
           <a:p>
             <a:fld id="{57E0CF9C-0FB6-4165-824A-A36BB34C0D04}" type="datetimeFigureOut">
               <a:rPr lang="zh-CN" altLang="en-US" smtClean="0"/>
-              <a:t>2025/8/27</a:t>
+              <a:t>2025/9/28</a:t>
             </a:fld>
             <a:endParaRPr lang="zh-CN" altLang="en-US"/>
           </a:p>
@@ -2401,7 +2413,7 @@
           <a:p>
             <a:fld id="{57E0CF9C-0FB6-4165-824A-A36BB34C0D04}" type="datetimeFigureOut">
               <a:rPr lang="zh-CN" altLang="en-US" smtClean="0"/>
-              <a:t>2025/8/27</a:t>
+              <a:t>2025/9/28</a:t>
             </a:fld>
             <a:endParaRPr lang="zh-CN" altLang="en-US"/>
           </a:p>
@@ -2514,7 +2526,7 @@
           <a:p>
             <a:fld id="{57E0CF9C-0FB6-4165-824A-A36BB34C0D04}" type="datetimeFigureOut">
               <a:rPr lang="zh-CN" altLang="en-US" smtClean="0"/>
-              <a:t>2025/8/27</a:t>
+              <a:t>2025/9/28</a:t>
             </a:fld>
             <a:endParaRPr lang="zh-CN" altLang="en-US"/>
           </a:p>
@@ -2825,7 +2837,7 @@
           <a:p>
             <a:fld id="{57E0CF9C-0FB6-4165-824A-A36BB34C0D04}" type="datetimeFigureOut">
               <a:rPr lang="zh-CN" altLang="en-US" smtClean="0"/>
-              <a:t>2025/8/27</a:t>
+              <a:t>2025/9/28</a:t>
             </a:fld>
             <a:endParaRPr lang="zh-CN" altLang="en-US"/>
           </a:p>
@@ -3113,7 +3125,7 @@
           <a:p>
             <a:fld id="{57E0CF9C-0FB6-4165-824A-A36BB34C0D04}" type="datetimeFigureOut">
               <a:rPr lang="zh-CN" altLang="en-US" smtClean="0"/>
-              <a:t>2025/8/27</a:t>
+              <a:t>2025/9/28</a:t>
             </a:fld>
             <a:endParaRPr lang="zh-CN" altLang="en-US"/>
           </a:p>
@@ -3354,7 +3366,7 @@
           <a:p>
             <a:fld id="{57E0CF9C-0FB6-4165-824A-A36BB34C0D04}" type="datetimeFigureOut">
               <a:rPr lang="zh-CN" altLang="en-US" smtClean="0"/>
-              <a:t>2025/8/27</a:t>
+              <a:t>2025/9/28</a:t>
             </a:fld>
             <a:endParaRPr lang="zh-CN" altLang="en-US"/>
           </a:p>
@@ -6414,7 +6426,7 @@
         </p:nvSpPr>
         <p:spPr>
           <a:xfrm>
-            <a:off x="9804028" y="3185602"/>
+            <a:off x="9609068" y="3217615"/>
             <a:ext cx="1938252" cy="776798"/>
           </a:xfrm>
           <a:prstGeom prst="rect">
@@ -7247,6 +7259,4683 @@
 </p:sld>
 </file>
 
+<file path=ppt/slides/slide11.xml><?xml version="1.0" encoding="utf-8"?>
+<p:sld xmlns:a="http://schemas.openxmlformats.org/drawingml/2006/main" xmlns:r="http://schemas.openxmlformats.org/officeDocument/2006/relationships" xmlns:p="http://schemas.openxmlformats.org/presentationml/2006/main">
+  <p:cSld>
+    <p:spTree>
+      <p:nvGrpSpPr>
+        <p:cNvPr id="1" name=""/>
+        <p:cNvGrpSpPr/>
+        <p:nvPr/>
+      </p:nvGrpSpPr>
+      <p:grpSpPr>
+        <a:xfrm>
+          <a:off x="0" y="0"/>
+          <a:ext cx="0" cy="0"/>
+          <a:chOff x="0" y="0"/>
+          <a:chExt cx="0" cy="0"/>
+        </a:xfrm>
+      </p:grpSpPr>
+      <p:sp>
+        <p:nvSpPr>
+          <p:cNvPr id="2" name="标题 1">
+            <a:extLst>
+              <a:ext uri="{FF2B5EF4-FFF2-40B4-BE49-F238E27FC236}">
+                <a16:creationId xmlns:a16="http://schemas.microsoft.com/office/drawing/2014/main" id="{B24B444B-1FE8-9091-C11D-491E124D6C75}"/>
+              </a:ext>
+            </a:extLst>
+          </p:cNvPr>
+          <p:cNvSpPr>
+            <a:spLocks noGrp="1"/>
+          </p:cNvSpPr>
+          <p:nvPr>
+            <p:ph type="title"/>
+          </p:nvPr>
+        </p:nvSpPr>
+        <p:spPr/>
+        <p:txBody>
+          <a:bodyPr/>
+          <a:lstStyle/>
+          <a:p>
+            <a:r>
+              <a:rPr lang="zh-CN" altLang="en-US" dirty="0"/>
+              <a:t>将全局</a:t>
+            </a:r>
+            <a:r>
+              <a:rPr lang="en-US" altLang="zh-CN" dirty="0"/>
+              <a:t>call graph DAG</a:t>
+            </a:r>
+            <a:r>
+              <a:rPr lang="zh-CN" altLang="en-US" dirty="0"/>
+              <a:t>改为局部</a:t>
+            </a:r>
+          </a:p>
+        </p:txBody>
+      </p:sp>
+      <p:sp>
+        <p:nvSpPr>
+          <p:cNvPr id="3" name="内容占位符 2">
+            <a:extLst>
+              <a:ext uri="{FF2B5EF4-FFF2-40B4-BE49-F238E27FC236}">
+                <a16:creationId xmlns:a16="http://schemas.microsoft.com/office/drawing/2014/main" id="{5F3B8D27-8CA7-01FE-BD8A-78C84B57FD51}"/>
+              </a:ext>
+            </a:extLst>
+          </p:cNvPr>
+          <p:cNvSpPr>
+            <a:spLocks noGrp="1"/>
+          </p:cNvSpPr>
+          <p:nvPr>
+            <p:ph idx="1"/>
+          </p:nvPr>
+        </p:nvSpPr>
+        <p:spPr>
+          <a:xfrm>
+            <a:off x="838200" y="1537855"/>
+            <a:ext cx="10515600" cy="4639108"/>
+          </a:xfrm>
+        </p:spPr>
+        <p:txBody>
+          <a:bodyPr>
+            <a:normAutofit fontScale="92500" lnSpcReduction="10000"/>
+          </a:bodyPr>
+          <a:lstStyle/>
+          <a:p>
+            <a:pPr marL="0" indent="0">
+              <a:buNone/>
+            </a:pPr>
+            <a:r>
+              <a:rPr lang="zh-CN" altLang="en-US" sz="2000" dirty="0"/>
+              <a:t>原来是：</a:t>
+            </a:r>
+            <a:endParaRPr lang="en-US" altLang="zh-CN" sz="2000" dirty="0"/>
+          </a:p>
+          <a:p>
+            <a:pPr marL="0" indent="0">
+              <a:buNone/>
+            </a:pPr>
+            <a:r>
+              <a:rPr lang="en-US" altLang="zh-CN" sz="2000" dirty="0"/>
+              <a:t>	0. </a:t>
+            </a:r>
+            <a:r>
+              <a:rPr lang="zh-CN" altLang="en-US" sz="2000" dirty="0"/>
+              <a:t>给定待审阅的</a:t>
+            </a:r>
+            <a:r>
+              <a:rPr lang="en-US" altLang="zh-CN" sz="2000" dirty="0"/>
+              <a:t>function</a:t>
+            </a:r>
+            <a:r>
+              <a:rPr lang="zh-CN" altLang="en-US" sz="2000" dirty="0"/>
+              <a:t>的</a:t>
+            </a:r>
+            <a:r>
+              <a:rPr lang="en-US" altLang="zh-CN" sz="2000" dirty="0" err="1"/>
+              <a:t>qname</a:t>
+            </a:r>
+            <a:r>
+              <a:rPr lang="en-US" altLang="zh-CN" sz="2000" dirty="0"/>
+              <a:t>, </a:t>
+            </a:r>
+            <a:r>
+              <a:rPr lang="zh-CN" altLang="en-US" sz="2000" dirty="0"/>
+              <a:t>以及</a:t>
+            </a:r>
+            <a:r>
+              <a:rPr lang="en-US" altLang="zh-CN" sz="2000" dirty="0" err="1"/>
+              <a:t>repo_path</a:t>
+            </a:r>
+            <a:endParaRPr lang="en-US" altLang="zh-CN" sz="2000" dirty="0"/>
+          </a:p>
+          <a:p>
+            <a:pPr marL="0" indent="0">
+              <a:buNone/>
+            </a:pPr>
+            <a:r>
+              <a:rPr lang="en-US" altLang="zh-CN" sz="2000" dirty="0"/>
+              <a:t>	1. </a:t>
+            </a:r>
+            <a:r>
+              <a:rPr lang="en-US" altLang="zh-CN" sz="2000" dirty="0" err="1"/>
+              <a:t>ast</a:t>
+            </a:r>
+            <a:r>
+              <a:rPr lang="zh-CN" altLang="en-US" sz="2000" dirty="0"/>
+              <a:t>扫描整个</a:t>
+            </a:r>
+            <a:r>
+              <a:rPr lang="en-US" altLang="zh-CN" sz="2000" dirty="0"/>
+              <a:t>repo</a:t>
+            </a:r>
+            <a:r>
+              <a:rPr lang="zh-CN" altLang="en-US" sz="2000" dirty="0"/>
+              <a:t>，对所有的</a:t>
+            </a:r>
+            <a:r>
+              <a:rPr lang="en-US" altLang="zh-CN" sz="2000" dirty="0" err="1"/>
+              <a:t>funtion</a:t>
+            </a:r>
+            <a:r>
+              <a:rPr lang="zh-CN" altLang="en-US" sz="2000" dirty="0"/>
+              <a:t>构造一个 </a:t>
+            </a:r>
+            <a:r>
+              <a:rPr lang="en-US" altLang="zh-CN" sz="2000" dirty="0" err="1"/>
+              <a:t>qname</a:t>
+            </a:r>
+            <a:r>
+              <a:rPr lang="en-US" altLang="zh-CN" sz="2000" dirty="0"/>
+              <a:t>-&gt;content</a:t>
+            </a:r>
+            <a:r>
+              <a:rPr lang="zh-CN" altLang="en-US" sz="2000" dirty="0"/>
+              <a:t>的映射表</a:t>
+            </a:r>
+            <a:r>
+              <a:rPr lang="en-US" altLang="zh-CN" sz="2000" dirty="0" err="1"/>
+              <a:t>dict</a:t>
+            </a:r>
+            <a:endParaRPr lang="en-US" altLang="zh-CN" sz="2000" dirty="0"/>
+          </a:p>
+          <a:p>
+            <a:pPr marL="0" indent="0">
+              <a:buNone/>
+            </a:pPr>
+            <a:r>
+              <a:rPr lang="en-US" altLang="zh-CN" sz="2000" dirty="0"/>
+              <a:t>	2.</a:t>
+            </a:r>
+            <a:r>
+              <a:rPr lang="zh-CN" altLang="en-US" sz="2000" dirty="0"/>
+              <a:t> 对于给定的一个</a:t>
+            </a:r>
+            <a:r>
+              <a:rPr lang="en-US" altLang="zh-CN" sz="2000" dirty="0" err="1"/>
+              <a:t>qname</a:t>
+            </a:r>
+            <a:r>
+              <a:rPr lang="zh-CN" altLang="en-US" sz="2000" dirty="0"/>
+              <a:t>，利用</a:t>
+            </a:r>
+            <a:r>
+              <a:rPr lang="en-US" altLang="zh-CN" sz="2000" dirty="0"/>
+              <a:t>pyre</a:t>
+            </a:r>
+            <a:r>
+              <a:rPr lang="zh-CN" altLang="en-US" sz="2000" dirty="0"/>
+              <a:t>查询其</a:t>
+            </a:r>
+            <a:r>
+              <a:rPr lang="en-US" altLang="zh-CN" sz="2000" dirty="0"/>
+              <a:t>callee</a:t>
+            </a:r>
+            <a:r>
+              <a:rPr lang="zh-CN" altLang="en-US" sz="2000" dirty="0"/>
+              <a:t>和</a:t>
+            </a:r>
+            <a:r>
+              <a:rPr lang="en-US" altLang="zh-CN" sz="2000" dirty="0"/>
+              <a:t>caller tree</a:t>
+            </a:r>
+          </a:p>
+          <a:p>
+            <a:pPr marL="0" indent="0">
+              <a:buNone/>
+            </a:pPr>
+            <a:r>
+              <a:rPr lang="en-US" altLang="zh-CN" sz="2000" dirty="0"/>
+              <a:t>	3. </a:t>
+            </a:r>
+            <a:r>
+              <a:rPr lang="en-US" altLang="zh-CN" sz="2000" dirty="0" err="1"/>
+              <a:t>bfs</a:t>
+            </a:r>
+            <a:r>
+              <a:rPr lang="zh-CN" altLang="en-US" sz="2000" dirty="0"/>
+              <a:t>搜索上面的</a:t>
+            </a:r>
+            <a:r>
+              <a:rPr lang="en-US" altLang="zh-CN" sz="2000" dirty="0"/>
+              <a:t>tree</a:t>
+            </a:r>
+            <a:r>
+              <a:rPr lang="zh-CN" altLang="en-US" sz="2000" dirty="0"/>
+              <a:t>，并通过映射表</a:t>
+            </a:r>
+            <a:r>
+              <a:rPr lang="en-US" altLang="zh-CN" sz="2000" dirty="0" err="1"/>
+              <a:t>dict</a:t>
+            </a:r>
+            <a:r>
+              <a:rPr lang="zh-CN" altLang="en-US" sz="2000" dirty="0"/>
+              <a:t>获取对应</a:t>
+            </a:r>
+            <a:r>
+              <a:rPr lang="en-US" altLang="zh-CN" sz="2000" dirty="0"/>
+              <a:t>function</a:t>
+            </a:r>
+            <a:r>
+              <a:rPr lang="zh-CN" altLang="en-US" sz="2000" dirty="0"/>
+              <a:t>的</a:t>
+            </a:r>
+            <a:r>
+              <a:rPr lang="en-US" altLang="zh-CN" sz="2000" dirty="0"/>
+              <a:t>content</a:t>
+            </a:r>
+          </a:p>
+          <a:p>
+            <a:pPr marL="0" indent="0">
+              <a:buNone/>
+            </a:pPr>
+            <a:endParaRPr lang="en-US" altLang="zh-CN" sz="2000" dirty="0"/>
+          </a:p>
+          <a:p>
+            <a:pPr marL="0" indent="0">
+              <a:buNone/>
+            </a:pPr>
+            <a:r>
+              <a:rPr lang="zh-CN" altLang="en-US" sz="2000" dirty="0"/>
+              <a:t>现在是：</a:t>
+            </a:r>
+            <a:endParaRPr lang="en-US" altLang="zh-CN" sz="2000" dirty="0"/>
+          </a:p>
+          <a:p>
+            <a:pPr marL="0" indent="0">
+              <a:buNone/>
+            </a:pPr>
+            <a:r>
+              <a:rPr lang="en-US" altLang="zh-CN" sz="2000" dirty="0"/>
+              <a:t>	0. </a:t>
+            </a:r>
+            <a:r>
+              <a:rPr lang="zh-CN" altLang="en-US" sz="2000" dirty="0"/>
+              <a:t>给定</a:t>
+            </a:r>
+            <a:r>
+              <a:rPr lang="en-US" altLang="zh-CN" sz="2000" dirty="0"/>
+              <a:t>review function</a:t>
+            </a:r>
+            <a:r>
+              <a:rPr lang="zh-CN" altLang="en-US" sz="2000" dirty="0"/>
+              <a:t>，以及对应的</a:t>
+            </a:r>
+            <a:r>
+              <a:rPr lang="en-US" altLang="zh-CN" sz="2000" dirty="0" err="1"/>
+              <a:t>file_path</a:t>
+            </a:r>
+            <a:r>
+              <a:rPr lang="zh-CN" altLang="en-US" sz="2000" dirty="0"/>
+              <a:t>， </a:t>
+            </a:r>
+            <a:r>
+              <a:rPr lang="en-US" altLang="zh-CN" sz="2000" dirty="0" err="1"/>
+              <a:t>repo_path</a:t>
+            </a:r>
+            <a:endParaRPr lang="en-US" altLang="zh-CN" sz="2000" dirty="0"/>
+          </a:p>
+          <a:p>
+            <a:pPr marL="0" indent="0">
+              <a:buNone/>
+            </a:pPr>
+            <a:r>
+              <a:rPr lang="en-US" altLang="zh-CN" sz="2000" dirty="0"/>
+              <a:t>	1. </a:t>
+            </a:r>
+            <a:r>
+              <a:rPr lang="en-US" altLang="zh-CN" sz="2000" dirty="0" err="1"/>
+              <a:t>ast</a:t>
+            </a:r>
+            <a:r>
+              <a:rPr lang="zh-CN" altLang="en-US" sz="2000" dirty="0"/>
+              <a:t>扫描</a:t>
+            </a:r>
+            <a:r>
+              <a:rPr lang="en-US" altLang="zh-CN" sz="2000" dirty="0" err="1"/>
+              <a:t>file_path</a:t>
+            </a:r>
+            <a:r>
+              <a:rPr lang="zh-CN" altLang="en-US" sz="2000" dirty="0"/>
+              <a:t>，获取对应</a:t>
+            </a:r>
+            <a:r>
+              <a:rPr lang="en-US" altLang="zh-CN" sz="2000" dirty="0" err="1">
+                <a:solidFill>
+                  <a:srgbClr val="FF0000"/>
+                </a:solidFill>
+              </a:rPr>
+              <a:t>qname</a:t>
+            </a:r>
+            <a:r>
+              <a:rPr lang="en-US" altLang="zh-CN" sz="2000" dirty="0">
+                <a:solidFill>
+                  <a:srgbClr val="FF0000"/>
+                </a:solidFill>
+              </a:rPr>
+              <a:t>   (</a:t>
+            </a:r>
+            <a:r>
+              <a:rPr lang="zh-CN" altLang="en-US" sz="2000" dirty="0">
+                <a:solidFill>
+                  <a:srgbClr val="FF0000"/>
+                </a:solidFill>
+              </a:rPr>
+              <a:t>路径名</a:t>
+            </a:r>
+            <a:r>
+              <a:rPr lang="en-US" altLang="zh-CN" sz="2000" dirty="0">
+                <a:solidFill>
+                  <a:srgbClr val="FF0000"/>
+                </a:solidFill>
+              </a:rPr>
+              <a:t>.</a:t>
+            </a:r>
+            <a:r>
+              <a:rPr lang="zh-CN" altLang="en-US" sz="2000" dirty="0">
+                <a:solidFill>
+                  <a:srgbClr val="FF0000"/>
+                </a:solidFill>
+              </a:rPr>
+              <a:t>类名</a:t>
+            </a:r>
+            <a:r>
+              <a:rPr lang="en-US" altLang="zh-CN" sz="2000" dirty="0">
+                <a:solidFill>
+                  <a:srgbClr val="FF0000"/>
+                </a:solidFill>
+              </a:rPr>
+              <a:t>.</a:t>
+            </a:r>
+            <a:r>
+              <a:rPr lang="en-US" altLang="zh-CN" sz="2000" dirty="0" err="1">
+                <a:solidFill>
+                  <a:srgbClr val="FF0000"/>
+                </a:solidFill>
+              </a:rPr>
+              <a:t>func_name</a:t>
+            </a:r>
+            <a:r>
+              <a:rPr lang="en-US" altLang="zh-CN" sz="2000" dirty="0">
+                <a:solidFill>
+                  <a:srgbClr val="FF0000"/>
+                </a:solidFill>
+              </a:rPr>
+              <a:t>)</a:t>
+            </a:r>
+          </a:p>
+          <a:p>
+            <a:pPr marL="0" indent="0">
+              <a:buNone/>
+            </a:pPr>
+            <a:r>
+              <a:rPr lang="en-US" altLang="zh-CN" sz="2000" dirty="0"/>
+              <a:t>	2.</a:t>
+            </a:r>
+            <a:r>
+              <a:rPr lang="zh-CN" altLang="en-US" sz="2000" dirty="0"/>
+              <a:t> 再扫描一遍，构建</a:t>
+            </a:r>
+            <a:r>
+              <a:rPr lang="en-US" altLang="zh-CN" sz="2000" dirty="0"/>
+              <a:t>module call graph (</a:t>
+            </a:r>
+            <a:r>
+              <a:rPr lang="en-US" altLang="zh-CN" sz="2000" dirty="0" err="1"/>
+              <a:t>bfs</a:t>
+            </a:r>
+            <a:r>
+              <a:rPr lang="en-US" altLang="zh-CN" sz="2000" dirty="0"/>
+              <a:t>)</a:t>
+            </a:r>
+          </a:p>
+          <a:p>
+            <a:pPr marL="0" indent="0">
+              <a:buNone/>
+            </a:pPr>
+            <a:r>
+              <a:rPr lang="en-US" altLang="zh-CN" sz="2000" dirty="0"/>
+              <a:t>	3.  </a:t>
+            </a:r>
+            <a:r>
+              <a:rPr lang="zh-CN" altLang="en-US" sz="2000" dirty="0"/>
+              <a:t>扫描所涉及到的</a:t>
+            </a:r>
+            <a:r>
+              <a:rPr lang="en-US" altLang="zh-CN" sz="2000" dirty="0"/>
+              <a:t>module</a:t>
+            </a:r>
+            <a:r>
+              <a:rPr lang="zh-CN" altLang="en-US" sz="2000" dirty="0"/>
+              <a:t>，构建</a:t>
+            </a:r>
+            <a:r>
+              <a:rPr lang="en-US" altLang="zh-CN" sz="2000" dirty="0" err="1"/>
+              <a:t>qname</a:t>
+            </a:r>
+            <a:r>
+              <a:rPr lang="en-US" altLang="zh-CN" sz="2000" dirty="0"/>
+              <a:t>-&gt;content</a:t>
+            </a:r>
+            <a:r>
+              <a:rPr lang="zh-CN" altLang="en-US" sz="2000" dirty="0"/>
+              <a:t>的映射表</a:t>
+            </a:r>
+            <a:r>
+              <a:rPr lang="en-US" altLang="zh-CN" sz="2000" dirty="0" err="1"/>
+              <a:t>dict</a:t>
+            </a:r>
+            <a:endParaRPr lang="en-US" altLang="zh-CN" sz="2000" dirty="0"/>
+          </a:p>
+          <a:p>
+            <a:pPr marL="0" indent="0">
+              <a:buNone/>
+            </a:pPr>
+            <a:r>
+              <a:rPr lang="en-US" altLang="zh-CN" sz="2000" dirty="0"/>
+              <a:t>	4. </a:t>
+            </a:r>
+            <a:r>
+              <a:rPr lang="zh-CN" altLang="en-US" sz="2000" dirty="0"/>
+              <a:t>利用</a:t>
+            </a:r>
+            <a:r>
+              <a:rPr lang="en-US" altLang="zh-CN" sz="2000" dirty="0"/>
+              <a:t>pyre </a:t>
+            </a:r>
+            <a:r>
+              <a:rPr lang="en-US" altLang="zh-CN" sz="2000" dirty="0" err="1"/>
+              <a:t>bfs</a:t>
+            </a:r>
+            <a:r>
+              <a:rPr lang="zh-CN" altLang="en-US" sz="2000" dirty="0"/>
+              <a:t>查询</a:t>
+            </a:r>
+            <a:r>
+              <a:rPr lang="en-US" altLang="zh-CN" sz="2000" dirty="0"/>
+              <a:t>callee</a:t>
+            </a:r>
+            <a:r>
+              <a:rPr lang="zh-CN" altLang="en-US" sz="2000" dirty="0"/>
+              <a:t>和</a:t>
+            </a:r>
+            <a:r>
+              <a:rPr lang="en-US" altLang="zh-CN" sz="2000" dirty="0"/>
+              <a:t>caller</a:t>
+            </a:r>
+            <a:r>
+              <a:rPr lang="zh-CN" altLang="en-US" sz="2000" dirty="0"/>
+              <a:t> </a:t>
+            </a:r>
+            <a:r>
+              <a:rPr lang="en-US" altLang="zh-CN" sz="2000" dirty="0"/>
+              <a:t>tree</a:t>
+            </a:r>
+            <a:r>
+              <a:rPr lang="zh-CN" altLang="en-US" sz="2000" dirty="0"/>
+              <a:t>，同时填充</a:t>
+            </a:r>
+            <a:r>
+              <a:rPr lang="en-US" altLang="zh-CN" sz="2000" dirty="0"/>
+              <a:t>content</a:t>
+            </a:r>
+          </a:p>
+          <a:p>
+            <a:pPr marL="0" indent="0">
+              <a:buNone/>
+            </a:pPr>
+            <a:r>
+              <a:rPr lang="en-US" altLang="zh-CN" sz="2000" dirty="0"/>
+              <a:t>	</a:t>
+            </a:r>
+            <a:endParaRPr lang="zh-CN" altLang="en-US" sz="2000" dirty="0"/>
+          </a:p>
+        </p:txBody>
+      </p:sp>
+    </p:spTree>
+    <p:extLst>
+      <p:ext uri="{BB962C8B-B14F-4D97-AF65-F5344CB8AC3E}">
+        <p14:creationId xmlns:p14="http://schemas.microsoft.com/office/powerpoint/2010/main" val="1421068868"/>
+      </p:ext>
+    </p:extLst>
+  </p:cSld>
+  <p:clrMapOvr>
+    <a:masterClrMapping/>
+  </p:clrMapOvr>
+</p:sld>
+</file>
+
+<file path=ppt/slides/slide12.xml><?xml version="1.0" encoding="utf-8"?>
+<p:sld xmlns:a="http://schemas.openxmlformats.org/drawingml/2006/main" xmlns:r="http://schemas.openxmlformats.org/officeDocument/2006/relationships" xmlns:p="http://schemas.openxmlformats.org/presentationml/2006/main">
+  <p:cSld>
+    <p:spTree>
+      <p:nvGrpSpPr>
+        <p:cNvPr id="1" name=""/>
+        <p:cNvGrpSpPr/>
+        <p:nvPr/>
+      </p:nvGrpSpPr>
+      <p:grpSpPr>
+        <a:xfrm>
+          <a:off x="0" y="0"/>
+          <a:ext cx="0" cy="0"/>
+          <a:chOff x="0" y="0"/>
+          <a:chExt cx="0" cy="0"/>
+        </a:xfrm>
+      </p:grpSpPr>
+      <p:sp>
+        <p:nvSpPr>
+          <p:cNvPr id="3" name="内容占位符 2">
+            <a:extLst>
+              <a:ext uri="{FF2B5EF4-FFF2-40B4-BE49-F238E27FC236}">
+                <a16:creationId xmlns:a16="http://schemas.microsoft.com/office/drawing/2014/main" id="{BD131BF1-DA36-7452-4BA2-BD42FFA66C2D}"/>
+              </a:ext>
+            </a:extLst>
+          </p:cNvPr>
+          <p:cNvSpPr>
+            <a:spLocks noGrp="1"/>
+          </p:cNvSpPr>
+          <p:nvPr>
+            <p:ph idx="1"/>
+          </p:nvPr>
+        </p:nvSpPr>
+        <p:spPr>
+          <a:xfrm>
+            <a:off x="883226" y="238991"/>
+            <a:ext cx="10470573" cy="5937972"/>
+          </a:xfrm>
+        </p:spPr>
+        <p:txBody>
+          <a:bodyPr/>
+          <a:lstStyle/>
+          <a:p>
+            <a:pPr marL="0" indent="0">
+              <a:buNone/>
+            </a:pPr>
+            <a:endParaRPr lang="en-US" altLang="zh-CN" dirty="0"/>
+          </a:p>
+          <a:p>
+            <a:pPr marL="0" indent="0">
+              <a:buNone/>
+            </a:pPr>
+            <a:endParaRPr lang="en-US" altLang="zh-CN" dirty="0"/>
+          </a:p>
+          <a:p>
+            <a:pPr marL="0" indent="0">
+              <a:buNone/>
+            </a:pPr>
+            <a:r>
+              <a:rPr lang="en-US" altLang="zh-CN" dirty="0"/>
+              <a:t>	</a:t>
+            </a:r>
+            <a:endParaRPr lang="zh-CN" altLang="en-US" dirty="0"/>
+          </a:p>
+        </p:txBody>
+      </p:sp>
+      <p:sp>
+        <p:nvSpPr>
+          <p:cNvPr id="4" name="内容占位符 2">
+            <a:extLst>
+              <a:ext uri="{FF2B5EF4-FFF2-40B4-BE49-F238E27FC236}">
+                <a16:creationId xmlns:a16="http://schemas.microsoft.com/office/drawing/2014/main" id="{9A809AED-9FC9-5612-CED7-9A8CE91FC802}"/>
+              </a:ext>
+            </a:extLst>
+          </p:cNvPr>
+          <p:cNvSpPr txBox="1">
+            <a:spLocks/>
+          </p:cNvSpPr>
+          <p:nvPr/>
+        </p:nvSpPr>
+        <p:spPr>
+          <a:xfrm>
+            <a:off x="883226" y="1109445"/>
+            <a:ext cx="10515600" cy="5067517"/>
+          </a:xfrm>
+          <a:prstGeom prst="rect">
+            <a:avLst/>
+          </a:prstGeom>
+        </p:spPr>
+        <p:txBody>
+          <a:bodyPr vert="horz" lIns="91440" tIns="45720" rIns="91440" bIns="45720" rtlCol="0">
+            <a:normAutofit/>
+          </a:bodyPr>
+          <a:lstStyle>
+            <a:lvl1pPr marL="228600" indent="-228600" algn="l" defTabSz="914400" rtl="0" eaLnBrk="1" latinLnBrk="0" hangingPunct="1">
+              <a:lnSpc>
+                <a:spcPct val="90000"/>
+              </a:lnSpc>
+              <a:spcBef>
+                <a:spcPts val="1000"/>
+              </a:spcBef>
+              <a:buFont typeface="Arial" panose="020B0604020202020204" pitchFamily="34" charset="0"/>
+              <a:buChar char="•"/>
+              <a:defRPr sz="2800" kern="1200">
+                <a:solidFill>
+                  <a:schemeClr val="tx1"/>
+                </a:solidFill>
+                <a:latin typeface="+mn-lt"/>
+                <a:ea typeface="+mn-ea"/>
+                <a:cs typeface="+mn-cs"/>
+              </a:defRPr>
+            </a:lvl1pPr>
+            <a:lvl2pPr marL="685800" indent="-228600" algn="l" defTabSz="914400" rtl="0" eaLnBrk="1" latinLnBrk="0" hangingPunct="1">
+              <a:lnSpc>
+                <a:spcPct val="90000"/>
+              </a:lnSpc>
+              <a:spcBef>
+                <a:spcPts val="500"/>
+              </a:spcBef>
+              <a:buFont typeface="Arial" panose="020B0604020202020204" pitchFamily="34" charset="0"/>
+              <a:buChar char="•"/>
+              <a:defRPr sz="2400" kern="1200">
+                <a:solidFill>
+                  <a:schemeClr val="tx1"/>
+                </a:solidFill>
+                <a:latin typeface="+mn-lt"/>
+                <a:ea typeface="+mn-ea"/>
+                <a:cs typeface="+mn-cs"/>
+              </a:defRPr>
+            </a:lvl2pPr>
+            <a:lvl3pPr marL="1143000" indent="-228600" algn="l" defTabSz="914400" rtl="0" eaLnBrk="1" latinLnBrk="0" hangingPunct="1">
+              <a:lnSpc>
+                <a:spcPct val="90000"/>
+              </a:lnSpc>
+              <a:spcBef>
+                <a:spcPts val="500"/>
+              </a:spcBef>
+              <a:buFont typeface="Arial" panose="020B0604020202020204" pitchFamily="34" charset="0"/>
+              <a:buChar char="•"/>
+              <a:defRPr sz="2000" kern="1200">
+                <a:solidFill>
+                  <a:schemeClr val="tx1"/>
+                </a:solidFill>
+                <a:latin typeface="+mn-lt"/>
+                <a:ea typeface="+mn-ea"/>
+                <a:cs typeface="+mn-cs"/>
+              </a:defRPr>
+            </a:lvl3pPr>
+            <a:lvl4pPr marL="1600200" indent="-228600" algn="l" defTabSz="914400" rtl="0" eaLnBrk="1" latinLnBrk="0" hangingPunct="1">
+              <a:lnSpc>
+                <a:spcPct val="90000"/>
+              </a:lnSpc>
+              <a:spcBef>
+                <a:spcPts val="500"/>
+              </a:spcBef>
+              <a:buFont typeface="Arial" panose="020B0604020202020204" pitchFamily="34" charset="0"/>
+              <a:buChar char="•"/>
+              <a:defRPr sz="1800" kern="1200">
+                <a:solidFill>
+                  <a:schemeClr val="tx1"/>
+                </a:solidFill>
+                <a:latin typeface="+mn-lt"/>
+                <a:ea typeface="+mn-ea"/>
+                <a:cs typeface="+mn-cs"/>
+              </a:defRPr>
+            </a:lvl4pPr>
+            <a:lvl5pPr marL="2057400" indent="-228600" algn="l" defTabSz="914400" rtl="0" eaLnBrk="1" latinLnBrk="0" hangingPunct="1">
+              <a:lnSpc>
+                <a:spcPct val="90000"/>
+              </a:lnSpc>
+              <a:spcBef>
+                <a:spcPts val="500"/>
+              </a:spcBef>
+              <a:buFont typeface="Arial" panose="020B0604020202020204" pitchFamily="34" charset="0"/>
+              <a:buChar char="•"/>
+              <a:defRPr sz="1800" kern="1200">
+                <a:solidFill>
+                  <a:schemeClr val="tx1"/>
+                </a:solidFill>
+                <a:latin typeface="+mn-lt"/>
+                <a:ea typeface="+mn-ea"/>
+                <a:cs typeface="+mn-cs"/>
+              </a:defRPr>
+            </a:lvl5pPr>
+            <a:lvl6pPr marL="2514600" indent="-228600" algn="l" defTabSz="914400" rtl="0" eaLnBrk="1" latinLnBrk="0" hangingPunct="1">
+              <a:lnSpc>
+                <a:spcPct val="90000"/>
+              </a:lnSpc>
+              <a:spcBef>
+                <a:spcPts val="500"/>
+              </a:spcBef>
+              <a:buFont typeface="Arial" panose="020B0604020202020204" pitchFamily="34" charset="0"/>
+              <a:buChar char="•"/>
+              <a:defRPr sz="1800" kern="1200">
+                <a:solidFill>
+                  <a:schemeClr val="tx1"/>
+                </a:solidFill>
+                <a:latin typeface="+mn-lt"/>
+                <a:ea typeface="+mn-ea"/>
+                <a:cs typeface="+mn-cs"/>
+              </a:defRPr>
+            </a:lvl6pPr>
+            <a:lvl7pPr marL="2971800" indent="-228600" algn="l" defTabSz="914400" rtl="0" eaLnBrk="1" latinLnBrk="0" hangingPunct="1">
+              <a:lnSpc>
+                <a:spcPct val="90000"/>
+              </a:lnSpc>
+              <a:spcBef>
+                <a:spcPts val="500"/>
+              </a:spcBef>
+              <a:buFont typeface="Arial" panose="020B0604020202020204" pitchFamily="34" charset="0"/>
+              <a:buChar char="•"/>
+              <a:defRPr sz="1800" kern="1200">
+                <a:solidFill>
+                  <a:schemeClr val="tx1"/>
+                </a:solidFill>
+                <a:latin typeface="+mn-lt"/>
+                <a:ea typeface="+mn-ea"/>
+                <a:cs typeface="+mn-cs"/>
+              </a:defRPr>
+            </a:lvl7pPr>
+            <a:lvl8pPr marL="3429000" indent="-228600" algn="l" defTabSz="914400" rtl="0" eaLnBrk="1" latinLnBrk="0" hangingPunct="1">
+              <a:lnSpc>
+                <a:spcPct val="90000"/>
+              </a:lnSpc>
+              <a:spcBef>
+                <a:spcPts val="500"/>
+              </a:spcBef>
+              <a:buFont typeface="Arial" panose="020B0604020202020204" pitchFamily="34" charset="0"/>
+              <a:buChar char="•"/>
+              <a:defRPr sz="1800" kern="1200">
+                <a:solidFill>
+                  <a:schemeClr val="tx1"/>
+                </a:solidFill>
+                <a:latin typeface="+mn-lt"/>
+                <a:ea typeface="+mn-ea"/>
+                <a:cs typeface="+mn-cs"/>
+              </a:defRPr>
+            </a:lvl8pPr>
+            <a:lvl9pPr marL="3886200" indent="-228600" algn="l" defTabSz="914400" rtl="0" eaLnBrk="1" latinLnBrk="0" hangingPunct="1">
+              <a:lnSpc>
+                <a:spcPct val="90000"/>
+              </a:lnSpc>
+              <a:spcBef>
+                <a:spcPts val="500"/>
+              </a:spcBef>
+              <a:buFont typeface="Arial" panose="020B0604020202020204" pitchFamily="34" charset="0"/>
+              <a:buChar char="•"/>
+              <a:defRPr sz="1800" kern="1200">
+                <a:solidFill>
+                  <a:schemeClr val="tx1"/>
+                </a:solidFill>
+                <a:latin typeface="+mn-lt"/>
+                <a:ea typeface="+mn-ea"/>
+                <a:cs typeface="+mn-cs"/>
+              </a:defRPr>
+            </a:lvl9pPr>
+          </a:lstStyle>
+          <a:p>
+            <a:pPr marL="0" indent="0">
+              <a:buFont typeface="Arial" panose="020B0604020202020204" pitchFamily="34" charset="0"/>
+              <a:buNone/>
+            </a:pPr>
+            <a:r>
+              <a:rPr lang="en-US" altLang="zh-CN" sz="2000" dirty="0"/>
+              <a:t>	</a:t>
+            </a:r>
+          </a:p>
+          <a:p>
+            <a:pPr marL="0" indent="0">
+              <a:buFont typeface="Arial" panose="020B0604020202020204" pitchFamily="34" charset="0"/>
+              <a:buNone/>
+            </a:pPr>
+            <a:r>
+              <a:rPr lang="en-US" altLang="zh-CN" sz="2000" dirty="0"/>
+              <a:t>	</a:t>
+            </a:r>
+            <a:r>
+              <a:rPr lang="zh-CN" altLang="en-US" sz="2000" dirty="0"/>
+              <a:t>将获得的 </a:t>
+            </a:r>
+            <a:r>
+              <a:rPr lang="en-US" altLang="zh-CN" sz="2000" dirty="0"/>
+              <a:t>module call graph</a:t>
+            </a:r>
+            <a:r>
+              <a:rPr lang="zh-CN" altLang="en-US" sz="2000" dirty="0"/>
+              <a:t>、</a:t>
+            </a:r>
+            <a:r>
+              <a:rPr lang="en-US" altLang="zh-CN" sz="2000" dirty="0"/>
+              <a:t>callee tree</a:t>
+            </a:r>
+            <a:r>
+              <a:rPr lang="zh-CN" altLang="en-US" sz="2000" dirty="0"/>
+              <a:t>、 </a:t>
+            </a:r>
+            <a:r>
+              <a:rPr lang="en-US" altLang="zh-CN" sz="2000" dirty="0"/>
+              <a:t>caller tree</a:t>
+            </a:r>
+            <a:r>
+              <a:rPr lang="zh-CN" altLang="en-US" sz="2000" dirty="0"/>
+              <a:t>以</a:t>
+            </a:r>
+            <a:r>
+              <a:rPr lang="zh-CN" altLang="en-US" sz="2000" dirty="0">
+                <a:solidFill>
+                  <a:srgbClr val="00B0F0"/>
+                </a:solidFill>
+              </a:rPr>
+              <a:t>如下格式</a:t>
+            </a:r>
+            <a:r>
+              <a:rPr lang="zh-CN" altLang="en-US" sz="2000" dirty="0"/>
+              <a:t>送入</a:t>
+            </a:r>
+            <a:r>
+              <a:rPr lang="en-US" altLang="zh-CN" sz="2000" dirty="0" err="1"/>
+              <a:t>llm</a:t>
+            </a:r>
+            <a:endParaRPr lang="en-US" altLang="zh-CN" sz="2000" dirty="0"/>
+          </a:p>
+          <a:p>
+            <a:pPr marL="0" indent="0">
+              <a:buFont typeface="Arial" panose="020B0604020202020204" pitchFamily="34" charset="0"/>
+              <a:buNone/>
+            </a:pPr>
+            <a:endParaRPr lang="en-US" altLang="zh-CN" sz="2000" dirty="0"/>
+          </a:p>
+          <a:p>
+            <a:pPr marL="0" indent="0">
+              <a:buFont typeface="Arial" panose="020B0604020202020204" pitchFamily="34" charset="0"/>
+              <a:buNone/>
+            </a:pPr>
+            <a:r>
+              <a:rPr lang="en-US" altLang="zh-CN" sz="2000" dirty="0"/>
+              <a:t>module/call tree	</a:t>
+            </a:r>
+          </a:p>
+          <a:p>
+            <a:pPr marL="0" indent="0">
+              <a:buFont typeface="Arial" panose="020B0604020202020204" pitchFamily="34" charset="0"/>
+              <a:buNone/>
+            </a:pPr>
+            <a:r>
+              <a:rPr lang="en-US" altLang="zh-CN" sz="2000" dirty="0"/>
+              <a:t>-</a:t>
+            </a:r>
+            <a:r>
+              <a:rPr lang="en-US" altLang="zh-CN" sz="2000" dirty="0" err="1"/>
+              <a:t>qname</a:t>
+            </a:r>
+            <a:endParaRPr lang="en-US" altLang="zh-CN" sz="2000" dirty="0"/>
+          </a:p>
+          <a:p>
+            <a:pPr marL="0" indent="0">
+              <a:buFont typeface="Arial" panose="020B0604020202020204" pitchFamily="34" charset="0"/>
+              <a:buNone/>
+            </a:pPr>
+            <a:r>
+              <a:rPr lang="en-US" altLang="zh-CN" sz="2000" dirty="0"/>
+              <a:t>    -callee qname1</a:t>
+            </a:r>
+          </a:p>
+          <a:p>
+            <a:pPr marL="0" indent="0">
+              <a:buFont typeface="Arial" panose="020B0604020202020204" pitchFamily="34" charset="0"/>
+              <a:buNone/>
+            </a:pPr>
+            <a:r>
+              <a:rPr lang="en-US" altLang="zh-CN" sz="2000" dirty="0"/>
+              <a:t>	-callee qname12</a:t>
+            </a:r>
+          </a:p>
+          <a:p>
+            <a:pPr marL="0" indent="0">
+              <a:buNone/>
+            </a:pPr>
+            <a:r>
+              <a:rPr lang="en-US" altLang="zh-CN" sz="2000" dirty="0"/>
+              <a:t>    -callee qname2</a:t>
+            </a:r>
+          </a:p>
+          <a:p>
+            <a:pPr marL="0" indent="0">
+              <a:buNone/>
+            </a:pPr>
+            <a:r>
+              <a:rPr lang="en-US" altLang="zh-CN" sz="2000" dirty="0"/>
+              <a:t>    -……</a:t>
+            </a:r>
+          </a:p>
+          <a:p>
+            <a:pPr marL="0" indent="0">
+              <a:buNone/>
+            </a:pPr>
+            <a:endParaRPr lang="en-US" altLang="zh-CN" sz="2000" dirty="0"/>
+          </a:p>
+          <a:p>
+            <a:pPr marL="0" indent="0">
+              <a:buNone/>
+            </a:pPr>
+            <a:r>
+              <a:rPr lang="en-US" altLang="zh-CN" sz="2000" dirty="0"/>
+              <a:t>tree node </a:t>
+            </a:r>
+            <a:r>
+              <a:rPr lang="en-US" altLang="zh-CN" sz="2000" dirty="0" err="1"/>
+              <a:t>qname</a:t>
+            </a:r>
+            <a:r>
+              <a:rPr lang="en-US" altLang="zh-CN" sz="2000" dirty="0"/>
+              <a:t> (</a:t>
+            </a:r>
+            <a:r>
+              <a:rPr lang="zh-CN" altLang="en-US" sz="2000" dirty="0"/>
+              <a:t>随便排列</a:t>
+            </a:r>
+            <a:r>
+              <a:rPr lang="en-US" altLang="zh-CN" sz="2000" dirty="0"/>
+              <a:t>)</a:t>
+            </a:r>
+          </a:p>
+          <a:p>
+            <a:pPr marL="0" indent="0">
+              <a:buNone/>
+            </a:pPr>
+            <a:r>
+              <a:rPr lang="en-US" altLang="zh-CN" sz="2000" dirty="0"/>
+              <a:t>{function content}</a:t>
+            </a:r>
+          </a:p>
+          <a:p>
+            <a:pPr marL="0" indent="0">
+              <a:buNone/>
+            </a:pPr>
+            <a:endParaRPr lang="zh-CN" altLang="en-US" sz="2000" dirty="0"/>
+          </a:p>
+        </p:txBody>
+      </p:sp>
+    </p:spTree>
+    <p:extLst>
+      <p:ext uri="{BB962C8B-B14F-4D97-AF65-F5344CB8AC3E}">
+        <p14:creationId xmlns:p14="http://schemas.microsoft.com/office/powerpoint/2010/main" val="3287277916"/>
+      </p:ext>
+    </p:extLst>
+  </p:cSld>
+  <p:clrMapOvr>
+    <a:masterClrMapping/>
+  </p:clrMapOvr>
+</p:sld>
+</file>
+
+<file path=ppt/slides/slide13.xml><?xml version="1.0" encoding="utf-8"?>
+<p:sld xmlns:a="http://schemas.openxmlformats.org/drawingml/2006/main" xmlns:r="http://schemas.openxmlformats.org/officeDocument/2006/relationships" xmlns:p="http://schemas.openxmlformats.org/presentationml/2006/main">
+  <p:cSld>
+    <p:spTree>
+      <p:nvGrpSpPr>
+        <p:cNvPr id="1" name=""/>
+        <p:cNvGrpSpPr/>
+        <p:nvPr/>
+      </p:nvGrpSpPr>
+      <p:grpSpPr>
+        <a:xfrm>
+          <a:off x="0" y="0"/>
+          <a:ext cx="0" cy="0"/>
+          <a:chOff x="0" y="0"/>
+          <a:chExt cx="0" cy="0"/>
+        </a:xfrm>
+      </p:grpSpPr>
+      <p:sp>
+        <p:nvSpPr>
+          <p:cNvPr id="2" name="标题 1">
+            <a:extLst>
+              <a:ext uri="{FF2B5EF4-FFF2-40B4-BE49-F238E27FC236}">
+                <a16:creationId xmlns:a16="http://schemas.microsoft.com/office/drawing/2014/main" id="{D6E93B9A-7D5B-BFCC-C2C9-3C5F9BEFE069}"/>
+              </a:ext>
+            </a:extLst>
+          </p:cNvPr>
+          <p:cNvSpPr>
+            <a:spLocks noGrp="1"/>
+          </p:cNvSpPr>
+          <p:nvPr>
+            <p:ph type="title"/>
+          </p:nvPr>
+        </p:nvSpPr>
+        <p:spPr/>
+        <p:txBody>
+          <a:bodyPr/>
+          <a:lstStyle/>
+          <a:p>
+            <a:r>
+              <a:rPr lang="zh-CN" altLang="en-US" dirty="0"/>
+              <a:t>重构</a:t>
+            </a:r>
+            <a:r>
+              <a:rPr lang="en-US" altLang="zh-CN" dirty="0"/>
+              <a:t>agent</a:t>
+            </a:r>
+            <a:r>
+              <a:rPr lang="zh-CN" altLang="en-US" dirty="0"/>
+              <a:t>部分代码</a:t>
+            </a:r>
+          </a:p>
+        </p:txBody>
+      </p:sp>
+      <p:sp>
+        <p:nvSpPr>
+          <p:cNvPr id="3" name="内容占位符 2">
+            <a:extLst>
+              <a:ext uri="{FF2B5EF4-FFF2-40B4-BE49-F238E27FC236}">
+                <a16:creationId xmlns:a16="http://schemas.microsoft.com/office/drawing/2014/main" id="{0242CE7C-7A9A-6081-AF1F-08676D0E3532}"/>
+              </a:ext>
+            </a:extLst>
+          </p:cNvPr>
+          <p:cNvSpPr>
+            <a:spLocks noGrp="1"/>
+          </p:cNvSpPr>
+          <p:nvPr>
+            <p:ph idx="1"/>
+          </p:nvPr>
+        </p:nvSpPr>
+        <p:spPr/>
+        <p:txBody>
+          <a:bodyPr>
+            <a:normAutofit/>
+          </a:bodyPr>
+          <a:lstStyle/>
+          <a:p>
+            <a:pPr marL="0" indent="0">
+              <a:buNone/>
+            </a:pPr>
+            <a:r>
+              <a:rPr lang="zh-CN" altLang="en-US" sz="2000" dirty="0"/>
+              <a:t>之前是一个单文件，现在拆成一个</a:t>
+            </a:r>
+            <a:r>
+              <a:rPr lang="en-US" altLang="zh-CN" sz="2000" dirty="0"/>
+              <a:t>project</a:t>
+            </a:r>
+          </a:p>
+          <a:p>
+            <a:pPr marL="0" indent="0">
+              <a:buNone/>
+            </a:pPr>
+            <a:r>
+              <a:rPr lang="zh-CN" altLang="en-US" sz="2000" dirty="0"/>
+              <a:t>然后增加</a:t>
+            </a:r>
+            <a:r>
+              <a:rPr lang="en-US" altLang="zh-CN" sz="2000" dirty="0"/>
+              <a:t>log</a:t>
+            </a:r>
+            <a:r>
+              <a:rPr lang="zh-CN" altLang="en-US" sz="2000" dirty="0"/>
+              <a:t>模块、</a:t>
+            </a:r>
+            <a:endParaRPr lang="en-US" altLang="zh-CN" sz="2000" dirty="0"/>
+          </a:p>
+          <a:p>
+            <a:pPr marL="0" indent="0">
+              <a:buNone/>
+            </a:pPr>
+            <a:r>
+              <a:rPr lang="zh-CN" altLang="en-US" sz="2000" dirty="0"/>
+              <a:t>修改优化</a:t>
+            </a:r>
+            <a:r>
+              <a:rPr lang="en-US" altLang="zh-CN" sz="2000" dirty="0"/>
+              <a:t>prompt</a:t>
+            </a:r>
+            <a:r>
+              <a:rPr lang="zh-CN" altLang="en-US" sz="2000" dirty="0"/>
+              <a:t>增加包含</a:t>
+            </a:r>
+            <a:r>
+              <a:rPr lang="en-US" altLang="zh-CN" sz="2000" dirty="0"/>
+              <a:t>call graph</a:t>
+            </a:r>
+            <a:r>
+              <a:rPr lang="zh-CN" altLang="en-US" sz="2000" dirty="0"/>
+              <a:t>的</a:t>
+            </a:r>
+            <a:r>
+              <a:rPr lang="en-US" altLang="zh-CN" sz="2000" dirty="0"/>
+              <a:t>prompt</a:t>
+            </a:r>
+          </a:p>
+          <a:p>
+            <a:pPr marL="0" indent="0">
+              <a:buNone/>
+            </a:pPr>
+            <a:r>
+              <a:rPr lang="zh-CN" altLang="en-US" sz="2000" dirty="0"/>
+              <a:t>等</a:t>
+            </a:r>
+            <a:endParaRPr lang="en-US" altLang="zh-CN" sz="2000" dirty="0"/>
+          </a:p>
+        </p:txBody>
+      </p:sp>
+      <p:pic>
+        <p:nvPicPr>
+          <p:cNvPr id="5" name="图片 4">
+            <a:extLst>
+              <a:ext uri="{FF2B5EF4-FFF2-40B4-BE49-F238E27FC236}">
+                <a16:creationId xmlns:a16="http://schemas.microsoft.com/office/drawing/2014/main" id="{53423B14-15CC-B6B5-EAA9-DB6B4845D07E}"/>
+              </a:ext>
+            </a:extLst>
+          </p:cNvPr>
+          <p:cNvPicPr>
+            <a:picLocks noChangeAspect="1"/>
+          </p:cNvPicPr>
+          <p:nvPr/>
+        </p:nvPicPr>
+        <p:blipFill>
+          <a:blip r:embed="rId2"/>
+          <a:stretch>
+            <a:fillRect/>
+          </a:stretch>
+        </p:blipFill>
+        <p:spPr>
+          <a:xfrm>
+            <a:off x="4573590" y="0"/>
+            <a:ext cx="6684840" cy="7612631"/>
+          </a:xfrm>
+          <a:prstGeom prst="rect">
+            <a:avLst/>
+          </a:prstGeom>
+        </p:spPr>
+      </p:pic>
+    </p:spTree>
+    <p:extLst>
+      <p:ext uri="{BB962C8B-B14F-4D97-AF65-F5344CB8AC3E}">
+        <p14:creationId xmlns:p14="http://schemas.microsoft.com/office/powerpoint/2010/main" val="2818613592"/>
+      </p:ext>
+    </p:extLst>
+  </p:cSld>
+  <p:clrMapOvr>
+    <a:masterClrMapping/>
+  </p:clrMapOvr>
+</p:sld>
+</file>
+
+<file path=ppt/slides/slide14.xml><?xml version="1.0" encoding="utf-8"?>
+<p:sld xmlns:a="http://schemas.openxmlformats.org/drawingml/2006/main" xmlns:r="http://schemas.openxmlformats.org/officeDocument/2006/relationships" xmlns:p="http://schemas.openxmlformats.org/presentationml/2006/main">
+  <p:cSld>
+    <p:spTree>
+      <p:nvGrpSpPr>
+        <p:cNvPr id="1" name=""/>
+        <p:cNvGrpSpPr/>
+        <p:nvPr/>
+      </p:nvGrpSpPr>
+      <p:grpSpPr>
+        <a:xfrm>
+          <a:off x="0" y="0"/>
+          <a:ext cx="0" cy="0"/>
+          <a:chOff x="0" y="0"/>
+          <a:chExt cx="0" cy="0"/>
+        </a:xfrm>
+      </p:grpSpPr>
+      <p:sp>
+        <p:nvSpPr>
+          <p:cNvPr id="2" name="标题 1">
+            <a:extLst>
+              <a:ext uri="{FF2B5EF4-FFF2-40B4-BE49-F238E27FC236}">
+                <a16:creationId xmlns:a16="http://schemas.microsoft.com/office/drawing/2014/main" id="{6F10532F-818C-E671-59BB-ACA8E8FC3ED9}"/>
+              </a:ext>
+            </a:extLst>
+          </p:cNvPr>
+          <p:cNvSpPr>
+            <a:spLocks noGrp="1"/>
+          </p:cNvSpPr>
+          <p:nvPr>
+            <p:ph type="title"/>
+          </p:nvPr>
+        </p:nvSpPr>
+        <p:spPr/>
+        <p:txBody>
+          <a:bodyPr>
+            <a:normAutofit/>
+          </a:bodyPr>
+          <a:lstStyle/>
+          <a:p>
+            <a:r>
+              <a:rPr lang="zh-CN" altLang="en-US" dirty="0"/>
+              <a:t>尝试效果</a:t>
+            </a:r>
+          </a:p>
+        </p:txBody>
+      </p:sp>
+      <p:sp>
+        <p:nvSpPr>
+          <p:cNvPr id="3" name="内容占位符 2">
+            <a:extLst>
+              <a:ext uri="{FF2B5EF4-FFF2-40B4-BE49-F238E27FC236}">
+                <a16:creationId xmlns:a16="http://schemas.microsoft.com/office/drawing/2014/main" id="{8F94FC96-7825-4589-597F-B98DEAABEFA3}"/>
+              </a:ext>
+            </a:extLst>
+          </p:cNvPr>
+          <p:cNvSpPr>
+            <a:spLocks noGrp="1"/>
+          </p:cNvSpPr>
+          <p:nvPr>
+            <p:ph idx="1"/>
+          </p:nvPr>
+        </p:nvSpPr>
+        <p:spPr/>
+        <p:txBody>
+          <a:bodyPr/>
+          <a:lstStyle/>
+          <a:p>
+            <a:pPr marL="0" indent="0">
+              <a:buNone/>
+            </a:pPr>
+            <a:r>
+              <a:rPr lang="zh-CN" altLang="en-US" sz="1800" dirty="0"/>
+              <a:t>爬</a:t>
+            </a:r>
+            <a:r>
+              <a:rPr lang="zh-CN" altLang="en-US" sz="2000" dirty="0"/>
+              <a:t>取</a:t>
+            </a:r>
+            <a:r>
+              <a:rPr lang="en-US" altLang="zh-CN" sz="2000" dirty="0"/>
+              <a:t>100</a:t>
+            </a:r>
+            <a:r>
+              <a:rPr lang="zh-CN" altLang="en-US" sz="2000" dirty="0"/>
+              <a:t>个</a:t>
+            </a:r>
+            <a:r>
+              <a:rPr lang="en-US" altLang="zh-CN" sz="2000" dirty="0"/>
+              <a:t>pr</a:t>
+            </a:r>
+            <a:r>
+              <a:rPr lang="zh-CN" altLang="en-US" sz="2000" dirty="0"/>
+              <a:t>，尝试接入</a:t>
+            </a:r>
+            <a:r>
+              <a:rPr lang="en-US" altLang="zh-CN" sz="2000" dirty="0"/>
+              <a:t>agent</a:t>
+            </a:r>
+            <a:r>
+              <a:rPr lang="zh-CN" altLang="en-US" sz="2000" dirty="0"/>
+              <a:t>处理，</a:t>
+            </a:r>
+            <a:endParaRPr lang="en-US" altLang="zh-CN" sz="2000" dirty="0"/>
+          </a:p>
+          <a:p>
+            <a:pPr marL="0" indent="0">
+              <a:buNone/>
+            </a:pPr>
+            <a:r>
+              <a:rPr lang="zh-CN" altLang="en-US" sz="2000" dirty="0"/>
+              <a:t>获取了</a:t>
+            </a:r>
+            <a:r>
+              <a:rPr lang="en-US" altLang="zh-CN" sz="2000" dirty="0"/>
+              <a:t>33</a:t>
+            </a:r>
+            <a:r>
+              <a:rPr lang="zh-CN" altLang="en-US" sz="2000" dirty="0"/>
+              <a:t>个有效数据，</a:t>
+            </a:r>
+            <a:endParaRPr lang="en-US" altLang="zh-CN" sz="2000" dirty="0"/>
+          </a:p>
+          <a:p>
+            <a:pPr marL="0" indent="0">
+              <a:buNone/>
+            </a:pPr>
+            <a:r>
+              <a:rPr lang="en-US" altLang="zh-CN" sz="2000" dirty="0" err="1"/>
+              <a:t>Repo_analysis</a:t>
+            </a:r>
+            <a:r>
+              <a:rPr lang="en-US" altLang="zh-CN" sz="2000" dirty="0"/>
+              <a:t>  </a:t>
+            </a:r>
+            <a:r>
+              <a:rPr lang="zh-CN" altLang="en-US" sz="2000" dirty="0"/>
+              <a:t>设置</a:t>
+            </a:r>
+            <a:r>
+              <a:rPr lang="en-US" altLang="zh-CN" dirty="0"/>
+              <a:t> (</a:t>
+            </a:r>
+            <a:r>
+              <a:rPr lang="en-US" altLang="zh-CN" dirty="0" err="1"/>
+              <a:t>module_depth</a:t>
+            </a:r>
+            <a:r>
+              <a:rPr lang="en-US" altLang="zh-CN" dirty="0"/>
+              <a:t>=2,callee_func_depth=3,caller_func_depth=1)</a:t>
+            </a:r>
+          </a:p>
+          <a:p>
+            <a:pPr marL="0" indent="0">
+              <a:buNone/>
+            </a:pPr>
+            <a:r>
+              <a:rPr lang="zh-CN" altLang="en-US" sz="2000" dirty="0"/>
+              <a:t>预处理了</a:t>
+            </a:r>
+            <a:r>
+              <a:rPr lang="en-US" altLang="zh-CN" sz="2000" dirty="0"/>
+              <a:t>40</a:t>
+            </a:r>
+            <a:r>
+              <a:rPr lang="zh-CN" altLang="en-US" sz="2000" dirty="0"/>
+              <a:t>分钟左右，做了一个缓存</a:t>
+            </a:r>
+            <a:br>
+              <a:rPr lang="en-US" altLang="zh-CN" sz="2000" dirty="0"/>
+            </a:br>
+            <a:endParaRPr lang="en-US" altLang="zh-CN" sz="2000" dirty="0"/>
+          </a:p>
+          <a:p>
+            <a:pPr marL="0" indent="0">
+              <a:buNone/>
+            </a:pPr>
+            <a:endParaRPr lang="en-US" altLang="zh-CN" sz="2000" dirty="0"/>
+          </a:p>
+          <a:p>
+            <a:pPr marL="0" indent="0">
+              <a:buNone/>
+            </a:pPr>
+            <a:r>
+              <a:rPr lang="zh-CN" altLang="en-US" sz="2000" dirty="0"/>
+              <a:t>用</a:t>
+            </a:r>
+            <a:r>
+              <a:rPr lang="en-US" altLang="zh-CN" sz="2000" dirty="0"/>
+              <a:t>bleu</a:t>
+            </a:r>
+            <a:r>
+              <a:rPr lang="zh-CN" altLang="en-US" sz="2000" dirty="0"/>
+              <a:t>和</a:t>
+            </a:r>
+            <a:r>
+              <a:rPr lang="en-US" altLang="zh-CN" sz="2000" dirty="0" err="1"/>
+              <a:t>crystalbleu</a:t>
+            </a:r>
+            <a:r>
+              <a:rPr lang="en-US" altLang="zh-CN" sz="2000" dirty="0"/>
+              <a:t> </a:t>
+            </a:r>
+            <a:r>
+              <a:rPr lang="zh-CN" altLang="en-US" sz="2000" dirty="0"/>
+              <a:t>评估时发现爬取的数据有问题</a:t>
+            </a:r>
+            <a:endParaRPr lang="en-US" altLang="zh-CN" sz="2000" dirty="0"/>
+          </a:p>
+          <a:p>
+            <a:pPr marL="0" indent="0">
+              <a:buNone/>
+            </a:pPr>
+            <a:endParaRPr lang="zh-CN" altLang="en-US" sz="2000" dirty="0"/>
+          </a:p>
+        </p:txBody>
+      </p:sp>
+    </p:spTree>
+    <p:extLst>
+      <p:ext uri="{BB962C8B-B14F-4D97-AF65-F5344CB8AC3E}">
+        <p14:creationId xmlns:p14="http://schemas.microsoft.com/office/powerpoint/2010/main" val="1218507813"/>
+      </p:ext>
+    </p:extLst>
+  </p:cSld>
+  <p:clrMapOvr>
+    <a:masterClrMapping/>
+  </p:clrMapOvr>
+</p:sld>
+</file>
+
+<file path=ppt/slides/slide15.xml><?xml version="1.0" encoding="utf-8"?>
+<p:sld xmlns:a="http://schemas.openxmlformats.org/drawingml/2006/main" xmlns:r="http://schemas.openxmlformats.org/officeDocument/2006/relationships" xmlns:p="http://schemas.openxmlformats.org/presentationml/2006/main">
+  <p:cSld>
+    <p:spTree>
+      <p:nvGrpSpPr>
+        <p:cNvPr id="1" name=""/>
+        <p:cNvGrpSpPr/>
+        <p:nvPr/>
+      </p:nvGrpSpPr>
+      <p:grpSpPr>
+        <a:xfrm>
+          <a:off x="0" y="0"/>
+          <a:ext cx="0" cy="0"/>
+          <a:chOff x="0" y="0"/>
+          <a:chExt cx="0" cy="0"/>
+        </a:xfrm>
+      </p:grpSpPr>
+      <p:sp>
+        <p:nvSpPr>
+          <p:cNvPr id="2" name="标题 1">
+            <a:extLst>
+              <a:ext uri="{FF2B5EF4-FFF2-40B4-BE49-F238E27FC236}">
+                <a16:creationId xmlns:a16="http://schemas.microsoft.com/office/drawing/2014/main" id="{E242F6CE-AE57-9582-3748-BFDA1535FBAF}"/>
+              </a:ext>
+            </a:extLst>
+          </p:cNvPr>
+          <p:cNvSpPr>
+            <a:spLocks noGrp="1"/>
+          </p:cNvSpPr>
+          <p:nvPr>
+            <p:ph type="title"/>
+          </p:nvPr>
+        </p:nvSpPr>
+        <p:spPr/>
+        <p:txBody>
+          <a:bodyPr/>
+          <a:lstStyle/>
+          <a:p>
+            <a:r>
+              <a:rPr lang="zh-CN" altLang="en-US" dirty="0"/>
+              <a:t>优化数据爬取流程</a:t>
+            </a:r>
+          </a:p>
+        </p:txBody>
+      </p:sp>
+      <p:sp>
+        <p:nvSpPr>
+          <p:cNvPr id="3" name="内容占位符 2">
+            <a:extLst>
+              <a:ext uri="{FF2B5EF4-FFF2-40B4-BE49-F238E27FC236}">
+                <a16:creationId xmlns:a16="http://schemas.microsoft.com/office/drawing/2014/main" id="{D5FEB863-AADD-7219-B26E-D8E50C354E8E}"/>
+              </a:ext>
+            </a:extLst>
+          </p:cNvPr>
+          <p:cNvSpPr>
+            <a:spLocks noGrp="1"/>
+          </p:cNvSpPr>
+          <p:nvPr>
+            <p:ph idx="1"/>
+          </p:nvPr>
+        </p:nvSpPr>
+        <p:spPr/>
+        <p:txBody>
+          <a:bodyPr/>
+          <a:lstStyle/>
+          <a:p>
+            <a:r>
+              <a:rPr lang="zh-CN" altLang="en-US" dirty="0"/>
+              <a:t>之前：</a:t>
+            </a:r>
+            <a:endParaRPr lang="en-US" altLang="zh-CN" dirty="0"/>
+          </a:p>
+          <a:p>
+            <a:r>
+              <a:rPr lang="zh-CN" altLang="en-US" sz="1800" dirty="0"/>
+              <a:t>对一个</a:t>
+            </a:r>
+            <a:r>
+              <a:rPr lang="en-US" altLang="zh-CN" sz="1800" dirty="0"/>
+              <a:t>pr</a:t>
+            </a:r>
+          </a:p>
+          <a:p>
+            <a:r>
+              <a:rPr lang="en-US" altLang="zh-CN" sz="1800" dirty="0"/>
+              <a:t>- `</a:t>
+            </a:r>
+            <a:r>
+              <a:rPr lang="en-US" altLang="zh-CN" sz="1800" dirty="0" err="1"/>
+              <a:t>baseRefOid</a:t>
+            </a:r>
+            <a:r>
+              <a:rPr lang="en-US" altLang="zh-CN" sz="1800" dirty="0"/>
+              <a:t>` = base </a:t>
+            </a:r>
+            <a:r>
+              <a:rPr lang="zh-CN" altLang="en-US" sz="1800" dirty="0"/>
+              <a:t>分支当前最新 </a:t>
+            </a:r>
+            <a:r>
+              <a:rPr lang="en-US" altLang="zh-CN" sz="1800" dirty="0"/>
+              <a:t>commit SHA</a:t>
+            </a:r>
+          </a:p>
+          <a:p>
+            <a:r>
+              <a:rPr lang="en-US" altLang="zh-CN" sz="1800" dirty="0"/>
+              <a:t>- `</a:t>
+            </a:r>
+            <a:r>
+              <a:rPr lang="en-US" altLang="zh-CN" sz="1800" dirty="0" err="1"/>
+              <a:t>headRefOid</a:t>
+            </a:r>
+            <a:r>
+              <a:rPr lang="en-US" altLang="zh-CN" sz="1800" dirty="0"/>
+              <a:t>` = PR </a:t>
+            </a:r>
+            <a:r>
+              <a:rPr lang="zh-CN" altLang="en-US" sz="1800" dirty="0"/>
+              <a:t>作者分支的最新 </a:t>
+            </a:r>
+            <a:r>
+              <a:rPr lang="en-US" altLang="zh-CN" sz="1800" dirty="0"/>
+              <a:t>commit SHA</a:t>
+            </a:r>
+            <a:endParaRPr lang="zh-CN" altLang="en-US" sz="1800" dirty="0"/>
+          </a:p>
+        </p:txBody>
+      </p:sp>
+      <p:pic>
+        <p:nvPicPr>
+          <p:cNvPr id="5" name="图片 4">
+            <a:extLst>
+              <a:ext uri="{FF2B5EF4-FFF2-40B4-BE49-F238E27FC236}">
+                <a16:creationId xmlns:a16="http://schemas.microsoft.com/office/drawing/2014/main" id="{AB46D03F-0610-0EE3-977B-5FB6769379B8}"/>
+              </a:ext>
+            </a:extLst>
+          </p:cNvPr>
+          <p:cNvPicPr>
+            <a:picLocks noChangeAspect="1"/>
+          </p:cNvPicPr>
+          <p:nvPr/>
+        </p:nvPicPr>
+        <p:blipFill>
+          <a:blip r:embed="rId2"/>
+          <a:stretch>
+            <a:fillRect/>
+          </a:stretch>
+        </p:blipFill>
+        <p:spPr>
+          <a:xfrm>
+            <a:off x="1278082" y="3429000"/>
+            <a:ext cx="5829300" cy="2665613"/>
+          </a:xfrm>
+          <a:prstGeom prst="rect">
+            <a:avLst/>
+          </a:prstGeom>
+        </p:spPr>
+      </p:pic>
+      <p:sp>
+        <p:nvSpPr>
+          <p:cNvPr id="6" name="文本框 5">
+            <a:extLst>
+              <a:ext uri="{FF2B5EF4-FFF2-40B4-BE49-F238E27FC236}">
+                <a16:creationId xmlns:a16="http://schemas.microsoft.com/office/drawing/2014/main" id="{EF88341F-4387-0569-85B5-90636D5DA420}"/>
+              </a:ext>
+            </a:extLst>
+          </p:cNvPr>
+          <p:cNvSpPr txBox="1"/>
+          <p:nvPr/>
+        </p:nvSpPr>
+        <p:spPr>
+          <a:xfrm>
+            <a:off x="7015016" y="2442647"/>
+            <a:ext cx="5107488" cy="1754326"/>
+          </a:xfrm>
+          <a:prstGeom prst="rect">
+            <a:avLst/>
+          </a:prstGeom>
+          <a:noFill/>
+        </p:spPr>
+        <p:txBody>
+          <a:bodyPr wrap="none" rtlCol="0">
+            <a:spAutoFit/>
+          </a:bodyPr>
+          <a:lstStyle/>
+          <a:p>
+            <a:r>
+              <a:rPr lang="zh-CN" altLang="en-US" dirty="0"/>
+              <a:t>问题是</a:t>
+            </a:r>
+            <a:endParaRPr lang="en-US" altLang="zh-CN" dirty="0"/>
+          </a:p>
+          <a:p>
+            <a:r>
+              <a:rPr lang="en-US" altLang="zh-CN" dirty="0" err="1"/>
+              <a:t>headRefOid</a:t>
+            </a:r>
+            <a:r>
+              <a:rPr lang="zh-CN" altLang="en-US" dirty="0"/>
+              <a:t>代表的就是最后多个</a:t>
+            </a:r>
+            <a:r>
+              <a:rPr lang="en-US" altLang="zh-CN" dirty="0"/>
+              <a:t>commit</a:t>
+            </a:r>
+            <a:r>
+              <a:rPr lang="zh-CN" altLang="en-US" dirty="0"/>
+              <a:t>后的状态</a:t>
+            </a:r>
+            <a:endParaRPr lang="en-US" altLang="zh-CN" dirty="0"/>
+          </a:p>
+          <a:p>
+            <a:endParaRPr lang="en-US" altLang="zh-CN" dirty="0"/>
+          </a:p>
+          <a:p>
+            <a:endParaRPr lang="en-US" altLang="zh-CN" dirty="0"/>
+          </a:p>
+          <a:p>
+            <a:r>
+              <a:rPr lang="zh-CN" altLang="en-US" dirty="0"/>
+              <a:t>而且一个</a:t>
+            </a:r>
+            <a:r>
+              <a:rPr lang="en-US" altLang="zh-CN" dirty="0"/>
+              <a:t>pr</a:t>
+            </a:r>
+            <a:r>
+              <a:rPr lang="zh-CN" altLang="en-US" dirty="0"/>
+              <a:t>有很多个</a:t>
+            </a:r>
+            <a:r>
+              <a:rPr lang="en-US" altLang="zh-CN" dirty="0"/>
+              <a:t>commit</a:t>
+            </a:r>
+            <a:r>
+              <a:rPr lang="zh-CN" altLang="en-US" dirty="0"/>
+              <a:t>，</a:t>
+            </a:r>
+            <a:endParaRPr lang="en-US" altLang="zh-CN" dirty="0"/>
+          </a:p>
+          <a:p>
+            <a:r>
+              <a:rPr lang="zh-CN" altLang="en-US" dirty="0"/>
+              <a:t>在其中某个</a:t>
+            </a:r>
+            <a:r>
+              <a:rPr lang="en-US" altLang="zh-CN" dirty="0"/>
+              <a:t>commit</a:t>
+            </a:r>
+            <a:r>
+              <a:rPr lang="zh-CN" altLang="en-US" dirty="0"/>
+              <a:t>上可能有多个</a:t>
+            </a:r>
+            <a:r>
+              <a:rPr lang="en-US" altLang="zh-CN" dirty="0"/>
+              <a:t>review</a:t>
+            </a:r>
+          </a:p>
+        </p:txBody>
+      </p:sp>
+    </p:spTree>
+    <p:extLst>
+      <p:ext uri="{BB962C8B-B14F-4D97-AF65-F5344CB8AC3E}">
+        <p14:creationId xmlns:p14="http://schemas.microsoft.com/office/powerpoint/2010/main" val="1753149173"/>
+      </p:ext>
+    </p:extLst>
+  </p:cSld>
+  <p:clrMapOvr>
+    <a:masterClrMapping/>
+  </p:clrMapOvr>
+</p:sld>
+</file>
+
+<file path=ppt/slides/slide16.xml><?xml version="1.0" encoding="utf-8"?>
+<p:sld xmlns:a="http://schemas.openxmlformats.org/drawingml/2006/main" xmlns:r="http://schemas.openxmlformats.org/officeDocument/2006/relationships" xmlns:p="http://schemas.openxmlformats.org/presentationml/2006/main">
+  <p:cSld>
+    <p:spTree>
+      <p:nvGrpSpPr>
+        <p:cNvPr id="1" name=""/>
+        <p:cNvGrpSpPr/>
+        <p:nvPr/>
+      </p:nvGrpSpPr>
+      <p:grpSpPr>
+        <a:xfrm>
+          <a:off x="0" y="0"/>
+          <a:ext cx="0" cy="0"/>
+          <a:chOff x="0" y="0"/>
+          <a:chExt cx="0" cy="0"/>
+        </a:xfrm>
+      </p:grpSpPr>
+      <p:sp>
+        <p:nvSpPr>
+          <p:cNvPr id="17" name="矩形: 圆角 16">
+            <a:extLst>
+              <a:ext uri="{FF2B5EF4-FFF2-40B4-BE49-F238E27FC236}">
+                <a16:creationId xmlns:a16="http://schemas.microsoft.com/office/drawing/2014/main" id="{67F8CDB6-EF4A-5892-AC52-59127B426186}"/>
+              </a:ext>
+            </a:extLst>
+          </p:cNvPr>
+          <p:cNvSpPr/>
+          <p:nvPr/>
+        </p:nvSpPr>
+        <p:spPr>
+          <a:xfrm>
+            <a:off x="507423" y="3801197"/>
+            <a:ext cx="4582391" cy="969167"/>
+          </a:xfrm>
+          <a:prstGeom prst="roundRect">
+            <a:avLst/>
+          </a:prstGeom>
+          <a:solidFill>
+            <a:schemeClr val="bg2"/>
+          </a:solidFill>
+        </p:spPr>
+        <p:style>
+          <a:lnRef idx="2">
+            <a:schemeClr val="accent1">
+              <a:shade val="15000"/>
+            </a:schemeClr>
+          </a:lnRef>
+          <a:fillRef idx="1">
+            <a:schemeClr val="accent1"/>
+          </a:fillRef>
+          <a:effectRef idx="0">
+            <a:schemeClr val="accent1"/>
+          </a:effectRef>
+          <a:fontRef idx="minor">
+            <a:schemeClr val="lt1"/>
+          </a:fontRef>
+        </p:style>
+        <p:txBody>
+          <a:bodyPr rtlCol="0" anchor="ctr"/>
+          <a:lstStyle/>
+          <a:p>
+            <a:pPr algn="ctr"/>
+            <a:endParaRPr lang="zh-CN" altLang="en-US" dirty="0"/>
+          </a:p>
+        </p:txBody>
+      </p:sp>
+      <p:sp>
+        <p:nvSpPr>
+          <p:cNvPr id="2" name="标题 1">
+            <a:extLst>
+              <a:ext uri="{FF2B5EF4-FFF2-40B4-BE49-F238E27FC236}">
+                <a16:creationId xmlns:a16="http://schemas.microsoft.com/office/drawing/2014/main" id="{5D5EC25A-D3C5-8C48-2607-A42AB3124C60}"/>
+              </a:ext>
+            </a:extLst>
+          </p:cNvPr>
+          <p:cNvSpPr>
+            <a:spLocks noGrp="1"/>
+          </p:cNvSpPr>
+          <p:nvPr>
+            <p:ph type="title"/>
+          </p:nvPr>
+        </p:nvSpPr>
+        <p:spPr/>
+        <p:txBody>
+          <a:bodyPr/>
+          <a:lstStyle/>
+          <a:p>
+            <a:r>
+              <a:rPr lang="zh-CN" altLang="en-US" dirty="0"/>
+              <a:t>数据爬取</a:t>
+            </a:r>
+          </a:p>
+        </p:txBody>
+      </p:sp>
+      <p:sp>
+        <p:nvSpPr>
+          <p:cNvPr id="3" name="内容占位符 2">
+            <a:extLst>
+              <a:ext uri="{FF2B5EF4-FFF2-40B4-BE49-F238E27FC236}">
+                <a16:creationId xmlns:a16="http://schemas.microsoft.com/office/drawing/2014/main" id="{87798EFE-D5D0-8000-34B0-5E2E146D0CA6}"/>
+              </a:ext>
+            </a:extLst>
+          </p:cNvPr>
+          <p:cNvSpPr>
+            <a:spLocks noGrp="1"/>
+          </p:cNvSpPr>
+          <p:nvPr>
+            <p:ph idx="1"/>
+          </p:nvPr>
+        </p:nvSpPr>
+        <p:spPr>
+          <a:xfrm>
+            <a:off x="748145" y="1741704"/>
+            <a:ext cx="10515600" cy="4351338"/>
+          </a:xfrm>
+        </p:spPr>
+        <p:txBody>
+          <a:bodyPr/>
+          <a:lstStyle/>
+          <a:p>
+            <a:r>
+              <a:rPr lang="zh-CN" altLang="en-US" dirty="0"/>
+              <a:t>现在</a:t>
+            </a:r>
+            <a:endParaRPr lang="en-US" altLang="zh-CN" dirty="0"/>
+          </a:p>
+          <a:p>
+            <a:endParaRPr lang="zh-CN" altLang="en-US" dirty="0"/>
+          </a:p>
+        </p:txBody>
+      </p:sp>
+      <p:sp>
+        <p:nvSpPr>
+          <p:cNvPr id="4" name="椭圆 3">
+            <a:extLst>
+              <a:ext uri="{FF2B5EF4-FFF2-40B4-BE49-F238E27FC236}">
+                <a16:creationId xmlns:a16="http://schemas.microsoft.com/office/drawing/2014/main" id="{5FA1AF83-7C26-E12A-6847-6330EA1C1C28}"/>
+              </a:ext>
+            </a:extLst>
+          </p:cNvPr>
+          <p:cNvSpPr/>
+          <p:nvPr/>
+        </p:nvSpPr>
+        <p:spPr>
+          <a:xfrm>
+            <a:off x="355022" y="2722418"/>
+            <a:ext cx="966356" cy="706582"/>
+          </a:xfrm>
+          <a:prstGeom prst="ellipse">
+            <a:avLst/>
+          </a:prstGeom>
+        </p:spPr>
+        <p:style>
+          <a:lnRef idx="2">
+            <a:schemeClr val="accent1">
+              <a:shade val="15000"/>
+            </a:schemeClr>
+          </a:lnRef>
+          <a:fillRef idx="1">
+            <a:schemeClr val="accent1"/>
+          </a:fillRef>
+          <a:effectRef idx="0">
+            <a:schemeClr val="accent1"/>
+          </a:effectRef>
+          <a:fontRef idx="minor">
+            <a:schemeClr val="lt1"/>
+          </a:fontRef>
+        </p:style>
+        <p:txBody>
+          <a:bodyPr rtlCol="0" anchor="ctr"/>
+          <a:lstStyle/>
+          <a:p>
+            <a:pPr algn="ctr"/>
+            <a:r>
+              <a:rPr lang="en-US" altLang="zh-CN" dirty="0"/>
+              <a:t>main</a:t>
+            </a:r>
+            <a:endParaRPr lang="zh-CN" altLang="en-US" dirty="0"/>
+          </a:p>
+        </p:txBody>
+      </p:sp>
+      <p:sp>
+        <p:nvSpPr>
+          <p:cNvPr id="5" name="椭圆 4">
+            <a:extLst>
+              <a:ext uri="{FF2B5EF4-FFF2-40B4-BE49-F238E27FC236}">
+                <a16:creationId xmlns:a16="http://schemas.microsoft.com/office/drawing/2014/main" id="{84EB8FDF-6786-0260-1EF3-9BE82B24E772}"/>
+              </a:ext>
+            </a:extLst>
+          </p:cNvPr>
+          <p:cNvSpPr/>
+          <p:nvPr/>
+        </p:nvSpPr>
+        <p:spPr>
+          <a:xfrm>
+            <a:off x="2180360" y="2722418"/>
+            <a:ext cx="803564" cy="706582"/>
+          </a:xfrm>
+          <a:prstGeom prst="ellipse">
+            <a:avLst/>
+          </a:prstGeom>
+        </p:spPr>
+        <p:style>
+          <a:lnRef idx="2">
+            <a:schemeClr val="accent1">
+              <a:shade val="15000"/>
+            </a:schemeClr>
+          </a:lnRef>
+          <a:fillRef idx="1">
+            <a:schemeClr val="accent1"/>
+          </a:fillRef>
+          <a:effectRef idx="0">
+            <a:schemeClr val="accent1"/>
+          </a:effectRef>
+          <a:fontRef idx="minor">
+            <a:schemeClr val="lt1"/>
+          </a:fontRef>
+        </p:style>
+        <p:txBody>
+          <a:bodyPr rtlCol="0" anchor="ctr"/>
+          <a:lstStyle/>
+          <a:p>
+            <a:pPr algn="ctr"/>
+            <a:endParaRPr lang="zh-CN" altLang="en-US"/>
+          </a:p>
+        </p:txBody>
+      </p:sp>
+      <p:cxnSp>
+        <p:nvCxnSpPr>
+          <p:cNvPr id="7" name="直接箭头连接符 6">
+            <a:extLst>
+              <a:ext uri="{FF2B5EF4-FFF2-40B4-BE49-F238E27FC236}">
+                <a16:creationId xmlns:a16="http://schemas.microsoft.com/office/drawing/2014/main" id="{0B6B64AD-649A-B788-647A-293584F36B18}"/>
+              </a:ext>
+            </a:extLst>
+          </p:cNvPr>
+          <p:cNvCxnSpPr/>
+          <p:nvPr/>
+        </p:nvCxnSpPr>
+        <p:spPr>
+          <a:xfrm>
+            <a:off x="1425286" y="3075709"/>
+            <a:ext cx="644236" cy="0"/>
+          </a:xfrm>
+          <a:prstGeom prst="straightConnector1">
+            <a:avLst/>
+          </a:prstGeom>
+          <a:ln>
+            <a:tailEnd type="triangle"/>
+          </a:ln>
+        </p:spPr>
+        <p:style>
+          <a:lnRef idx="1">
+            <a:schemeClr val="accent1"/>
+          </a:lnRef>
+          <a:fillRef idx="0">
+            <a:schemeClr val="accent1"/>
+          </a:fillRef>
+          <a:effectRef idx="0">
+            <a:schemeClr val="accent1"/>
+          </a:effectRef>
+          <a:fontRef idx="minor">
+            <a:schemeClr val="tx1"/>
+          </a:fontRef>
+        </p:style>
+      </p:cxnSp>
+      <p:sp>
+        <p:nvSpPr>
+          <p:cNvPr id="8" name="椭圆 7">
+            <a:extLst>
+              <a:ext uri="{FF2B5EF4-FFF2-40B4-BE49-F238E27FC236}">
+                <a16:creationId xmlns:a16="http://schemas.microsoft.com/office/drawing/2014/main" id="{AF1E6379-9B64-B781-FE85-E983D4145AFC}"/>
+              </a:ext>
+            </a:extLst>
+          </p:cNvPr>
+          <p:cNvSpPr/>
+          <p:nvPr/>
+        </p:nvSpPr>
+        <p:spPr>
+          <a:xfrm>
+            <a:off x="988868" y="3852213"/>
+            <a:ext cx="1080654" cy="706582"/>
+          </a:xfrm>
+          <a:prstGeom prst="ellipse">
+            <a:avLst/>
+          </a:prstGeom>
+        </p:spPr>
+        <p:style>
+          <a:lnRef idx="2">
+            <a:schemeClr val="accent1">
+              <a:shade val="15000"/>
+            </a:schemeClr>
+          </a:lnRef>
+          <a:fillRef idx="1">
+            <a:schemeClr val="accent1"/>
+          </a:fillRef>
+          <a:effectRef idx="0">
+            <a:schemeClr val="accent1"/>
+          </a:effectRef>
+          <a:fontRef idx="minor">
+            <a:schemeClr val="lt1"/>
+          </a:fontRef>
+        </p:style>
+        <p:txBody>
+          <a:bodyPr rtlCol="0" anchor="ctr"/>
+          <a:lstStyle/>
+          <a:p>
+            <a:pPr algn="ctr"/>
+            <a:r>
+              <a:rPr lang="en-US" altLang="zh-CN" sz="1100" dirty="0"/>
+              <a:t>commit1</a:t>
+            </a:r>
+            <a:endParaRPr lang="zh-CN" altLang="en-US" sz="1100" dirty="0"/>
+          </a:p>
+        </p:txBody>
+      </p:sp>
+      <p:sp>
+        <p:nvSpPr>
+          <p:cNvPr id="9" name="椭圆 8">
+            <a:extLst>
+              <a:ext uri="{FF2B5EF4-FFF2-40B4-BE49-F238E27FC236}">
+                <a16:creationId xmlns:a16="http://schemas.microsoft.com/office/drawing/2014/main" id="{321EA98E-91BB-AD63-92B7-49F3B79F7D73}"/>
+              </a:ext>
+            </a:extLst>
+          </p:cNvPr>
+          <p:cNvSpPr/>
+          <p:nvPr/>
+        </p:nvSpPr>
+        <p:spPr>
+          <a:xfrm>
+            <a:off x="2332760" y="3852213"/>
+            <a:ext cx="803564" cy="706582"/>
+          </a:xfrm>
+          <a:prstGeom prst="ellipse">
+            <a:avLst/>
+          </a:prstGeom>
+        </p:spPr>
+        <p:style>
+          <a:lnRef idx="2">
+            <a:schemeClr val="accent1">
+              <a:shade val="15000"/>
+            </a:schemeClr>
+          </a:lnRef>
+          <a:fillRef idx="1">
+            <a:schemeClr val="accent1"/>
+          </a:fillRef>
+          <a:effectRef idx="0">
+            <a:schemeClr val="accent1"/>
+          </a:effectRef>
+          <a:fontRef idx="minor">
+            <a:schemeClr val="lt1"/>
+          </a:fontRef>
+        </p:style>
+        <p:txBody>
+          <a:bodyPr rtlCol="0" anchor="ctr"/>
+          <a:lstStyle/>
+          <a:p>
+            <a:pPr algn="ctr"/>
+            <a:r>
+              <a:rPr lang="en-US" altLang="zh-CN" dirty="0"/>
+              <a:t>2</a:t>
+            </a:r>
+            <a:endParaRPr lang="zh-CN" altLang="en-US" dirty="0"/>
+          </a:p>
+        </p:txBody>
+      </p:sp>
+      <p:sp>
+        <p:nvSpPr>
+          <p:cNvPr id="10" name="椭圆 9">
+            <a:extLst>
+              <a:ext uri="{FF2B5EF4-FFF2-40B4-BE49-F238E27FC236}">
+                <a16:creationId xmlns:a16="http://schemas.microsoft.com/office/drawing/2014/main" id="{9AD11A37-7B94-EB1E-CB0E-3DC94367587B}"/>
+              </a:ext>
+            </a:extLst>
+          </p:cNvPr>
+          <p:cNvSpPr/>
+          <p:nvPr/>
+        </p:nvSpPr>
+        <p:spPr>
+          <a:xfrm>
+            <a:off x="3600451" y="3852213"/>
+            <a:ext cx="803564" cy="706582"/>
+          </a:xfrm>
+          <a:prstGeom prst="ellipse">
+            <a:avLst/>
+          </a:prstGeom>
+        </p:spPr>
+        <p:style>
+          <a:lnRef idx="2">
+            <a:schemeClr val="accent1">
+              <a:shade val="15000"/>
+            </a:schemeClr>
+          </a:lnRef>
+          <a:fillRef idx="1">
+            <a:schemeClr val="accent1"/>
+          </a:fillRef>
+          <a:effectRef idx="0">
+            <a:schemeClr val="accent1"/>
+          </a:effectRef>
+          <a:fontRef idx="minor">
+            <a:schemeClr val="lt1"/>
+          </a:fontRef>
+        </p:style>
+        <p:txBody>
+          <a:bodyPr rtlCol="0" anchor="ctr"/>
+          <a:lstStyle/>
+          <a:p>
+            <a:pPr algn="ctr"/>
+            <a:r>
+              <a:rPr lang="en-US" altLang="zh-CN" dirty="0"/>
+              <a:t>3</a:t>
+            </a:r>
+            <a:endParaRPr lang="zh-CN" altLang="en-US" dirty="0"/>
+          </a:p>
+        </p:txBody>
+      </p:sp>
+      <p:cxnSp>
+        <p:nvCxnSpPr>
+          <p:cNvPr id="12" name="直接箭头连接符 11">
+            <a:extLst>
+              <a:ext uri="{FF2B5EF4-FFF2-40B4-BE49-F238E27FC236}">
+                <a16:creationId xmlns:a16="http://schemas.microsoft.com/office/drawing/2014/main" id="{8D9855F4-5292-64BE-D089-9C16D55F8BC5}"/>
+              </a:ext>
+            </a:extLst>
+          </p:cNvPr>
+          <p:cNvCxnSpPr>
+            <a:endCxn id="8" idx="1"/>
+          </p:cNvCxnSpPr>
+          <p:nvPr/>
+        </p:nvCxnSpPr>
+        <p:spPr>
+          <a:xfrm>
+            <a:off x="988868" y="3532909"/>
+            <a:ext cx="158258" cy="422781"/>
+          </a:xfrm>
+          <a:prstGeom prst="straightConnector1">
+            <a:avLst/>
+          </a:prstGeom>
+          <a:ln>
+            <a:tailEnd type="triangle"/>
+          </a:ln>
+        </p:spPr>
+        <p:style>
+          <a:lnRef idx="1">
+            <a:schemeClr val="accent1"/>
+          </a:lnRef>
+          <a:fillRef idx="0">
+            <a:schemeClr val="accent1"/>
+          </a:fillRef>
+          <a:effectRef idx="0">
+            <a:schemeClr val="accent1"/>
+          </a:effectRef>
+          <a:fontRef idx="minor">
+            <a:schemeClr val="tx1"/>
+          </a:fontRef>
+        </p:style>
+      </p:cxnSp>
+      <p:cxnSp>
+        <p:nvCxnSpPr>
+          <p:cNvPr id="14" name="直接箭头连接符 13">
+            <a:extLst>
+              <a:ext uri="{FF2B5EF4-FFF2-40B4-BE49-F238E27FC236}">
+                <a16:creationId xmlns:a16="http://schemas.microsoft.com/office/drawing/2014/main" id="{B239CC4A-337C-E814-D84F-6E83ED77F2CF}"/>
+              </a:ext>
+            </a:extLst>
+          </p:cNvPr>
+          <p:cNvCxnSpPr>
+            <a:endCxn id="9" idx="2"/>
+          </p:cNvCxnSpPr>
+          <p:nvPr/>
+        </p:nvCxnSpPr>
+        <p:spPr>
+          <a:xfrm>
+            <a:off x="2180360" y="4205504"/>
+            <a:ext cx="152400" cy="0"/>
+          </a:xfrm>
+          <a:prstGeom prst="straightConnector1">
+            <a:avLst/>
+          </a:prstGeom>
+          <a:ln>
+            <a:tailEnd type="triangle"/>
+          </a:ln>
+        </p:spPr>
+        <p:style>
+          <a:lnRef idx="1">
+            <a:schemeClr val="accent1"/>
+          </a:lnRef>
+          <a:fillRef idx="0">
+            <a:schemeClr val="accent1"/>
+          </a:fillRef>
+          <a:effectRef idx="0">
+            <a:schemeClr val="accent1"/>
+          </a:effectRef>
+          <a:fontRef idx="minor">
+            <a:schemeClr val="tx1"/>
+          </a:fontRef>
+        </p:style>
+      </p:cxnSp>
+      <p:cxnSp>
+        <p:nvCxnSpPr>
+          <p:cNvPr id="16" name="直接箭头连接符 15">
+            <a:extLst>
+              <a:ext uri="{FF2B5EF4-FFF2-40B4-BE49-F238E27FC236}">
+                <a16:creationId xmlns:a16="http://schemas.microsoft.com/office/drawing/2014/main" id="{EF552F61-D70B-E61E-A2CD-FA09674D3C25}"/>
+              </a:ext>
+            </a:extLst>
+          </p:cNvPr>
+          <p:cNvCxnSpPr>
+            <a:endCxn id="10" idx="2"/>
+          </p:cNvCxnSpPr>
+          <p:nvPr/>
+        </p:nvCxnSpPr>
+        <p:spPr>
+          <a:xfrm>
+            <a:off x="3264477" y="4205504"/>
+            <a:ext cx="335974" cy="0"/>
+          </a:xfrm>
+          <a:prstGeom prst="straightConnector1">
+            <a:avLst/>
+          </a:prstGeom>
+          <a:ln>
+            <a:tailEnd type="triangle"/>
+          </a:ln>
+        </p:spPr>
+        <p:style>
+          <a:lnRef idx="1">
+            <a:schemeClr val="accent1"/>
+          </a:lnRef>
+          <a:fillRef idx="0">
+            <a:schemeClr val="accent1"/>
+          </a:fillRef>
+          <a:effectRef idx="0">
+            <a:schemeClr val="accent1"/>
+          </a:effectRef>
+          <a:fontRef idx="minor">
+            <a:schemeClr val="tx1"/>
+          </a:fontRef>
+        </p:style>
+      </p:cxnSp>
+      <p:sp>
+        <p:nvSpPr>
+          <p:cNvPr id="18" name="文本框 17">
+            <a:extLst>
+              <a:ext uri="{FF2B5EF4-FFF2-40B4-BE49-F238E27FC236}">
+                <a16:creationId xmlns:a16="http://schemas.microsoft.com/office/drawing/2014/main" id="{DB101972-F8D9-6CCB-D7C0-6832A3EB74DA}"/>
+              </a:ext>
+            </a:extLst>
+          </p:cNvPr>
+          <p:cNvSpPr txBox="1"/>
+          <p:nvPr/>
+        </p:nvSpPr>
+        <p:spPr>
+          <a:xfrm>
+            <a:off x="544516" y="4143221"/>
+            <a:ext cx="444352" cy="369332"/>
+          </a:xfrm>
+          <a:prstGeom prst="rect">
+            <a:avLst/>
+          </a:prstGeom>
+          <a:noFill/>
+        </p:spPr>
+        <p:txBody>
+          <a:bodyPr wrap="none" rtlCol="0">
+            <a:spAutoFit/>
+          </a:bodyPr>
+          <a:lstStyle/>
+          <a:p>
+            <a:r>
+              <a:rPr lang="en-US" altLang="zh-CN" dirty="0"/>
+              <a:t>PR</a:t>
+            </a:r>
+            <a:endParaRPr lang="zh-CN" altLang="en-US" dirty="0"/>
+          </a:p>
+        </p:txBody>
+      </p:sp>
+      <p:cxnSp>
+        <p:nvCxnSpPr>
+          <p:cNvPr id="22" name="直接箭头连接符 21">
+            <a:extLst>
+              <a:ext uri="{FF2B5EF4-FFF2-40B4-BE49-F238E27FC236}">
+                <a16:creationId xmlns:a16="http://schemas.microsoft.com/office/drawing/2014/main" id="{A506A3ED-44A2-B308-753B-A3F3EEB10B66}"/>
+              </a:ext>
+            </a:extLst>
+          </p:cNvPr>
+          <p:cNvCxnSpPr/>
+          <p:nvPr/>
+        </p:nvCxnSpPr>
+        <p:spPr>
+          <a:xfrm flipV="1">
+            <a:off x="4062845" y="4512553"/>
+            <a:ext cx="0" cy="724465"/>
+          </a:xfrm>
+          <a:prstGeom prst="straightConnector1">
+            <a:avLst/>
+          </a:prstGeom>
+          <a:ln>
+            <a:tailEnd type="triangle"/>
+          </a:ln>
+        </p:spPr>
+        <p:style>
+          <a:lnRef idx="1">
+            <a:schemeClr val="accent1"/>
+          </a:lnRef>
+          <a:fillRef idx="0">
+            <a:schemeClr val="accent1"/>
+          </a:fillRef>
+          <a:effectRef idx="0">
+            <a:schemeClr val="accent1"/>
+          </a:effectRef>
+          <a:fontRef idx="minor">
+            <a:schemeClr val="tx1"/>
+          </a:fontRef>
+        </p:style>
+      </p:cxnSp>
+      <p:sp>
+        <p:nvSpPr>
+          <p:cNvPr id="23" name="矩形 22">
+            <a:extLst>
+              <a:ext uri="{FF2B5EF4-FFF2-40B4-BE49-F238E27FC236}">
+                <a16:creationId xmlns:a16="http://schemas.microsoft.com/office/drawing/2014/main" id="{931E8725-1830-7D47-DB11-10269BCF08B1}"/>
+              </a:ext>
+            </a:extLst>
+          </p:cNvPr>
+          <p:cNvSpPr/>
+          <p:nvPr/>
+        </p:nvSpPr>
+        <p:spPr>
+          <a:xfrm>
+            <a:off x="2878281" y="5257660"/>
+            <a:ext cx="2903543" cy="461665"/>
+          </a:xfrm>
+          <a:prstGeom prst="rect">
+            <a:avLst/>
+          </a:prstGeom>
+          <a:noFill/>
+        </p:spPr>
+        <p:txBody>
+          <a:bodyPr wrap="square" lIns="91440" tIns="45720" rIns="91440" bIns="45720">
+            <a:spAutoFit/>
+          </a:bodyPr>
+          <a:lstStyle/>
+          <a:p>
+            <a:pPr algn="ctr"/>
+            <a:r>
+              <a:rPr lang="en-US" altLang="zh-CN" sz="2400" b="1" dirty="0">
+                <a:ln w="22225">
+                  <a:solidFill>
+                    <a:schemeClr val="accent2"/>
+                  </a:solidFill>
+                  <a:prstDash val="solid"/>
+                </a:ln>
+                <a:solidFill>
+                  <a:schemeClr val="accent2">
+                    <a:lumMod val="40000"/>
+                    <a:lumOff val="60000"/>
+                  </a:schemeClr>
+                </a:solidFill>
+              </a:rPr>
+              <a:t>PR. </a:t>
+            </a:r>
+            <a:r>
+              <a:rPr lang="en-US" altLang="zh-CN" sz="2400" b="1" dirty="0" err="1">
+                <a:ln w="22225">
+                  <a:solidFill>
+                    <a:schemeClr val="accent2"/>
+                  </a:solidFill>
+                  <a:prstDash val="solid"/>
+                </a:ln>
+                <a:solidFill>
+                  <a:schemeClr val="accent2">
+                    <a:lumMod val="40000"/>
+                    <a:lumOff val="60000"/>
+                  </a:schemeClr>
+                </a:solidFill>
+              </a:rPr>
+              <a:t>headRefOid</a:t>
+            </a:r>
+            <a:endParaRPr lang="zh-CN" altLang="en-US" sz="2400" b="1" cap="none" spc="0" dirty="0">
+              <a:ln w="22225">
+                <a:solidFill>
+                  <a:schemeClr val="accent2"/>
+                </a:solidFill>
+                <a:prstDash val="solid"/>
+              </a:ln>
+              <a:solidFill>
+                <a:schemeClr val="accent2">
+                  <a:lumMod val="40000"/>
+                  <a:lumOff val="60000"/>
+                </a:schemeClr>
+              </a:solidFill>
+              <a:effectLst/>
+            </a:endParaRPr>
+          </a:p>
+        </p:txBody>
+      </p:sp>
+      <p:sp>
+        <p:nvSpPr>
+          <p:cNvPr id="24" name="矩形 23">
+            <a:extLst>
+              <a:ext uri="{FF2B5EF4-FFF2-40B4-BE49-F238E27FC236}">
+                <a16:creationId xmlns:a16="http://schemas.microsoft.com/office/drawing/2014/main" id="{1FDA35C7-D1C7-F486-4D0F-38B5E40B2560}"/>
+              </a:ext>
+            </a:extLst>
+          </p:cNvPr>
+          <p:cNvSpPr/>
+          <p:nvPr/>
+        </p:nvSpPr>
+        <p:spPr>
+          <a:xfrm>
+            <a:off x="2514602" y="1947151"/>
+            <a:ext cx="2903543" cy="461665"/>
+          </a:xfrm>
+          <a:prstGeom prst="rect">
+            <a:avLst/>
+          </a:prstGeom>
+          <a:noFill/>
+        </p:spPr>
+        <p:txBody>
+          <a:bodyPr wrap="square" lIns="91440" tIns="45720" rIns="91440" bIns="45720">
+            <a:spAutoFit/>
+          </a:bodyPr>
+          <a:lstStyle/>
+          <a:p>
+            <a:pPr algn="ctr"/>
+            <a:r>
+              <a:rPr lang="en-US" altLang="zh-CN" sz="2400" b="1" dirty="0">
+                <a:ln w="22225">
+                  <a:solidFill>
+                    <a:schemeClr val="accent2"/>
+                  </a:solidFill>
+                  <a:prstDash val="solid"/>
+                </a:ln>
+                <a:solidFill>
+                  <a:schemeClr val="accent2">
+                    <a:lumMod val="40000"/>
+                    <a:lumOff val="60000"/>
+                  </a:schemeClr>
+                </a:solidFill>
+              </a:rPr>
+              <a:t>PR. </a:t>
+            </a:r>
+            <a:r>
+              <a:rPr lang="en-US" altLang="zh-CN" sz="2400" b="1" dirty="0" err="1">
+                <a:ln w="22225">
+                  <a:solidFill>
+                    <a:schemeClr val="accent2"/>
+                  </a:solidFill>
+                  <a:prstDash val="solid"/>
+                </a:ln>
+                <a:solidFill>
+                  <a:schemeClr val="accent2">
+                    <a:lumMod val="40000"/>
+                    <a:lumOff val="60000"/>
+                  </a:schemeClr>
+                </a:solidFill>
+              </a:rPr>
+              <a:t>baseRefOid</a:t>
+            </a:r>
+            <a:endParaRPr lang="zh-CN" altLang="en-US" sz="2400" b="1" cap="none" spc="0" dirty="0">
+              <a:ln w="22225">
+                <a:solidFill>
+                  <a:schemeClr val="accent2"/>
+                </a:solidFill>
+                <a:prstDash val="solid"/>
+              </a:ln>
+              <a:solidFill>
+                <a:schemeClr val="accent2">
+                  <a:lumMod val="40000"/>
+                  <a:lumOff val="60000"/>
+                </a:schemeClr>
+              </a:solidFill>
+              <a:effectLst/>
+            </a:endParaRPr>
+          </a:p>
+        </p:txBody>
+      </p:sp>
+      <p:cxnSp>
+        <p:nvCxnSpPr>
+          <p:cNvPr id="26" name="直接箭头连接符 25">
+            <a:extLst>
+              <a:ext uri="{FF2B5EF4-FFF2-40B4-BE49-F238E27FC236}">
+                <a16:creationId xmlns:a16="http://schemas.microsoft.com/office/drawing/2014/main" id="{D1498C5B-C838-2017-3F23-232D9FF1F87C}"/>
+              </a:ext>
+            </a:extLst>
+          </p:cNvPr>
+          <p:cNvCxnSpPr/>
+          <p:nvPr/>
+        </p:nvCxnSpPr>
+        <p:spPr>
+          <a:xfrm flipH="1">
+            <a:off x="2878281" y="2408816"/>
+            <a:ext cx="258043" cy="313602"/>
+          </a:xfrm>
+          <a:prstGeom prst="straightConnector1">
+            <a:avLst/>
+          </a:prstGeom>
+          <a:ln>
+            <a:tailEnd type="triangle"/>
+          </a:ln>
+        </p:spPr>
+        <p:style>
+          <a:lnRef idx="1">
+            <a:schemeClr val="accent1"/>
+          </a:lnRef>
+          <a:fillRef idx="0">
+            <a:schemeClr val="accent1"/>
+          </a:fillRef>
+          <a:effectRef idx="0">
+            <a:schemeClr val="accent1"/>
+          </a:effectRef>
+          <a:fontRef idx="minor">
+            <a:schemeClr val="tx1"/>
+          </a:fontRef>
+        </p:style>
+      </p:cxnSp>
+      <p:cxnSp>
+        <p:nvCxnSpPr>
+          <p:cNvPr id="28" name="直接箭头连接符 27">
+            <a:extLst>
+              <a:ext uri="{FF2B5EF4-FFF2-40B4-BE49-F238E27FC236}">
+                <a16:creationId xmlns:a16="http://schemas.microsoft.com/office/drawing/2014/main" id="{5BA82DEB-5D79-70A4-6614-AB2267200659}"/>
+              </a:ext>
+            </a:extLst>
+          </p:cNvPr>
+          <p:cNvCxnSpPr/>
+          <p:nvPr/>
+        </p:nvCxnSpPr>
+        <p:spPr>
+          <a:xfrm flipH="1">
+            <a:off x="4769427" y="3075709"/>
+            <a:ext cx="1932709" cy="976746"/>
+          </a:xfrm>
+          <a:prstGeom prst="straightConnector1">
+            <a:avLst/>
+          </a:prstGeom>
+          <a:ln>
+            <a:tailEnd type="triangle"/>
+          </a:ln>
+        </p:spPr>
+        <p:style>
+          <a:lnRef idx="1">
+            <a:schemeClr val="accent1"/>
+          </a:lnRef>
+          <a:fillRef idx="0">
+            <a:schemeClr val="accent1"/>
+          </a:fillRef>
+          <a:effectRef idx="0">
+            <a:schemeClr val="accent1"/>
+          </a:effectRef>
+          <a:fontRef idx="minor">
+            <a:schemeClr val="tx1"/>
+          </a:fontRef>
+        </p:style>
+      </p:cxnSp>
+      <p:sp>
+        <p:nvSpPr>
+          <p:cNvPr id="29" name="文本框 28">
+            <a:extLst>
+              <a:ext uri="{FF2B5EF4-FFF2-40B4-BE49-F238E27FC236}">
+                <a16:creationId xmlns:a16="http://schemas.microsoft.com/office/drawing/2014/main" id="{C9224E76-1658-3BEE-CEA7-3A694F8207FD}"/>
+              </a:ext>
+            </a:extLst>
+          </p:cNvPr>
+          <p:cNvSpPr txBox="1"/>
+          <p:nvPr/>
+        </p:nvSpPr>
+        <p:spPr>
+          <a:xfrm>
+            <a:off x="5874473" y="1188566"/>
+            <a:ext cx="7519408" cy="5078313"/>
+          </a:xfrm>
+          <a:prstGeom prst="rect">
+            <a:avLst/>
+          </a:prstGeom>
+          <a:noFill/>
+        </p:spPr>
+        <p:txBody>
+          <a:bodyPr wrap="square" rtlCol="0">
+            <a:spAutoFit/>
+          </a:bodyPr>
+          <a:lstStyle/>
+          <a:p>
+            <a:r>
+              <a:rPr lang="zh-CN" altLang="en-US" dirty="0"/>
+              <a:t>对于一个</a:t>
+            </a:r>
+            <a:r>
+              <a:rPr lang="en-US" altLang="zh-CN" dirty="0"/>
+              <a:t>pr</a:t>
+            </a:r>
+            <a:r>
+              <a:rPr lang="zh-CN" altLang="en-US" dirty="0"/>
+              <a:t>，获取其</a:t>
+            </a:r>
+            <a:r>
+              <a:rPr lang="en-US" altLang="zh-CN" dirty="0" err="1"/>
+              <a:t>reviewThreads</a:t>
+            </a:r>
+            <a:endParaRPr lang="en-US" altLang="zh-CN" dirty="0"/>
+          </a:p>
+          <a:p>
+            <a:endParaRPr lang="en-US" altLang="zh-CN" dirty="0"/>
+          </a:p>
+          <a:p>
+            <a:r>
+              <a:rPr lang="zh-CN" altLang="en-US" dirty="0"/>
+              <a:t>其中每个</a:t>
+            </a:r>
+            <a:r>
+              <a:rPr lang="en-US" altLang="zh-CN" dirty="0">
+                <a:solidFill>
+                  <a:srgbClr val="FF0000"/>
+                </a:solidFill>
+              </a:rPr>
+              <a:t>review comment</a:t>
+            </a:r>
+          </a:p>
+          <a:p>
+            <a:r>
+              <a:rPr lang="zh-CN" altLang="en-US" dirty="0"/>
+              <a:t>会有</a:t>
+            </a:r>
+            <a:endParaRPr lang="en-US" altLang="zh-CN" dirty="0"/>
+          </a:p>
+          <a:p>
+            <a:r>
+              <a:rPr lang="en-US" altLang="zh-CN" dirty="0"/>
+              <a:t>"commit": { "</a:t>
+            </a:r>
+            <a:r>
+              <a:rPr lang="en-US" altLang="zh-CN" dirty="0" err="1"/>
+              <a:t>oid</a:t>
+            </a:r>
+            <a:r>
+              <a:rPr lang="en-US" altLang="zh-CN" dirty="0"/>
+              <a:t>": "</a:t>
+            </a:r>
+            <a:r>
+              <a:rPr lang="en-US" altLang="zh-CN" dirty="0" err="1"/>
+              <a:t>commit_C_sha</a:t>
+            </a:r>
+            <a:r>
+              <a:rPr lang="en-US" altLang="zh-CN" dirty="0"/>
+              <a:t>" },        // </a:t>
+            </a:r>
+            <a:r>
+              <a:rPr lang="zh-CN" altLang="en-US" dirty="0"/>
+              <a:t>重新定位到最新</a:t>
+            </a:r>
+            <a:r>
+              <a:rPr lang="en-US" altLang="zh-CN" dirty="0"/>
+              <a:t>commit</a:t>
+            </a:r>
+          </a:p>
+          <a:p>
+            <a:r>
+              <a:rPr lang="en-US" altLang="zh-CN" dirty="0"/>
+              <a:t>  "</a:t>
+            </a:r>
+            <a:r>
+              <a:rPr lang="en-US" altLang="zh-CN" dirty="0" err="1">
+                <a:solidFill>
+                  <a:srgbClr val="FF0000"/>
+                </a:solidFill>
+              </a:rPr>
+              <a:t>originalCommit</a:t>
+            </a:r>
+            <a:r>
+              <a:rPr lang="en-US" altLang="zh-CN" dirty="0"/>
+              <a:t>": { "</a:t>
+            </a:r>
+            <a:r>
+              <a:rPr lang="en-US" altLang="zh-CN" dirty="0" err="1"/>
+              <a:t>oid</a:t>
+            </a:r>
+            <a:r>
+              <a:rPr lang="en-US" altLang="zh-CN" dirty="0"/>
+              <a:t>": "</a:t>
+            </a:r>
+            <a:r>
+              <a:rPr lang="en-US" altLang="zh-CN" dirty="0" err="1"/>
+              <a:t>commit_A_sha</a:t>
+            </a:r>
+            <a:r>
+              <a:rPr lang="en-US" altLang="zh-CN" dirty="0"/>
+              <a:t>" }, // </a:t>
+            </a:r>
+            <a:r>
+              <a:rPr lang="zh-CN" altLang="en-US" dirty="0"/>
+              <a:t>仍然是最初的</a:t>
+            </a:r>
+            <a:r>
+              <a:rPr lang="en-US" altLang="zh-CN" dirty="0"/>
+              <a:t>commit</a:t>
+            </a:r>
+          </a:p>
+          <a:p>
+            <a:endParaRPr lang="en-US" altLang="zh-CN" dirty="0"/>
+          </a:p>
+          <a:p>
+            <a:endParaRPr lang="en-US" altLang="zh-CN" dirty="0"/>
+          </a:p>
+          <a:p>
+            <a:r>
+              <a:rPr lang="en-US" altLang="zh-CN" dirty="0" err="1"/>
+              <a:t>originalCommit.oid</a:t>
+            </a:r>
+            <a:r>
+              <a:rPr lang="zh-CN" altLang="en-US" dirty="0"/>
+              <a:t>是最初的，</a:t>
+            </a:r>
+            <a:r>
+              <a:rPr lang="en-US" altLang="zh-CN" dirty="0"/>
+              <a:t> commit</a:t>
+            </a:r>
+            <a:r>
+              <a:rPr lang="zh-CN" altLang="en-US" dirty="0"/>
+              <a:t>指向最新的</a:t>
+            </a:r>
+            <a:endParaRPr lang="en-US" altLang="zh-CN" dirty="0"/>
+          </a:p>
+          <a:p>
+            <a:endParaRPr lang="en-US" altLang="zh-CN" dirty="0"/>
+          </a:p>
+          <a:p>
+            <a:r>
+              <a:rPr lang="zh-CN" altLang="en-US" dirty="0"/>
+              <a:t>但是这个可能是</a:t>
+            </a:r>
+            <a:r>
+              <a:rPr lang="en-US" altLang="zh-CN" dirty="0"/>
+              <a:t>null</a:t>
+            </a:r>
+            <a:r>
+              <a:rPr lang="zh-CN" altLang="en-US" dirty="0"/>
+              <a:t>，所以就只过滤这个值不是</a:t>
+            </a:r>
+            <a:r>
+              <a:rPr lang="en-US" altLang="zh-CN" dirty="0"/>
+              <a:t>null</a:t>
+            </a:r>
+            <a:r>
+              <a:rPr lang="zh-CN" altLang="en-US" dirty="0"/>
+              <a:t>的</a:t>
+            </a:r>
+            <a:endParaRPr lang="en-US" altLang="zh-CN" dirty="0"/>
+          </a:p>
+          <a:p>
+            <a:endParaRPr lang="en-US" altLang="zh-CN" dirty="0"/>
+          </a:p>
+          <a:p>
+            <a:endParaRPr lang="en-US" altLang="zh-CN" dirty="0"/>
+          </a:p>
+          <a:p>
+            <a:r>
+              <a:rPr lang="zh-CN" altLang="en-US" dirty="0"/>
+              <a:t>后面用</a:t>
+            </a:r>
+            <a:r>
+              <a:rPr lang="en-US" altLang="zh-CN" dirty="0" err="1"/>
+              <a:t>originalCommit</a:t>
+            </a:r>
+            <a:r>
+              <a:rPr lang="zh-CN" altLang="en-US" dirty="0"/>
+              <a:t>对应的</a:t>
+            </a:r>
+            <a:r>
+              <a:rPr lang="en-US" altLang="zh-CN" dirty="0"/>
+              <a:t>repo</a:t>
+            </a:r>
+            <a:r>
+              <a:rPr lang="zh-CN" altLang="en-US" dirty="0"/>
+              <a:t>做</a:t>
+            </a:r>
+            <a:r>
+              <a:rPr lang="en-US" altLang="zh-CN" dirty="0" err="1"/>
+              <a:t>diffHunk</a:t>
+            </a:r>
+            <a:r>
+              <a:rPr lang="zh-CN" altLang="en-US" dirty="0"/>
+              <a:t>的对应</a:t>
+            </a:r>
+            <a:r>
+              <a:rPr lang="en-US" altLang="zh-CN" dirty="0">
+                <a:solidFill>
+                  <a:srgbClr val="FF0000"/>
+                </a:solidFill>
+              </a:rPr>
+              <a:t>call graph</a:t>
+            </a:r>
+            <a:r>
+              <a:rPr lang="zh-CN" altLang="en-US" dirty="0"/>
+              <a:t>构建</a:t>
+            </a:r>
+            <a:endParaRPr lang="en-US" altLang="zh-CN" dirty="0"/>
+          </a:p>
+          <a:p>
+            <a:endParaRPr lang="en-US" altLang="zh-CN" dirty="0"/>
+          </a:p>
+          <a:p>
+            <a:r>
+              <a:rPr lang="zh-CN" altLang="en-US" dirty="0"/>
+              <a:t>然后用</a:t>
+            </a:r>
+            <a:r>
+              <a:rPr lang="en-US" altLang="zh-CN" dirty="0" err="1"/>
+              <a:t>PR.headRefoid</a:t>
+            </a:r>
+            <a:r>
+              <a:rPr lang="zh-CN" altLang="en-US" dirty="0"/>
+              <a:t>对应的相同</a:t>
+            </a:r>
+            <a:r>
+              <a:rPr lang="en-US" altLang="zh-CN" dirty="0"/>
+              <a:t>path</a:t>
+            </a:r>
+            <a:r>
+              <a:rPr lang="zh-CN" altLang="en-US" dirty="0"/>
+              <a:t>的</a:t>
+            </a:r>
+            <a:r>
+              <a:rPr lang="en-US" altLang="zh-CN" dirty="0"/>
+              <a:t>file</a:t>
+            </a:r>
+            <a:r>
+              <a:rPr lang="zh-CN" altLang="en-US" dirty="0"/>
+              <a:t>，做</a:t>
+            </a:r>
+            <a:r>
+              <a:rPr lang="zh-CN" altLang="en-US" dirty="0">
+                <a:solidFill>
+                  <a:srgbClr val="FF0000"/>
+                </a:solidFill>
+              </a:rPr>
+              <a:t>函数名称</a:t>
+            </a:r>
+            <a:r>
+              <a:rPr lang="zh-CN" altLang="en-US" dirty="0"/>
+              <a:t>匹配，从而获取对应的</a:t>
+            </a:r>
+            <a:r>
+              <a:rPr lang="en-US" altLang="zh-CN" dirty="0" err="1">
+                <a:solidFill>
+                  <a:srgbClr val="FF0000"/>
+                </a:solidFill>
+              </a:rPr>
+              <a:t>revised_code</a:t>
+            </a:r>
+            <a:endParaRPr lang="en-US" altLang="zh-CN" dirty="0">
+              <a:solidFill>
+                <a:srgbClr val="FF0000"/>
+              </a:solidFill>
+            </a:endParaRPr>
+          </a:p>
+          <a:p>
+            <a:endParaRPr lang="zh-CN" altLang="en-US" dirty="0"/>
+          </a:p>
+        </p:txBody>
+      </p:sp>
+      <p:sp>
+        <p:nvSpPr>
+          <p:cNvPr id="33" name="矩形 32">
+            <a:extLst>
+              <a:ext uri="{FF2B5EF4-FFF2-40B4-BE49-F238E27FC236}">
+                <a16:creationId xmlns:a16="http://schemas.microsoft.com/office/drawing/2014/main" id="{8A488F89-6009-D1CB-FFA5-117BE1BB41F6}"/>
+              </a:ext>
+            </a:extLst>
+          </p:cNvPr>
+          <p:cNvSpPr/>
+          <p:nvPr/>
+        </p:nvSpPr>
+        <p:spPr>
+          <a:xfrm>
+            <a:off x="1219632" y="5302177"/>
+            <a:ext cx="1384589" cy="298541"/>
+          </a:xfrm>
+          <a:prstGeom prst="rect">
+            <a:avLst/>
+          </a:prstGeom>
+        </p:spPr>
+        <p:style>
+          <a:lnRef idx="2">
+            <a:schemeClr val="accent1">
+              <a:shade val="15000"/>
+            </a:schemeClr>
+          </a:lnRef>
+          <a:fillRef idx="1">
+            <a:schemeClr val="accent1"/>
+          </a:fillRef>
+          <a:effectRef idx="0">
+            <a:schemeClr val="accent1"/>
+          </a:effectRef>
+          <a:fontRef idx="minor">
+            <a:schemeClr val="lt1"/>
+          </a:fontRef>
+        </p:style>
+        <p:txBody>
+          <a:bodyPr rtlCol="0" anchor="ctr"/>
+          <a:lstStyle/>
+          <a:p>
+            <a:pPr algn="ctr"/>
+            <a:r>
+              <a:rPr lang="en-US" altLang="zh-CN" sz="1200" dirty="0"/>
+              <a:t>Review comment</a:t>
+            </a:r>
+            <a:endParaRPr lang="zh-CN" altLang="en-US" sz="1200" dirty="0"/>
+          </a:p>
+        </p:txBody>
+      </p:sp>
+      <p:sp>
+        <p:nvSpPr>
+          <p:cNvPr id="35" name="文本框 34">
+            <a:extLst>
+              <a:ext uri="{FF2B5EF4-FFF2-40B4-BE49-F238E27FC236}">
+                <a16:creationId xmlns:a16="http://schemas.microsoft.com/office/drawing/2014/main" id="{CD619BE6-6B4E-2733-FA81-97FF76E02BA6}"/>
+              </a:ext>
+            </a:extLst>
+          </p:cNvPr>
+          <p:cNvSpPr txBox="1"/>
+          <p:nvPr/>
+        </p:nvSpPr>
+        <p:spPr>
+          <a:xfrm>
+            <a:off x="161060" y="5768831"/>
+            <a:ext cx="1833995" cy="646331"/>
+          </a:xfrm>
+          <a:prstGeom prst="rect">
+            <a:avLst/>
+          </a:prstGeom>
+          <a:noFill/>
+        </p:spPr>
+        <p:txBody>
+          <a:bodyPr wrap="square">
+            <a:spAutoFit/>
+          </a:bodyPr>
+          <a:lstStyle/>
+          <a:p>
+            <a:r>
+              <a:rPr lang="en-US" altLang="zh-CN" dirty="0"/>
+              <a:t>commit1</a:t>
+            </a:r>
+          </a:p>
+          <a:p>
+            <a:r>
+              <a:rPr lang="en-US" altLang="zh-CN" dirty="0"/>
+              <a:t>originalCommit1</a:t>
+            </a:r>
+          </a:p>
+        </p:txBody>
+      </p:sp>
+      <p:sp>
+        <p:nvSpPr>
+          <p:cNvPr id="36" name="文本框 35">
+            <a:extLst>
+              <a:ext uri="{FF2B5EF4-FFF2-40B4-BE49-F238E27FC236}">
+                <a16:creationId xmlns:a16="http://schemas.microsoft.com/office/drawing/2014/main" id="{55E6CFA2-F141-1216-C616-9DED503E199D}"/>
+              </a:ext>
+            </a:extLst>
+          </p:cNvPr>
+          <p:cNvSpPr txBox="1"/>
+          <p:nvPr/>
+        </p:nvSpPr>
+        <p:spPr>
+          <a:xfrm>
+            <a:off x="1995055" y="5729140"/>
+            <a:ext cx="1833995" cy="646331"/>
+          </a:xfrm>
+          <a:prstGeom prst="rect">
+            <a:avLst/>
+          </a:prstGeom>
+          <a:noFill/>
+        </p:spPr>
+        <p:txBody>
+          <a:bodyPr wrap="square">
+            <a:spAutoFit/>
+          </a:bodyPr>
+          <a:lstStyle/>
+          <a:p>
+            <a:r>
+              <a:rPr lang="en-US" altLang="zh-CN" dirty="0"/>
+              <a:t>commit2</a:t>
+            </a:r>
+          </a:p>
+          <a:p>
+            <a:r>
+              <a:rPr lang="en-US" altLang="zh-CN" dirty="0"/>
+              <a:t>originalCommit1</a:t>
+            </a:r>
+          </a:p>
+        </p:txBody>
+      </p:sp>
+    </p:spTree>
+    <p:extLst>
+      <p:ext uri="{BB962C8B-B14F-4D97-AF65-F5344CB8AC3E}">
+        <p14:creationId xmlns:p14="http://schemas.microsoft.com/office/powerpoint/2010/main" val="663669188"/>
+      </p:ext>
+    </p:extLst>
+  </p:cSld>
+  <p:clrMapOvr>
+    <a:masterClrMapping/>
+  </p:clrMapOvr>
+</p:sld>
+</file>
+
+<file path=ppt/slides/slide17.xml><?xml version="1.0" encoding="utf-8"?>
+<p:sld xmlns:a="http://schemas.openxmlformats.org/drawingml/2006/main" xmlns:r="http://schemas.openxmlformats.org/officeDocument/2006/relationships" xmlns:p="http://schemas.openxmlformats.org/presentationml/2006/main">
+  <p:cSld>
+    <p:spTree>
+      <p:nvGrpSpPr>
+        <p:cNvPr id="1" name=""/>
+        <p:cNvGrpSpPr/>
+        <p:nvPr/>
+      </p:nvGrpSpPr>
+      <p:grpSpPr>
+        <a:xfrm>
+          <a:off x="0" y="0"/>
+          <a:ext cx="0" cy="0"/>
+          <a:chOff x="0" y="0"/>
+          <a:chExt cx="0" cy="0"/>
+        </a:xfrm>
+      </p:grpSpPr>
+      <p:sp>
+        <p:nvSpPr>
+          <p:cNvPr id="3" name="内容占位符 2">
+            <a:extLst>
+              <a:ext uri="{FF2B5EF4-FFF2-40B4-BE49-F238E27FC236}">
+                <a16:creationId xmlns:a16="http://schemas.microsoft.com/office/drawing/2014/main" id="{77BF2858-2578-C2AD-1ABD-0237E5FAE1A9}"/>
+              </a:ext>
+            </a:extLst>
+          </p:cNvPr>
+          <p:cNvSpPr>
+            <a:spLocks noGrp="1"/>
+          </p:cNvSpPr>
+          <p:nvPr>
+            <p:ph idx="1"/>
+          </p:nvPr>
+        </p:nvSpPr>
+        <p:spPr>
+          <a:xfrm>
+            <a:off x="495300" y="755361"/>
+            <a:ext cx="10515600" cy="2293363"/>
+          </a:xfrm>
+        </p:spPr>
+        <p:txBody>
+          <a:bodyPr>
+            <a:normAutofit fontScale="92500" lnSpcReduction="20000"/>
+          </a:bodyPr>
+          <a:lstStyle/>
+          <a:p>
+            <a:pPr marL="0" indent="0">
+              <a:buNone/>
+            </a:pPr>
+            <a:r>
+              <a:rPr lang="en-US" altLang="zh-CN" sz="2000" dirty="0"/>
+              <a:t>2.</a:t>
+            </a:r>
+          </a:p>
+          <a:p>
+            <a:pPr marL="0" indent="0">
+              <a:buNone/>
+            </a:pPr>
+            <a:r>
+              <a:rPr lang="en-US" altLang="zh-CN" sz="2000" dirty="0" err="1"/>
+              <a:t>graphql</a:t>
+            </a:r>
+            <a:r>
+              <a:rPr lang="zh-CN" altLang="en-US" sz="2000" dirty="0"/>
+              <a:t>请求得到的</a:t>
+            </a:r>
+            <a:r>
+              <a:rPr lang="en-US" altLang="zh-CN" sz="2000" dirty="0" err="1"/>
+              <a:t>reviewThread</a:t>
+            </a:r>
+            <a:r>
+              <a:rPr lang="zh-CN" altLang="en-US" sz="2000" dirty="0"/>
+              <a:t>里的</a:t>
+            </a:r>
+            <a:r>
+              <a:rPr lang="en-US" altLang="zh-CN" sz="2000" dirty="0"/>
+              <a:t>review comment</a:t>
+            </a:r>
+            <a:r>
+              <a:rPr lang="zh-CN" altLang="en-US" sz="2000" dirty="0"/>
+              <a:t>对应的</a:t>
+            </a:r>
+            <a:r>
+              <a:rPr lang="en-US" altLang="zh-CN" sz="2000" dirty="0" err="1"/>
+              <a:t>diffHunk</a:t>
+            </a:r>
+            <a:r>
+              <a:rPr lang="zh-CN" altLang="en-US" sz="2000" dirty="0"/>
+              <a:t>是截断的</a:t>
+            </a:r>
+            <a:endParaRPr lang="en-US" altLang="zh-CN" sz="2000" dirty="0"/>
+          </a:p>
+          <a:p>
+            <a:pPr marL="0" indent="0">
+              <a:buNone/>
+            </a:pPr>
+            <a:endParaRPr lang="en-US" altLang="zh-CN" sz="2000" dirty="0"/>
+          </a:p>
+          <a:p>
+            <a:pPr marL="0" indent="0">
+              <a:buNone/>
+            </a:pPr>
+            <a:r>
+              <a:rPr lang="zh-CN" altLang="en-US" sz="2000" dirty="0"/>
+              <a:t>对于该</a:t>
+            </a:r>
+            <a:r>
+              <a:rPr lang="en-US" altLang="zh-CN" sz="2000" dirty="0"/>
+              <a:t>review comment</a:t>
+            </a:r>
+            <a:r>
+              <a:rPr lang="zh-CN" altLang="en-US" sz="2000" dirty="0"/>
+              <a:t>的</a:t>
+            </a:r>
+            <a:r>
+              <a:rPr lang="en-US" altLang="zh-CN" sz="2000" dirty="0" err="1"/>
+              <a:t>originalCommit</a:t>
+            </a:r>
+            <a:r>
+              <a:rPr lang="zh-CN" altLang="en-US" sz="2000" dirty="0"/>
+              <a:t>，获取其父</a:t>
+            </a:r>
+            <a:r>
+              <a:rPr lang="en-US" altLang="zh-CN" sz="2000" dirty="0"/>
+              <a:t>commit</a:t>
+            </a:r>
+            <a:r>
+              <a:rPr lang="zh-CN" altLang="en-US" sz="2000" dirty="0"/>
+              <a:t>，从而得到一整个</a:t>
+            </a:r>
+            <a:r>
+              <a:rPr lang="en-US" altLang="zh-CN" sz="2000" dirty="0"/>
+              <a:t>diff</a:t>
+            </a:r>
+            <a:r>
+              <a:rPr lang="zh-CN" altLang="en-US" sz="2000" dirty="0"/>
+              <a:t>文件。将</a:t>
+            </a:r>
+            <a:r>
+              <a:rPr lang="en-US" altLang="zh-CN" sz="2000" dirty="0" err="1"/>
+              <a:t>diffHunk</a:t>
+            </a:r>
+            <a:r>
+              <a:rPr lang="zh-CN" altLang="en-US" sz="2000" dirty="0"/>
+              <a:t>在这个文件中搜索，并拓展以</a:t>
+            </a:r>
+            <a:r>
+              <a:rPr lang="en-US" altLang="zh-CN" sz="2000" dirty="0"/>
+              <a:t>’-’’+’</a:t>
+            </a:r>
+            <a:r>
+              <a:rPr lang="zh-CN" altLang="en-US" sz="2000" dirty="0"/>
+              <a:t>开头的行</a:t>
+            </a:r>
+            <a:endParaRPr lang="en-US" altLang="zh-CN" sz="2000" dirty="0"/>
+          </a:p>
+          <a:p>
+            <a:pPr marL="0" indent="0">
+              <a:buNone/>
+            </a:pPr>
+            <a:endParaRPr lang="en-US" altLang="zh-CN" sz="2000" dirty="0"/>
+          </a:p>
+          <a:p>
+            <a:pPr marL="0" indent="0">
+              <a:buNone/>
+            </a:pPr>
+            <a:r>
+              <a:rPr lang="zh-CN" altLang="en-US" sz="2000" dirty="0"/>
+              <a:t>但是可能会因为没有父</a:t>
+            </a:r>
+            <a:r>
+              <a:rPr lang="en-US" altLang="zh-CN" sz="2000" dirty="0"/>
+              <a:t>commit</a:t>
+            </a:r>
+            <a:r>
+              <a:rPr lang="zh-CN" altLang="en-US" sz="2000" dirty="0"/>
+              <a:t>导致无法拓展。</a:t>
+            </a:r>
+            <a:endParaRPr lang="en-US" altLang="zh-CN" sz="2000" dirty="0"/>
+          </a:p>
+          <a:p>
+            <a:pPr marL="0" indent="0">
+              <a:buNone/>
+            </a:pPr>
+            <a:endParaRPr lang="en-US" altLang="zh-CN" sz="2000" dirty="0"/>
+          </a:p>
+          <a:p>
+            <a:pPr marL="0" indent="0">
+              <a:buNone/>
+            </a:pPr>
+            <a:endParaRPr lang="zh-CN" altLang="en-US" sz="2000" dirty="0"/>
+          </a:p>
+        </p:txBody>
+      </p:sp>
+      <p:sp>
+        <p:nvSpPr>
+          <p:cNvPr id="4" name="文本框 3">
+            <a:extLst>
+              <a:ext uri="{FF2B5EF4-FFF2-40B4-BE49-F238E27FC236}">
+                <a16:creationId xmlns:a16="http://schemas.microsoft.com/office/drawing/2014/main" id="{9C36C799-FF61-132D-F6DF-31F38DC0D762}"/>
+              </a:ext>
+            </a:extLst>
+          </p:cNvPr>
+          <p:cNvSpPr txBox="1"/>
+          <p:nvPr/>
+        </p:nvSpPr>
+        <p:spPr>
+          <a:xfrm>
+            <a:off x="5166879" y="3048724"/>
+            <a:ext cx="6094268" cy="3586879"/>
+          </a:xfrm>
+          <a:prstGeom prst="rect">
+            <a:avLst/>
+          </a:prstGeom>
+          <a:noFill/>
+        </p:spPr>
+        <p:txBody>
+          <a:bodyPr wrap="square">
+            <a:spAutoFit/>
+          </a:bodyPr>
+          <a:lstStyle/>
+          <a:p>
+            <a:pPr>
+              <a:lnSpc>
+                <a:spcPts val="1650"/>
+              </a:lnSpc>
+              <a:buNone/>
+            </a:pPr>
+            <a:r>
+              <a:rPr lang="en-US" altLang="zh-CN" b="0" dirty="0">
+                <a:solidFill>
+                  <a:srgbClr val="D1D3DB"/>
+                </a:solidFill>
+                <a:effectLst/>
+                <a:latin typeface="JetBrains Mono"/>
+              </a:rPr>
+              <a:t>    </a:t>
+            </a:r>
+            <a:r>
+              <a:rPr lang="en-US" altLang="zh-CN" b="0" dirty="0">
+                <a:solidFill>
+                  <a:srgbClr val="00B0F0"/>
+                </a:solidFill>
+                <a:effectLst/>
+                <a:latin typeface="JetBrains Mono"/>
+              </a:rPr>
+              <a:t>"comments": [</a:t>
+            </a:r>
+          </a:p>
+          <a:p>
+            <a:pPr>
+              <a:lnSpc>
+                <a:spcPts val="1650"/>
+              </a:lnSpc>
+              <a:buNone/>
+            </a:pPr>
+            <a:r>
+              <a:rPr lang="en-US" altLang="zh-CN" b="0" dirty="0">
+                <a:solidFill>
+                  <a:srgbClr val="00B0F0"/>
+                </a:solidFill>
+                <a:effectLst/>
+                <a:latin typeface="JetBrains Mono"/>
+              </a:rPr>
+              <a:t>      {</a:t>
+            </a:r>
+          </a:p>
+          <a:p>
+            <a:pPr>
+              <a:lnSpc>
+                <a:spcPts val="1650"/>
+              </a:lnSpc>
+              <a:buNone/>
+            </a:pPr>
+            <a:r>
+              <a:rPr lang="en-US" altLang="zh-CN" b="0" dirty="0">
+                <a:solidFill>
+                  <a:srgbClr val="00B0F0"/>
+                </a:solidFill>
+                <a:effectLst/>
+                <a:latin typeface="JetBrains Mono"/>
+              </a:rPr>
+              <a:t>        "</a:t>
+            </a:r>
+            <a:r>
+              <a:rPr lang="en-US" altLang="zh-CN" b="0" dirty="0" err="1">
+                <a:solidFill>
+                  <a:srgbClr val="00B0F0"/>
+                </a:solidFill>
+                <a:effectLst/>
+                <a:latin typeface="JetBrains Mono"/>
+              </a:rPr>
+              <a:t>comment_id</a:t>
+            </a:r>
+            <a:r>
+              <a:rPr lang="en-US" altLang="zh-CN" b="0" dirty="0">
+                <a:solidFill>
+                  <a:srgbClr val="00B0F0"/>
+                </a:solidFill>
+                <a:effectLst/>
+                <a:latin typeface="JetBrains Mono"/>
+              </a:rPr>
+              <a:t>": "MDI0OlB1bGxSZXF1ZXN0UmV2aWV3Q29tbWVudDEwMTg1MjcwMg==",</a:t>
+            </a:r>
+          </a:p>
+          <a:p>
+            <a:pPr>
+              <a:lnSpc>
+                <a:spcPts val="1650"/>
+              </a:lnSpc>
+              <a:buNone/>
+            </a:pPr>
+            <a:r>
+              <a:rPr lang="en-US" altLang="zh-CN" b="0" dirty="0">
+                <a:solidFill>
+                  <a:srgbClr val="00B0F0"/>
+                </a:solidFill>
+                <a:effectLst/>
+                <a:latin typeface="JetBrains Mono"/>
+              </a:rPr>
+              <a:t>        "text": "How about this:\</a:t>
+            </a:r>
+            <a:r>
+              <a:rPr lang="en-US" altLang="zh-CN" b="0" dirty="0" err="1">
+                <a:solidFill>
+                  <a:srgbClr val="00B0F0"/>
+                </a:solidFill>
+                <a:effectLst/>
+                <a:latin typeface="JetBrains Mono"/>
+              </a:rPr>
+              <a:t>nbuf.mul</a:t>
+            </a:r>
+            <a:r>
+              <a:rPr lang="en-US" altLang="zh-CN" b="0" dirty="0">
+                <a:solidFill>
+                  <a:srgbClr val="00B0F0"/>
+                </a:solidFill>
+                <a:effectLst/>
+                <a:latin typeface="JetBrains Mono"/>
+              </a:rPr>
+              <a:t>_(momentum).add_(1 - dampening, </a:t>
+            </a:r>
+            <a:r>
+              <a:rPr lang="en-US" altLang="zh-CN" b="0" dirty="0" err="1">
+                <a:solidFill>
+                  <a:srgbClr val="00B0F0"/>
+                </a:solidFill>
+                <a:effectLst/>
+                <a:latin typeface="JetBrains Mono"/>
+              </a:rPr>
+              <a:t>d_p</a:t>
+            </a:r>
+            <a:r>
+              <a:rPr lang="en-US" altLang="zh-CN" b="0" dirty="0">
+                <a:solidFill>
+                  <a:srgbClr val="00B0F0"/>
+                </a:solidFill>
+                <a:effectLst/>
+                <a:latin typeface="JetBrains Mono"/>
+              </a:rPr>
+              <a:t>)\</a:t>
+            </a:r>
+            <a:r>
+              <a:rPr lang="en-US" altLang="zh-CN" b="0" dirty="0" err="1">
+                <a:solidFill>
+                  <a:srgbClr val="00B0F0"/>
+                </a:solidFill>
+                <a:effectLst/>
+                <a:latin typeface="JetBrains Mono"/>
+              </a:rPr>
+              <a:t>nif</a:t>
+            </a:r>
+            <a:r>
+              <a:rPr lang="en-US" altLang="zh-CN" b="0" dirty="0">
+                <a:solidFill>
+                  <a:srgbClr val="00B0F0"/>
+                </a:solidFill>
+                <a:effectLst/>
+                <a:latin typeface="JetBrains Mono"/>
+              </a:rPr>
+              <a:t> </a:t>
+            </a:r>
+            <a:r>
+              <a:rPr lang="en-US" altLang="zh-CN" b="0" dirty="0" err="1">
+                <a:solidFill>
+                  <a:srgbClr val="00B0F0"/>
+                </a:solidFill>
+                <a:effectLst/>
+                <a:latin typeface="JetBrains Mono"/>
+              </a:rPr>
+              <a:t>nesterov</a:t>
+            </a:r>
+            <a:r>
+              <a:rPr lang="en-US" altLang="zh-CN" b="0" dirty="0">
+                <a:solidFill>
+                  <a:srgbClr val="00B0F0"/>
+                </a:solidFill>
+                <a:effectLst/>
+                <a:latin typeface="JetBrains Mono"/>
+              </a:rPr>
+              <a:t>:\n    </a:t>
+            </a:r>
+            <a:r>
+              <a:rPr lang="en-US" altLang="zh-CN" b="0" dirty="0" err="1">
+                <a:solidFill>
+                  <a:srgbClr val="00B0F0"/>
+                </a:solidFill>
+                <a:effectLst/>
+                <a:latin typeface="JetBrains Mono"/>
+              </a:rPr>
+              <a:t>d_p.add</a:t>
+            </a:r>
+            <a:r>
+              <a:rPr lang="en-US" altLang="zh-CN" b="0" dirty="0">
+                <a:solidFill>
+                  <a:srgbClr val="00B0F0"/>
+                </a:solidFill>
+                <a:effectLst/>
+                <a:latin typeface="JetBrains Mono"/>
+              </a:rPr>
+              <a:t>_(momentum, </a:t>
+            </a:r>
+            <a:r>
+              <a:rPr lang="en-US" altLang="zh-CN" b="0" dirty="0" err="1">
+                <a:solidFill>
+                  <a:srgbClr val="00B0F0"/>
+                </a:solidFill>
+                <a:effectLst/>
+                <a:latin typeface="JetBrains Mono"/>
+              </a:rPr>
+              <a:t>buf</a:t>
+            </a:r>
+            <a:r>
+              <a:rPr lang="en-US" altLang="zh-CN" b="0" dirty="0">
+                <a:solidFill>
+                  <a:srgbClr val="00B0F0"/>
+                </a:solidFill>
+                <a:effectLst/>
+                <a:latin typeface="JetBrains Mono"/>
+              </a:rPr>
+              <a:t>)\</a:t>
+            </a:r>
+            <a:r>
+              <a:rPr lang="en-US" altLang="zh-CN" b="0" dirty="0" err="1">
+                <a:solidFill>
+                  <a:srgbClr val="00B0F0"/>
+                </a:solidFill>
+                <a:effectLst/>
+                <a:latin typeface="JetBrains Mono"/>
+              </a:rPr>
+              <a:t>nelse</a:t>
+            </a:r>
+            <a:r>
+              <a:rPr lang="en-US" altLang="zh-CN" b="0" dirty="0">
+                <a:solidFill>
+                  <a:srgbClr val="00B0F0"/>
+                </a:solidFill>
+                <a:effectLst/>
+                <a:latin typeface="JetBrains Mono"/>
+              </a:rPr>
+              <a:t>:\n    </a:t>
+            </a:r>
+            <a:r>
+              <a:rPr lang="en-US" altLang="zh-CN" b="0" dirty="0" err="1">
+                <a:solidFill>
+                  <a:srgbClr val="00B0F0"/>
+                </a:solidFill>
+                <a:effectLst/>
+                <a:latin typeface="JetBrains Mono"/>
+              </a:rPr>
+              <a:t>d_p</a:t>
+            </a:r>
+            <a:r>
+              <a:rPr lang="en-US" altLang="zh-CN" b="0" dirty="0">
+                <a:solidFill>
+                  <a:srgbClr val="00B0F0"/>
+                </a:solidFill>
+                <a:effectLst/>
+                <a:latin typeface="JetBrains Mono"/>
+              </a:rPr>
+              <a:t> = </a:t>
+            </a:r>
+            <a:r>
+              <a:rPr lang="en-US" altLang="zh-CN" b="0" dirty="0" err="1">
+                <a:solidFill>
+                  <a:srgbClr val="00B0F0"/>
+                </a:solidFill>
+                <a:effectLst/>
+                <a:latin typeface="JetBrains Mono"/>
+              </a:rPr>
+              <a:t>buf</a:t>
+            </a:r>
+            <a:r>
+              <a:rPr lang="en-US" altLang="zh-CN" b="0" dirty="0">
+                <a:solidFill>
+                  <a:srgbClr val="00B0F0"/>
+                </a:solidFill>
+                <a:effectLst/>
+                <a:latin typeface="JetBrains Mono"/>
+              </a:rPr>
+              <a:t>"</a:t>
+            </a:r>
+          </a:p>
+          <a:p>
+            <a:pPr>
+              <a:lnSpc>
+                <a:spcPts val="1650"/>
+              </a:lnSpc>
+              <a:buNone/>
+            </a:pPr>
+            <a:r>
+              <a:rPr lang="en-US" altLang="zh-CN" b="0" dirty="0">
+                <a:solidFill>
+                  <a:srgbClr val="00B0F0"/>
+                </a:solidFill>
+                <a:effectLst/>
+                <a:latin typeface="JetBrains Mono"/>
+              </a:rPr>
+              <a:t>      },</a:t>
+            </a:r>
+          </a:p>
+          <a:p>
+            <a:pPr>
+              <a:lnSpc>
+                <a:spcPts val="1650"/>
+              </a:lnSpc>
+              <a:buNone/>
+            </a:pPr>
+            <a:r>
+              <a:rPr lang="en-US" altLang="zh-CN" b="0" dirty="0">
+                <a:solidFill>
+                  <a:srgbClr val="00B0F0"/>
+                </a:solidFill>
+                <a:effectLst/>
+                <a:latin typeface="JetBrains Mono"/>
+              </a:rPr>
+              <a:t>      {</a:t>
+            </a:r>
+          </a:p>
+          <a:p>
+            <a:pPr>
+              <a:lnSpc>
+                <a:spcPts val="1650"/>
+              </a:lnSpc>
+              <a:buNone/>
+            </a:pPr>
+            <a:r>
+              <a:rPr lang="en-US" altLang="zh-CN" b="0" dirty="0">
+                <a:solidFill>
+                  <a:srgbClr val="00B0F0"/>
+                </a:solidFill>
+                <a:effectLst/>
+                <a:latin typeface="JetBrains Mono"/>
+              </a:rPr>
+              <a:t>        "</a:t>
+            </a:r>
+            <a:r>
+              <a:rPr lang="en-US" altLang="zh-CN" b="0" dirty="0" err="1">
+                <a:solidFill>
+                  <a:srgbClr val="00B0F0"/>
+                </a:solidFill>
+                <a:effectLst/>
+                <a:latin typeface="JetBrains Mono"/>
+              </a:rPr>
+              <a:t>comment_id</a:t>
+            </a:r>
+            <a:r>
+              <a:rPr lang="en-US" altLang="zh-CN" b="0" dirty="0">
+                <a:solidFill>
+                  <a:srgbClr val="00B0F0"/>
+                </a:solidFill>
+                <a:effectLst/>
+                <a:latin typeface="JetBrains Mono"/>
+              </a:rPr>
+              <a:t>": "MDI0OlB1bGxSZXF1ZXN0UmV2aWV3Q29tbWVudDEwMTkwNTkzMg==",</a:t>
+            </a:r>
+          </a:p>
+          <a:p>
+            <a:pPr>
+              <a:lnSpc>
+                <a:spcPts val="1650"/>
+              </a:lnSpc>
+              <a:buNone/>
+            </a:pPr>
+            <a:r>
+              <a:rPr lang="en-US" altLang="zh-CN" b="0" dirty="0">
+                <a:solidFill>
+                  <a:srgbClr val="00B0F0"/>
+                </a:solidFill>
+                <a:effectLst/>
+                <a:latin typeface="JetBrains Mono"/>
+              </a:rPr>
+              <a:t>        "text": "Looks good, I'll change it to this."</a:t>
+            </a:r>
+          </a:p>
+          <a:p>
+            <a:pPr>
+              <a:lnSpc>
+                <a:spcPts val="1650"/>
+              </a:lnSpc>
+              <a:buNone/>
+            </a:pPr>
+            <a:r>
+              <a:rPr lang="en-US" altLang="zh-CN" b="0" dirty="0">
+                <a:solidFill>
+                  <a:srgbClr val="00B0F0"/>
+                </a:solidFill>
+                <a:effectLst/>
+                <a:latin typeface="JetBrains Mono"/>
+              </a:rPr>
+              <a:t>      }</a:t>
+            </a:r>
+          </a:p>
+          <a:p>
+            <a:pPr>
+              <a:lnSpc>
+                <a:spcPts val="1650"/>
+              </a:lnSpc>
+              <a:buNone/>
+            </a:pPr>
+            <a:r>
+              <a:rPr lang="en-US" altLang="zh-CN" b="0" dirty="0">
+                <a:solidFill>
+                  <a:srgbClr val="00B0F0"/>
+                </a:solidFill>
+                <a:effectLst/>
+                <a:latin typeface="JetBrains Mono"/>
+              </a:rPr>
+              <a:t>    ],</a:t>
+            </a:r>
+          </a:p>
+        </p:txBody>
+      </p:sp>
+      <p:sp>
+        <p:nvSpPr>
+          <p:cNvPr id="6" name="文本框 5">
+            <a:extLst>
+              <a:ext uri="{FF2B5EF4-FFF2-40B4-BE49-F238E27FC236}">
+                <a16:creationId xmlns:a16="http://schemas.microsoft.com/office/drawing/2014/main" id="{79431AB7-071B-C94E-D5D5-51D0B6154BBB}"/>
+              </a:ext>
+            </a:extLst>
+          </p:cNvPr>
+          <p:cNvSpPr txBox="1"/>
+          <p:nvPr/>
+        </p:nvSpPr>
+        <p:spPr>
+          <a:xfrm>
+            <a:off x="646835" y="3975252"/>
+            <a:ext cx="4361583" cy="2862322"/>
+          </a:xfrm>
+          <a:prstGeom prst="rect">
+            <a:avLst/>
+          </a:prstGeom>
+          <a:noFill/>
+        </p:spPr>
+        <p:txBody>
+          <a:bodyPr wrap="square">
+            <a:spAutoFit/>
+          </a:bodyPr>
+          <a:lstStyle/>
+          <a:p>
+            <a:pPr marL="0" indent="0">
+              <a:buNone/>
+            </a:pPr>
+            <a:r>
+              <a:rPr lang="en-US" altLang="zh-CN" sz="1800" dirty="0"/>
+              <a:t>3.</a:t>
+            </a:r>
+          </a:p>
+          <a:p>
+            <a:pPr marL="0" indent="0">
+              <a:buNone/>
+            </a:pPr>
+            <a:r>
+              <a:rPr lang="zh-CN" altLang="en-US" sz="1800" dirty="0"/>
+              <a:t>一个</a:t>
+            </a:r>
+            <a:r>
+              <a:rPr lang="en-US" altLang="zh-CN" sz="1800" dirty="0" err="1"/>
+              <a:t>diffHunk</a:t>
+            </a:r>
+            <a:r>
+              <a:rPr lang="zh-CN" altLang="en-US" sz="1800" dirty="0"/>
+              <a:t>可能有来自</a:t>
+            </a:r>
+            <a:r>
+              <a:rPr lang="en-US" altLang="zh-CN" sz="1800" dirty="0"/>
+              <a:t>developer</a:t>
+            </a:r>
+            <a:r>
+              <a:rPr lang="zh-CN" altLang="en-US" sz="1800" dirty="0"/>
+              <a:t>和</a:t>
+            </a:r>
+            <a:r>
+              <a:rPr lang="en-US" altLang="zh-CN" sz="1800" dirty="0"/>
+              <a:t>reviewer</a:t>
+            </a:r>
+            <a:r>
+              <a:rPr lang="zh-CN" altLang="en-US" sz="1800" dirty="0"/>
+              <a:t>的多轮</a:t>
+            </a:r>
+            <a:r>
+              <a:rPr lang="en-US" altLang="zh-CN" sz="1800" dirty="0"/>
+              <a:t>review comment</a:t>
+            </a:r>
+            <a:r>
+              <a:rPr lang="zh-CN" altLang="en-US" sz="1800" dirty="0"/>
+              <a:t>，这把那个作为最终的答案呢？</a:t>
+            </a:r>
+            <a:endParaRPr lang="en-US" altLang="zh-CN" sz="1800" dirty="0"/>
+          </a:p>
+          <a:p>
+            <a:pPr marL="0" indent="0">
+              <a:buNone/>
+            </a:pPr>
+            <a:r>
+              <a:rPr lang="zh-CN" altLang="en-US" sz="1800" dirty="0"/>
+              <a:t>目前是暂时先合并这个</a:t>
+            </a:r>
+            <a:r>
+              <a:rPr lang="en-US" altLang="zh-CN" sz="1800" dirty="0"/>
+              <a:t>review comment</a:t>
+            </a:r>
+            <a:r>
+              <a:rPr lang="zh-CN" altLang="en-US" sz="1800" dirty="0"/>
+              <a:t>，一起作为答案。</a:t>
+            </a:r>
+            <a:endParaRPr lang="en-US" altLang="zh-CN" sz="1800" dirty="0"/>
+          </a:p>
+          <a:p>
+            <a:pPr marL="0" indent="0">
+              <a:buNone/>
+            </a:pPr>
+            <a:endParaRPr lang="en-US" altLang="zh-CN" dirty="0"/>
+          </a:p>
+          <a:p>
+            <a:pPr marL="0" indent="0">
+              <a:buNone/>
+            </a:pPr>
+            <a:endParaRPr lang="en-US" altLang="zh-CN" sz="1800" dirty="0"/>
+          </a:p>
+          <a:p>
+            <a:pPr marL="0" indent="0">
+              <a:buNone/>
+            </a:pPr>
+            <a:r>
+              <a:rPr lang="zh-CN" altLang="en-US" dirty="0"/>
+              <a:t>多轮次是由于幻觉？</a:t>
+            </a:r>
+            <a:r>
+              <a:rPr lang="en-US" altLang="zh-CN" dirty="0"/>
+              <a:t>Agent</a:t>
+            </a:r>
+            <a:r>
+              <a:rPr lang="zh-CN" altLang="en-US" dirty="0"/>
+              <a:t>的多轮次就是为了减少这种幻觉？</a:t>
+            </a:r>
+            <a:endParaRPr lang="en-US" altLang="zh-CN" sz="1800" dirty="0"/>
+          </a:p>
+        </p:txBody>
+      </p:sp>
+    </p:spTree>
+    <p:extLst>
+      <p:ext uri="{BB962C8B-B14F-4D97-AF65-F5344CB8AC3E}">
+        <p14:creationId xmlns:p14="http://schemas.microsoft.com/office/powerpoint/2010/main" val="459677381"/>
+      </p:ext>
+    </p:extLst>
+  </p:cSld>
+  <p:clrMapOvr>
+    <a:masterClrMapping/>
+  </p:clrMapOvr>
+</p:sld>
+</file>
+
+<file path=ppt/slides/slide18.xml><?xml version="1.0" encoding="utf-8"?>
+<p:sld xmlns:a="http://schemas.openxmlformats.org/drawingml/2006/main" xmlns:r="http://schemas.openxmlformats.org/officeDocument/2006/relationships" xmlns:p="http://schemas.openxmlformats.org/presentationml/2006/main">
+  <p:cSld>
+    <p:spTree>
+      <p:nvGrpSpPr>
+        <p:cNvPr id="1" name=""/>
+        <p:cNvGrpSpPr/>
+        <p:nvPr/>
+      </p:nvGrpSpPr>
+      <p:grpSpPr>
+        <a:xfrm>
+          <a:off x="0" y="0"/>
+          <a:ext cx="0" cy="0"/>
+          <a:chOff x="0" y="0"/>
+          <a:chExt cx="0" cy="0"/>
+        </a:xfrm>
+      </p:grpSpPr>
+      <p:sp>
+        <p:nvSpPr>
+          <p:cNvPr id="11" name="矩形 10">
+            <a:extLst>
+              <a:ext uri="{FF2B5EF4-FFF2-40B4-BE49-F238E27FC236}">
+                <a16:creationId xmlns:a16="http://schemas.microsoft.com/office/drawing/2014/main" id="{538C845A-8C6D-7C02-4533-B0BEBA242C89}"/>
+              </a:ext>
+            </a:extLst>
+          </p:cNvPr>
+          <p:cNvSpPr/>
+          <p:nvPr/>
+        </p:nvSpPr>
+        <p:spPr>
+          <a:xfrm>
+            <a:off x="405245" y="4286458"/>
+            <a:ext cx="10349346" cy="2418350"/>
+          </a:xfrm>
+          <a:prstGeom prst="rect">
+            <a:avLst/>
+          </a:prstGeom>
+        </p:spPr>
+        <p:style>
+          <a:lnRef idx="1">
+            <a:schemeClr val="accent3"/>
+          </a:lnRef>
+          <a:fillRef idx="2">
+            <a:schemeClr val="accent3"/>
+          </a:fillRef>
+          <a:effectRef idx="1">
+            <a:schemeClr val="accent3"/>
+          </a:effectRef>
+          <a:fontRef idx="minor">
+            <a:schemeClr val="dk1"/>
+          </a:fontRef>
+        </p:style>
+        <p:txBody>
+          <a:bodyPr rtlCol="0" anchor="ctr"/>
+          <a:lstStyle/>
+          <a:p>
+            <a:pPr algn="ctr"/>
+            <a:endParaRPr lang="zh-CN" altLang="en-US"/>
+          </a:p>
+        </p:txBody>
+      </p:sp>
+      <p:sp>
+        <p:nvSpPr>
+          <p:cNvPr id="10" name="矩形 9">
+            <a:extLst>
+              <a:ext uri="{FF2B5EF4-FFF2-40B4-BE49-F238E27FC236}">
+                <a16:creationId xmlns:a16="http://schemas.microsoft.com/office/drawing/2014/main" id="{A54FA510-08B0-BE47-31EC-35A7A9660831}"/>
+              </a:ext>
+            </a:extLst>
+          </p:cNvPr>
+          <p:cNvSpPr/>
+          <p:nvPr/>
+        </p:nvSpPr>
+        <p:spPr>
+          <a:xfrm>
+            <a:off x="405245" y="1478755"/>
+            <a:ext cx="10349346" cy="2418350"/>
+          </a:xfrm>
+          <a:prstGeom prst="rect">
+            <a:avLst/>
+          </a:prstGeom>
+        </p:spPr>
+        <p:style>
+          <a:lnRef idx="1">
+            <a:schemeClr val="accent3"/>
+          </a:lnRef>
+          <a:fillRef idx="2">
+            <a:schemeClr val="accent3"/>
+          </a:fillRef>
+          <a:effectRef idx="1">
+            <a:schemeClr val="accent3"/>
+          </a:effectRef>
+          <a:fontRef idx="minor">
+            <a:schemeClr val="dk1"/>
+          </a:fontRef>
+        </p:style>
+        <p:txBody>
+          <a:bodyPr rtlCol="0" anchor="ctr"/>
+          <a:lstStyle/>
+          <a:p>
+            <a:pPr algn="ctr"/>
+            <a:endParaRPr lang="zh-CN" altLang="en-US"/>
+          </a:p>
+        </p:txBody>
+      </p:sp>
+      <p:sp>
+        <p:nvSpPr>
+          <p:cNvPr id="2" name="标题 1">
+            <a:extLst>
+              <a:ext uri="{FF2B5EF4-FFF2-40B4-BE49-F238E27FC236}">
+                <a16:creationId xmlns:a16="http://schemas.microsoft.com/office/drawing/2014/main" id="{6BAD5355-D61F-9A93-14B3-668F6D455CB3}"/>
+              </a:ext>
+            </a:extLst>
+          </p:cNvPr>
+          <p:cNvSpPr>
+            <a:spLocks noGrp="1"/>
+          </p:cNvSpPr>
+          <p:nvPr>
+            <p:ph type="title"/>
+          </p:nvPr>
+        </p:nvSpPr>
+        <p:spPr>
+          <a:xfrm>
+            <a:off x="838200" y="153192"/>
+            <a:ext cx="10515600" cy="1325563"/>
+          </a:xfrm>
+        </p:spPr>
+        <p:txBody>
+          <a:bodyPr/>
+          <a:lstStyle/>
+          <a:p>
+            <a:r>
+              <a:rPr lang="zh-CN" altLang="en-US" dirty="0"/>
+              <a:t>效果</a:t>
+            </a:r>
+            <a:r>
+              <a:rPr lang="en-US" altLang="zh-CN" dirty="0"/>
+              <a:t>Case</a:t>
+            </a:r>
+            <a:endParaRPr lang="zh-CN" altLang="en-US" dirty="0"/>
+          </a:p>
+        </p:txBody>
+      </p:sp>
+      <p:sp>
+        <p:nvSpPr>
+          <p:cNvPr id="3" name="内容占位符 2">
+            <a:extLst>
+              <a:ext uri="{FF2B5EF4-FFF2-40B4-BE49-F238E27FC236}">
+                <a16:creationId xmlns:a16="http://schemas.microsoft.com/office/drawing/2014/main" id="{55EF13BF-E005-FE06-71B6-6FEADBEEC5C4}"/>
+              </a:ext>
+            </a:extLst>
+          </p:cNvPr>
+          <p:cNvSpPr>
+            <a:spLocks noGrp="1"/>
+          </p:cNvSpPr>
+          <p:nvPr>
+            <p:ph idx="1"/>
+          </p:nvPr>
+        </p:nvSpPr>
+        <p:spPr>
+          <a:xfrm>
+            <a:off x="838200" y="1122218"/>
+            <a:ext cx="10515600" cy="5054745"/>
+          </a:xfrm>
+        </p:spPr>
+        <p:txBody>
+          <a:bodyPr>
+            <a:normAutofit/>
+          </a:bodyPr>
+          <a:lstStyle/>
+          <a:p>
+            <a:pPr marL="0" indent="0">
+              <a:buNone/>
+            </a:pPr>
+            <a:r>
+              <a:rPr lang="zh-CN" altLang="en-US" sz="1800" dirty="0"/>
+              <a:t>目前经过处理的</a:t>
+            </a:r>
+            <a:r>
+              <a:rPr lang="en-US" altLang="zh-CN" sz="1800" dirty="0"/>
+              <a:t>95</a:t>
+            </a:r>
+            <a:r>
+              <a:rPr lang="zh-CN" altLang="en-US" sz="1800" dirty="0"/>
+              <a:t>条数据质量依旧堪忧，看了</a:t>
+            </a:r>
+            <a:r>
+              <a:rPr lang="en-US" altLang="zh-CN" sz="1800" dirty="0"/>
+              <a:t>7</a:t>
+            </a:r>
+            <a:r>
+              <a:rPr lang="zh-CN" altLang="en-US" sz="1800" dirty="0"/>
+              <a:t>、</a:t>
+            </a:r>
+            <a:r>
+              <a:rPr lang="en-US" altLang="zh-CN" sz="1800" dirty="0"/>
+              <a:t>8</a:t>
+            </a:r>
+            <a:r>
+              <a:rPr lang="zh-CN" altLang="en-US" sz="1800" dirty="0"/>
+              <a:t>个数据后才发现一条正常数据，但是解决的问题比较</a:t>
+            </a:r>
+            <a:r>
+              <a:rPr lang="en-US" altLang="zh-CN" sz="1800" dirty="0"/>
+              <a:t>easy</a:t>
+            </a:r>
+            <a:endParaRPr lang="zh-CN" altLang="en-US" sz="1800" dirty="0"/>
+          </a:p>
+        </p:txBody>
+      </p:sp>
+      <p:sp>
+        <p:nvSpPr>
+          <p:cNvPr id="5" name="文本框 4">
+            <a:extLst>
+              <a:ext uri="{FF2B5EF4-FFF2-40B4-BE49-F238E27FC236}">
+                <a16:creationId xmlns:a16="http://schemas.microsoft.com/office/drawing/2014/main" id="{5C62C25E-3F43-1A7A-7B57-7104540A9097}"/>
+              </a:ext>
+            </a:extLst>
+          </p:cNvPr>
+          <p:cNvSpPr txBox="1"/>
+          <p:nvPr/>
+        </p:nvSpPr>
+        <p:spPr>
+          <a:xfrm>
+            <a:off x="678007" y="1556371"/>
+            <a:ext cx="9557038" cy="2308324"/>
+          </a:xfrm>
+          <a:prstGeom prst="rect">
+            <a:avLst/>
+          </a:prstGeom>
+          <a:noFill/>
+        </p:spPr>
+        <p:txBody>
+          <a:bodyPr wrap="square">
+            <a:spAutoFit/>
+          </a:bodyPr>
+          <a:lstStyle/>
+          <a:p>
+            <a:r>
+              <a:rPr lang="zh-CN" altLang="en-US" dirty="0"/>
+              <a:t>@@ -1151,17 +1152,21 @@ </a:t>
+            </a:r>
+            <a:r>
+              <a:rPr lang="zh-CN" altLang="en-US" dirty="0">
+                <a:solidFill>
+                  <a:srgbClr val="00B050"/>
+                </a:solidFill>
+              </a:rPr>
+              <a:t>def compare_cpu_gpu(outputs_cpu, outputs_gpu):</a:t>
+            </a:r>
+          </a:p>
+          <a:p>
+            <a:r>
+              <a:rPr lang="zh-CN" altLang="en-US" dirty="0"/>
+              <a:t>             # check grad weights separately, as nested dict</a:t>
+            </a:r>
+          </a:p>
+          <a:p>
+            <a:r>
+              <a:rPr lang="zh-CN" altLang="en-US" dirty="0"/>
+              <a:t>             for cpu_layer_weight, gpu_layer_weight in zip(outputs_cpu['weights'], outputs_gpu['weights']):</a:t>
+            </a:r>
+          </a:p>
+          <a:p>
+            <a:r>
+              <a:rPr lang="zh-CN" altLang="en-US" dirty="0"/>
+              <a:t>                 for (cpu_weight, gpu_weight) in zip(cpu_layer_weight, gpu_layer_weight):</a:t>
+            </a:r>
+          </a:p>
+          <a:p>
+            <a:r>
+              <a:rPr lang="zh-CN" altLang="en-US" dirty="0">
+                <a:solidFill>
+                  <a:srgbClr val="FF0000"/>
+                </a:solidFill>
+              </a:rPr>
+              <a:t>-                    self.assertEqual(cpu_weight.grad.data, gpu_weight.grad.data, prec=5e-5)</a:t>
+            </a:r>
+          </a:p>
+          <a:p>
+            <a:r>
+              <a:rPr lang="zh-CN" altLang="en-US" dirty="0">
+                <a:solidFill>
+                  <a:srgbClr val="FF0000"/>
+                </a:solidFill>
+              </a:rPr>
+              <a:t>+                    if cpu_weight is not None and gpu_weight is not None:</a:t>
+            </a:r>
+          </a:p>
+          <a:p>
+            <a:r>
+              <a:rPr lang="zh-CN" altLang="en-US" dirty="0">
+                <a:solidFill>
+                  <a:srgbClr val="FF0000"/>
+                </a:solidFill>
+              </a:rPr>
+              <a:t>+                        self.assertEqual(cpu_weight.grad.data, gpu_weight.grad.data, prec=5e-5) </a:t>
+            </a:r>
+          </a:p>
+        </p:txBody>
+      </p:sp>
+      <p:sp>
+        <p:nvSpPr>
+          <p:cNvPr id="7" name="文本框 6">
+            <a:extLst>
+              <a:ext uri="{FF2B5EF4-FFF2-40B4-BE49-F238E27FC236}">
+                <a16:creationId xmlns:a16="http://schemas.microsoft.com/office/drawing/2014/main" id="{023E37F4-6C5E-37F8-B533-35AD88BB4EAE}"/>
+              </a:ext>
+            </a:extLst>
+          </p:cNvPr>
+          <p:cNvSpPr txBox="1"/>
+          <p:nvPr/>
+        </p:nvSpPr>
+        <p:spPr>
+          <a:xfrm>
+            <a:off x="2111953" y="3897105"/>
+            <a:ext cx="6094268" cy="369332"/>
+          </a:xfrm>
+          <a:prstGeom prst="rect">
+            <a:avLst/>
+          </a:prstGeom>
+          <a:noFill/>
+        </p:spPr>
+        <p:txBody>
+          <a:bodyPr wrap="square">
+            <a:spAutoFit/>
+          </a:bodyPr>
+          <a:lstStyle/>
+          <a:p>
+            <a:r>
+              <a:rPr lang="zh-CN" altLang="en-US" dirty="0">
+                <a:solidFill>
+                  <a:srgbClr val="0070C0"/>
+                </a:solidFill>
+              </a:rPr>
+              <a:t> Else, can you please assert that they're both Nones? </a:t>
+            </a:r>
+          </a:p>
+        </p:txBody>
+      </p:sp>
+      <p:sp>
+        <p:nvSpPr>
+          <p:cNvPr id="9" name="文本框 8">
+            <a:extLst>
+              <a:ext uri="{FF2B5EF4-FFF2-40B4-BE49-F238E27FC236}">
+                <a16:creationId xmlns:a16="http://schemas.microsoft.com/office/drawing/2014/main" id="{748C959F-C03D-7343-7A25-2B89E8A7BA5F}"/>
+              </a:ext>
+            </a:extLst>
+          </p:cNvPr>
+          <p:cNvSpPr txBox="1"/>
+          <p:nvPr/>
+        </p:nvSpPr>
+        <p:spPr>
+          <a:xfrm>
+            <a:off x="955963" y="4302792"/>
+            <a:ext cx="9798628" cy="2308324"/>
+          </a:xfrm>
+          <a:prstGeom prst="rect">
+            <a:avLst/>
+          </a:prstGeom>
+          <a:noFill/>
+        </p:spPr>
+        <p:txBody>
+          <a:bodyPr wrap="square">
+            <a:spAutoFit/>
+          </a:bodyPr>
+          <a:lstStyle/>
+          <a:p>
+            <a:r>
+              <a:rPr lang="zh-CN" altLang="en-US" dirty="0">
+                <a:solidFill>
+                  <a:srgbClr val="00B050"/>
+                </a:solidFill>
+              </a:rPr>
+              <a:t>def compare_cpu_gpu(outputs_cpu, outputs_gpu):</a:t>
+            </a:r>
+          </a:p>
+          <a:p>
+            <a:r>
+              <a:rPr lang="en-US" altLang="zh-CN" dirty="0"/>
+              <a:t>	……</a:t>
+            </a:r>
+          </a:p>
+          <a:p>
+            <a:r>
+              <a:rPr lang="en-US" altLang="zh-CN" dirty="0"/>
+              <a:t>	</a:t>
+            </a:r>
+            <a:r>
+              <a:rPr lang="zh-CN" altLang="en-US" dirty="0"/>
+              <a:t>for (cpu_weight, gpu_weight) in zip(cpu_layer_weight, gpu_layer_weight):</a:t>
+            </a:r>
+          </a:p>
+          <a:p>
+            <a:r>
+              <a:rPr lang="zh-CN" altLang="en-US" dirty="0"/>
+              <a:t>                    if cpu_weight is not None and gpu_weight is not None:</a:t>
+            </a:r>
+          </a:p>
+          <a:p>
+            <a:r>
+              <a:rPr lang="zh-CN" altLang="en-US" dirty="0"/>
+              <a:t>                        self.assertEqual(cpu_weight.grad.data, gpu_weight.grad.data, prec=5e-5)</a:t>
+            </a:r>
+          </a:p>
+          <a:p>
+            <a:r>
+              <a:rPr lang="zh-CN" altLang="en-US" dirty="0">
+                <a:solidFill>
+                  <a:srgbClr val="FF0000"/>
+                </a:solidFill>
+              </a:rPr>
+              <a:t>                    else:</a:t>
+            </a:r>
+          </a:p>
+          <a:p>
+            <a:r>
+              <a:rPr lang="zh-CN" altLang="en-US" dirty="0">
+                <a:solidFill>
+                  <a:srgbClr val="FF0000"/>
+                </a:solidFill>
+              </a:rPr>
+              <a:t>                        self.assertTrue(cpu_weight is None)</a:t>
+            </a:r>
+          </a:p>
+          <a:p>
+            <a:r>
+              <a:rPr lang="zh-CN" altLang="en-US" dirty="0">
+                <a:solidFill>
+                  <a:srgbClr val="FF0000"/>
+                </a:solidFill>
+              </a:rPr>
+              <a:t>                        self.assertTrue(gpu_weight is None)</a:t>
+            </a:r>
+          </a:p>
+        </p:txBody>
+      </p:sp>
+      <p:sp>
+        <p:nvSpPr>
+          <p:cNvPr id="4" name="文本框 3">
+            <a:extLst>
+              <a:ext uri="{FF2B5EF4-FFF2-40B4-BE49-F238E27FC236}">
+                <a16:creationId xmlns:a16="http://schemas.microsoft.com/office/drawing/2014/main" id="{883D113E-B5E4-78E9-B02F-FD4B96579963}"/>
+              </a:ext>
+            </a:extLst>
+          </p:cNvPr>
+          <p:cNvSpPr txBox="1"/>
+          <p:nvPr/>
+        </p:nvSpPr>
+        <p:spPr>
+          <a:xfrm>
+            <a:off x="10304190" y="1729870"/>
+            <a:ext cx="1887810" cy="958059"/>
+          </a:xfrm>
+          <a:prstGeom prst="rect">
+            <a:avLst/>
+          </a:prstGeom>
+          <a:noFill/>
+        </p:spPr>
+        <p:txBody>
+          <a:bodyPr wrap="square" rtlCol="0">
+            <a:spAutoFit/>
+          </a:bodyPr>
+          <a:lstStyle/>
+          <a:p>
+            <a:r>
+              <a:rPr lang="zh-CN" altLang="en-US" dirty="0"/>
+              <a:t>问题，</a:t>
+            </a:r>
+            <a:r>
+              <a:rPr lang="en-US" altLang="zh-CN" dirty="0" err="1"/>
+              <a:t>cpu</a:t>
+            </a:r>
+            <a:r>
+              <a:rPr lang="zh-CN" altLang="en-US" dirty="0"/>
+              <a:t>和</a:t>
+            </a:r>
+            <a:r>
+              <a:rPr lang="en-US" altLang="zh-CN" dirty="0" err="1"/>
+              <a:t>gpu</a:t>
+            </a:r>
+            <a:r>
+              <a:rPr lang="en-US" altLang="zh-CN" dirty="0"/>
+              <a:t> weight</a:t>
+            </a:r>
+            <a:r>
+              <a:rPr lang="zh-CN" altLang="en-US" dirty="0"/>
+              <a:t>不能只有一个为</a:t>
+            </a:r>
+            <a:r>
+              <a:rPr lang="en-US" altLang="zh-CN" dirty="0"/>
+              <a:t>None</a:t>
+            </a:r>
+            <a:endParaRPr lang="zh-CN" altLang="en-US" dirty="0"/>
+          </a:p>
+        </p:txBody>
+      </p:sp>
+    </p:spTree>
+    <p:extLst>
+      <p:ext uri="{BB962C8B-B14F-4D97-AF65-F5344CB8AC3E}">
+        <p14:creationId xmlns:p14="http://schemas.microsoft.com/office/powerpoint/2010/main" val="256591762"/>
+      </p:ext>
+    </p:extLst>
+  </p:cSld>
+  <p:clrMapOvr>
+    <a:masterClrMapping/>
+  </p:clrMapOvr>
+</p:sld>
+</file>
+
+<file path=ppt/slides/slide19.xml><?xml version="1.0" encoding="utf-8"?>
+<p:sld xmlns:a="http://schemas.openxmlformats.org/drawingml/2006/main" xmlns:r="http://schemas.openxmlformats.org/officeDocument/2006/relationships" xmlns:p="http://schemas.openxmlformats.org/presentationml/2006/main">
+  <p:cSld>
+    <p:spTree>
+      <p:nvGrpSpPr>
+        <p:cNvPr id="1" name=""/>
+        <p:cNvGrpSpPr/>
+        <p:nvPr/>
+      </p:nvGrpSpPr>
+      <p:grpSpPr>
+        <a:xfrm>
+          <a:off x="0" y="0"/>
+          <a:ext cx="0" cy="0"/>
+          <a:chOff x="0" y="0"/>
+          <a:chExt cx="0" cy="0"/>
+        </a:xfrm>
+      </p:grpSpPr>
+      <p:sp>
+        <p:nvSpPr>
+          <p:cNvPr id="2" name="标题 1">
+            <a:extLst>
+              <a:ext uri="{FF2B5EF4-FFF2-40B4-BE49-F238E27FC236}">
+                <a16:creationId xmlns:a16="http://schemas.microsoft.com/office/drawing/2014/main" id="{F8A49633-9212-79CE-002C-FFFBD89EDB21}"/>
+              </a:ext>
+            </a:extLst>
+          </p:cNvPr>
+          <p:cNvSpPr>
+            <a:spLocks noGrp="1"/>
+          </p:cNvSpPr>
+          <p:nvPr>
+            <p:ph type="title"/>
+          </p:nvPr>
+        </p:nvSpPr>
+        <p:spPr/>
+        <p:txBody>
+          <a:bodyPr/>
+          <a:lstStyle/>
+          <a:p>
+            <a:r>
+              <a:rPr lang="en-US" altLang="zh-CN" dirty="0"/>
+              <a:t>Case</a:t>
+            </a:r>
+            <a:endParaRPr lang="zh-CN" altLang="en-US" dirty="0"/>
+          </a:p>
+        </p:txBody>
+      </p:sp>
+      <p:sp>
+        <p:nvSpPr>
+          <p:cNvPr id="5" name="文本框 4">
+            <a:extLst>
+              <a:ext uri="{FF2B5EF4-FFF2-40B4-BE49-F238E27FC236}">
+                <a16:creationId xmlns:a16="http://schemas.microsoft.com/office/drawing/2014/main" id="{CFF4D4F1-6919-B7DD-AC8E-4B2E236DCC2B}"/>
+              </a:ext>
+            </a:extLst>
+          </p:cNvPr>
+          <p:cNvSpPr txBox="1"/>
+          <p:nvPr/>
+        </p:nvSpPr>
+        <p:spPr>
+          <a:xfrm>
+            <a:off x="321253" y="1614385"/>
+            <a:ext cx="11032547" cy="5113708"/>
+          </a:xfrm>
+          <a:prstGeom prst="rect">
+            <a:avLst/>
+          </a:prstGeom>
+          <a:noFill/>
+        </p:spPr>
+        <p:txBody>
+          <a:bodyPr wrap="square">
+            <a:spAutoFit/>
+          </a:bodyPr>
+          <a:lstStyle/>
+          <a:p>
+            <a:pPr>
+              <a:lnSpc>
+                <a:spcPts val="1650"/>
+              </a:lnSpc>
+              <a:buNone/>
+            </a:pPr>
+            <a:r>
+              <a:rPr lang="en-US" altLang="zh-CN" dirty="0"/>
+              <a:t>if </a:t>
+            </a:r>
+            <a:r>
+              <a:rPr lang="en-US" altLang="zh-CN" dirty="0" err="1"/>
+              <a:t>cpu_weight</a:t>
+            </a:r>
+            <a:r>
+              <a:rPr lang="en-US" altLang="zh-CN" dirty="0"/>
+              <a:t> is None and </a:t>
+            </a:r>
+            <a:r>
+              <a:rPr lang="en-US" altLang="zh-CN" dirty="0" err="1"/>
+              <a:t>gpu_weight</a:t>
+            </a:r>
+            <a:r>
+              <a:rPr lang="en-US" altLang="zh-CN" dirty="0"/>
+              <a:t> is None:</a:t>
+            </a:r>
+          </a:p>
+          <a:p>
+            <a:pPr>
+              <a:lnSpc>
+                <a:spcPts val="1650"/>
+              </a:lnSpc>
+              <a:buNone/>
+            </a:pPr>
+            <a:endParaRPr lang="en-US" altLang="zh-CN" dirty="0"/>
+          </a:p>
+          <a:p>
+            <a:pPr>
+              <a:lnSpc>
+                <a:spcPts val="1650"/>
+              </a:lnSpc>
+              <a:buNone/>
+            </a:pPr>
+            <a:r>
+              <a:rPr lang="en-US" altLang="zh-CN" dirty="0"/>
+              <a:t>    continue</a:t>
+            </a:r>
+          </a:p>
+          <a:p>
+            <a:pPr>
+              <a:lnSpc>
+                <a:spcPts val="1650"/>
+              </a:lnSpc>
+              <a:buNone/>
+            </a:pPr>
+            <a:endParaRPr lang="en-US" altLang="zh-CN" dirty="0"/>
+          </a:p>
+          <a:p>
+            <a:pPr>
+              <a:lnSpc>
+                <a:spcPts val="1650"/>
+              </a:lnSpc>
+              <a:buNone/>
+            </a:pPr>
+            <a:r>
+              <a:rPr lang="en-US" altLang="zh-CN" dirty="0" err="1"/>
+              <a:t>elif</a:t>
+            </a:r>
+            <a:r>
+              <a:rPr lang="en-US" altLang="zh-CN" dirty="0"/>
+              <a:t> </a:t>
+            </a:r>
+            <a:r>
+              <a:rPr lang="en-US" altLang="zh-CN" dirty="0" err="1">
+                <a:solidFill>
+                  <a:srgbClr val="00B0F0"/>
+                </a:solidFill>
+              </a:rPr>
+              <a:t>cpu_weight</a:t>
+            </a:r>
+            <a:r>
+              <a:rPr lang="en-US" altLang="zh-CN" dirty="0">
+                <a:solidFill>
+                  <a:srgbClr val="00B0F0"/>
+                </a:solidFill>
+              </a:rPr>
+              <a:t> is None or </a:t>
+            </a:r>
+            <a:r>
+              <a:rPr lang="en-US" altLang="zh-CN" dirty="0" err="1">
+                <a:solidFill>
+                  <a:srgbClr val="00B0F0"/>
+                </a:solidFill>
+              </a:rPr>
+              <a:t>gpu_weight</a:t>
+            </a:r>
+            <a:r>
+              <a:rPr lang="en-US" altLang="zh-CN" dirty="0">
+                <a:solidFill>
+                  <a:srgbClr val="00B0F0"/>
+                </a:solidFill>
+              </a:rPr>
+              <a:t> is None:</a:t>
+            </a:r>
+          </a:p>
+          <a:p>
+            <a:pPr>
+              <a:lnSpc>
+                <a:spcPts val="1650"/>
+              </a:lnSpc>
+              <a:buNone/>
+            </a:pPr>
+            <a:endParaRPr lang="en-US" altLang="zh-CN" dirty="0"/>
+          </a:p>
+          <a:p>
+            <a:pPr>
+              <a:lnSpc>
+                <a:spcPts val="1650"/>
+              </a:lnSpc>
+              <a:buNone/>
+            </a:pPr>
+            <a:r>
+              <a:rPr lang="en-US" altLang="zh-CN" dirty="0"/>
+              <a:t>    </a:t>
+            </a:r>
+            <a:r>
+              <a:rPr lang="en-US" altLang="zh-CN" dirty="0" err="1"/>
+              <a:t>self.fail</a:t>
+            </a:r>
+            <a:r>
+              <a:rPr lang="en-US" altLang="zh-CN" dirty="0"/>
+              <a:t>(</a:t>
+            </a:r>
+            <a:r>
+              <a:rPr lang="en-US" altLang="zh-CN" dirty="0" err="1"/>
+              <a:t>f"One</a:t>
+            </a:r>
+            <a:r>
+              <a:rPr lang="en-US" altLang="zh-CN" dirty="0"/>
+              <a:t> weight is None while the other is not: </a:t>
+            </a:r>
+            <a:r>
+              <a:rPr lang="en-US" altLang="zh-CN" dirty="0" err="1"/>
+              <a:t>cpu_weight</a:t>
+            </a:r>
+            <a:r>
+              <a:rPr lang="en-US" altLang="zh-CN" dirty="0"/>
+              <a:t>={</a:t>
+            </a:r>
+            <a:r>
+              <a:rPr lang="en-US" altLang="zh-CN" dirty="0" err="1"/>
+              <a:t>cpu_weight</a:t>
+            </a:r>
+            <a:r>
+              <a:rPr lang="en-US" altLang="zh-CN" dirty="0"/>
+              <a:t>}, </a:t>
+            </a:r>
+            <a:r>
+              <a:rPr lang="en-US" altLang="zh-CN" dirty="0" err="1"/>
+              <a:t>gpu_weight</a:t>
+            </a:r>
+            <a:r>
+              <a:rPr lang="en-US" altLang="zh-CN" dirty="0"/>
+              <a:t>={</a:t>
+            </a:r>
+            <a:r>
+              <a:rPr lang="en-US" altLang="zh-CN" dirty="0" err="1"/>
+              <a:t>gpu_weight</a:t>
+            </a:r>
+            <a:r>
+              <a:rPr lang="en-US" altLang="zh-CN" dirty="0"/>
+              <a:t>}")</a:t>
+            </a:r>
+          </a:p>
+          <a:p>
+            <a:pPr>
+              <a:lnSpc>
+                <a:spcPts val="1650"/>
+              </a:lnSpc>
+              <a:buNone/>
+            </a:pPr>
+            <a:endParaRPr lang="en-US" altLang="zh-CN" dirty="0"/>
+          </a:p>
+          <a:p>
+            <a:pPr>
+              <a:lnSpc>
+                <a:spcPts val="1650"/>
+              </a:lnSpc>
+              <a:buNone/>
+            </a:pPr>
+            <a:r>
+              <a:rPr lang="en-US" altLang="zh-CN" dirty="0"/>
+              <a:t>else:</a:t>
+            </a:r>
+          </a:p>
+          <a:p>
+            <a:pPr>
+              <a:lnSpc>
+                <a:spcPts val="1650"/>
+              </a:lnSpc>
+              <a:buNone/>
+            </a:pPr>
+            <a:r>
+              <a:rPr lang="en-US" altLang="zh-CN" dirty="0"/>
+              <a:t>    </a:t>
+            </a:r>
+            <a:r>
+              <a:rPr lang="en-US" altLang="zh-CN" dirty="0" err="1"/>
+              <a:t>self.assertEqual</a:t>
+            </a:r>
+            <a:r>
+              <a:rPr lang="en-US" altLang="zh-CN" dirty="0"/>
+              <a:t>(</a:t>
+            </a:r>
+            <a:r>
+              <a:rPr lang="en-US" altLang="zh-CN" dirty="0" err="1"/>
+              <a:t>cpu_weight.grad.data</a:t>
+            </a:r>
+            <a:r>
+              <a:rPr lang="en-US" altLang="zh-CN" dirty="0"/>
+              <a:t>, </a:t>
+            </a:r>
+            <a:r>
+              <a:rPr lang="en-US" altLang="zh-CN" dirty="0" err="1"/>
+              <a:t>gpu_weight.grad.data</a:t>
+            </a:r>
+            <a:r>
+              <a:rPr lang="en-US" altLang="zh-CN" dirty="0"/>
+              <a:t>, </a:t>
+            </a:r>
+            <a:r>
+              <a:rPr lang="en-US" altLang="zh-CN" dirty="0" err="1"/>
+              <a:t>prec</a:t>
+            </a:r>
+            <a:r>
+              <a:rPr lang="en-US" altLang="zh-CN" dirty="0"/>
+              <a:t>=5e-5)</a:t>
+            </a:r>
+            <a:br>
+              <a:rPr lang="en-US" altLang="zh-CN" dirty="0"/>
+            </a:br>
+            <a:br>
+              <a:rPr lang="en-US" altLang="zh-CN" dirty="0"/>
+            </a:br>
+            <a:br>
+              <a:rPr lang="en-US" altLang="zh-CN" dirty="0"/>
+            </a:br>
+            <a:br>
+              <a:rPr lang="en-US" altLang="zh-CN" dirty="0"/>
+            </a:br>
+            <a:br>
+              <a:rPr lang="en-US" altLang="zh-CN" dirty="0"/>
+            </a:br>
+            <a:r>
+              <a:rPr lang="en-US" altLang="zh-CN" dirty="0"/>
+              <a:t>The updated logic correctly handles None gradients by explicitly checking for mismatches between CPU and GPU weights, raising a descriptive </a:t>
+            </a:r>
+            <a:r>
+              <a:rPr lang="en-US" altLang="zh-CN" dirty="0" err="1"/>
+              <a:t>AssertionError</a:t>
+            </a:r>
+            <a:r>
+              <a:rPr lang="en-US" altLang="zh-CN" dirty="0"/>
+              <a:t> when one is None and the other isn't. This prevents silent failures and ensures robust test behavior without introducing performance or security issues.</a:t>
+            </a:r>
+            <a:br>
+              <a:rPr lang="en-US" altLang="zh-CN" dirty="0"/>
+            </a:br>
+            <a:br>
+              <a:rPr lang="en-US" altLang="zh-CN" dirty="0"/>
+            </a:br>
+            <a:endParaRPr lang="en-US" altLang="zh-CN" dirty="0"/>
+          </a:p>
+          <a:p>
+            <a:pPr>
+              <a:lnSpc>
+                <a:spcPts val="1650"/>
+              </a:lnSpc>
+              <a:buNone/>
+            </a:pPr>
+            <a:endParaRPr lang="en-US" altLang="zh-CN" dirty="0"/>
+          </a:p>
+          <a:p>
+            <a:pPr>
+              <a:lnSpc>
+                <a:spcPts val="1650"/>
+              </a:lnSpc>
+              <a:buNone/>
+            </a:pPr>
+            <a:br>
+              <a:rPr lang="en-US" altLang="zh-CN" dirty="0"/>
+            </a:br>
+            <a:r>
+              <a:rPr lang="da-DK" altLang="zh-CN" dirty="0"/>
+              <a:t>bleu:0.0718190578316774,</a:t>
+            </a:r>
+          </a:p>
+          <a:p>
+            <a:pPr>
+              <a:lnSpc>
+                <a:spcPts val="1650"/>
+              </a:lnSpc>
+              <a:buNone/>
+            </a:pPr>
+            <a:r>
+              <a:rPr lang="da-DK" altLang="zh-CN" dirty="0"/>
+              <a:t>:crystal_bleu0.4888430703340233</a:t>
+            </a:r>
+            <a:endParaRPr lang="en-US" altLang="zh-CN" dirty="0"/>
+          </a:p>
+        </p:txBody>
+      </p:sp>
+    </p:spTree>
+    <p:extLst>
+      <p:ext uri="{BB962C8B-B14F-4D97-AF65-F5344CB8AC3E}">
+        <p14:creationId xmlns:p14="http://schemas.microsoft.com/office/powerpoint/2010/main" val="1707683585"/>
+      </p:ext>
+    </p:extLst>
+  </p:cSld>
+  <p:clrMapOvr>
+    <a:masterClrMapping/>
+  </p:clrMapOvr>
+</p:sld>
+</file>
+
 <file path=ppt/slides/slide2.xml><?xml version="1.0" encoding="utf-8"?>
 <p:sld xmlns:a="http://schemas.openxmlformats.org/drawingml/2006/main" xmlns:r="http://schemas.openxmlformats.org/officeDocument/2006/relationships" xmlns:p="http://schemas.openxmlformats.org/presentationml/2006/main">
   <p:cSld>
@@ -8159,6 +12848,585 @@
     <p:extLst>
       <p:ext uri="{BB962C8B-B14F-4D97-AF65-F5344CB8AC3E}">
         <p14:creationId xmlns:p14="http://schemas.microsoft.com/office/powerpoint/2010/main" val="3716584858"/>
+      </p:ext>
+    </p:extLst>
+  </p:cSld>
+  <p:clrMapOvr>
+    <a:masterClrMapping/>
+  </p:clrMapOvr>
+</p:sld>
+</file>
+
+<file path=ppt/slides/slide20.xml><?xml version="1.0" encoding="utf-8"?>
+<p:sld xmlns:a="http://schemas.openxmlformats.org/drawingml/2006/main" xmlns:r="http://schemas.openxmlformats.org/officeDocument/2006/relationships" xmlns:p="http://schemas.openxmlformats.org/presentationml/2006/main">
+  <p:cSld>
+    <p:spTree>
+      <p:nvGrpSpPr>
+        <p:cNvPr id="1" name=""/>
+        <p:cNvGrpSpPr/>
+        <p:nvPr/>
+      </p:nvGrpSpPr>
+      <p:grpSpPr>
+        <a:xfrm>
+          <a:off x="0" y="0"/>
+          <a:ext cx="0" cy="0"/>
+          <a:chOff x="0" y="0"/>
+          <a:chExt cx="0" cy="0"/>
+        </a:xfrm>
+      </p:grpSpPr>
+      <p:sp>
+        <p:nvSpPr>
+          <p:cNvPr id="2" name="标题 1">
+            <a:extLst>
+              <a:ext uri="{FF2B5EF4-FFF2-40B4-BE49-F238E27FC236}">
+                <a16:creationId xmlns:a16="http://schemas.microsoft.com/office/drawing/2014/main" id="{0FC55C4F-3B41-CB7C-F39B-6FE3542C036C}"/>
+              </a:ext>
+            </a:extLst>
+          </p:cNvPr>
+          <p:cNvSpPr>
+            <a:spLocks noGrp="1"/>
+          </p:cNvSpPr>
+          <p:nvPr>
+            <p:ph type="title"/>
+          </p:nvPr>
+        </p:nvSpPr>
+        <p:spPr/>
+        <p:txBody>
+          <a:bodyPr/>
+          <a:lstStyle/>
+          <a:p>
+            <a:r>
+              <a:rPr lang="zh-CN" altLang="en-US" dirty="0"/>
+              <a:t>问题与初步思考：</a:t>
+            </a:r>
+          </a:p>
+        </p:txBody>
+      </p:sp>
+      <p:sp>
+        <p:nvSpPr>
+          <p:cNvPr id="3" name="内容占位符 2">
+            <a:extLst>
+              <a:ext uri="{FF2B5EF4-FFF2-40B4-BE49-F238E27FC236}">
+                <a16:creationId xmlns:a16="http://schemas.microsoft.com/office/drawing/2014/main" id="{33E6D066-7FEC-1075-06D4-7565F85C6012}"/>
+              </a:ext>
+            </a:extLst>
+          </p:cNvPr>
+          <p:cNvSpPr>
+            <a:spLocks noGrp="1"/>
+          </p:cNvSpPr>
+          <p:nvPr>
+            <p:ph idx="1"/>
+          </p:nvPr>
+        </p:nvSpPr>
+        <p:spPr/>
+        <p:txBody>
+          <a:bodyPr>
+            <a:noAutofit/>
+          </a:bodyPr>
+          <a:lstStyle/>
+          <a:p>
+            <a:pPr marL="0" indent="0">
+              <a:buNone/>
+            </a:pPr>
+            <a:r>
+              <a:rPr lang="en-US" altLang="zh-CN" sz="1800" dirty="0"/>
+              <a:t>1.</a:t>
+            </a:r>
+            <a:r>
+              <a:rPr lang="zh-CN" altLang="en-US" sz="1800" dirty="0"/>
+              <a:t>关于 </a:t>
+            </a:r>
+            <a:r>
+              <a:rPr lang="en-US" altLang="zh-CN" sz="1800" dirty="0"/>
+              <a:t>call tree node</a:t>
+            </a:r>
+            <a:r>
+              <a:rPr lang="zh-CN" altLang="en-US" sz="1800" dirty="0"/>
+              <a:t>的拓展，应该让</a:t>
+            </a:r>
+            <a:r>
+              <a:rPr lang="en-US" altLang="zh-CN" sz="1800" dirty="0" err="1"/>
+              <a:t>llm</a:t>
+            </a:r>
+            <a:r>
+              <a:rPr lang="zh-CN" altLang="en-US" sz="1800" dirty="0"/>
+              <a:t>自主进行 </a:t>
+            </a:r>
+            <a:r>
+              <a:rPr lang="en-US" altLang="zh-CN" sz="1800" dirty="0" err="1"/>
+              <a:t>dfs</a:t>
+            </a:r>
+            <a:r>
+              <a:rPr lang="zh-CN" altLang="en-US" sz="1800" dirty="0"/>
+              <a:t>、或</a:t>
+            </a:r>
+            <a:r>
+              <a:rPr lang="en-US" altLang="zh-CN" sz="1800" dirty="0" err="1"/>
+              <a:t>iddfs</a:t>
+            </a:r>
+            <a:r>
+              <a:rPr lang="zh-CN" altLang="en-US" sz="1800" dirty="0"/>
+              <a:t>与剪枝</a:t>
+            </a:r>
+            <a:endParaRPr lang="en-US" altLang="zh-CN" sz="1800" dirty="0"/>
+          </a:p>
+          <a:p>
+            <a:pPr marL="0" indent="0">
+              <a:buNone/>
+            </a:pPr>
+            <a:r>
+              <a:rPr lang="zh-CN" altLang="en-US" sz="1800" dirty="0"/>
+              <a:t>具体想法是，对每个</a:t>
+            </a:r>
+            <a:r>
+              <a:rPr lang="en-US" altLang="zh-CN" sz="1800" dirty="0"/>
+              <a:t>function</a:t>
+            </a:r>
+            <a:r>
+              <a:rPr lang="zh-CN" altLang="en-US" sz="1800" dirty="0"/>
+              <a:t>，先获取</a:t>
+            </a:r>
+            <a:r>
+              <a:rPr lang="en-US" altLang="zh-CN" sz="1800" dirty="0" err="1"/>
+              <a:t>qname</a:t>
+            </a:r>
+            <a:r>
+              <a:rPr lang="zh-CN" altLang="en-US" sz="1800" dirty="0"/>
+              <a:t>后，</a:t>
+            </a:r>
+            <a:r>
+              <a:rPr lang="en-US" altLang="zh-CN" sz="1800" dirty="0"/>
+              <a:t>agent</a:t>
+            </a:r>
+            <a:r>
+              <a:rPr lang="zh-CN" altLang="en-US" sz="1800" dirty="0"/>
+              <a:t>自己用</a:t>
+            </a:r>
+            <a:r>
+              <a:rPr lang="en-US" altLang="zh-CN" sz="1800" dirty="0"/>
+              <a:t>pyre</a:t>
+            </a:r>
+            <a:r>
+              <a:rPr lang="zh-CN" altLang="en-US" sz="1800" dirty="0"/>
+              <a:t>动态扫描获取另一个</a:t>
+            </a:r>
+            <a:r>
+              <a:rPr lang="en-US" altLang="zh-CN" sz="1800" dirty="0" err="1"/>
+              <a:t>qname</a:t>
+            </a:r>
+            <a:r>
+              <a:rPr lang="en-US" altLang="zh-CN" sz="1800" dirty="0"/>
+              <a:t> list</a:t>
+            </a:r>
+            <a:r>
+              <a:rPr lang="zh-CN" altLang="en-US" sz="1800" dirty="0"/>
+              <a:t>。排除明显不对的</a:t>
+            </a:r>
+            <a:r>
+              <a:rPr lang="en-US" altLang="zh-CN" sz="1800" dirty="0" err="1"/>
+              <a:t>func</a:t>
+            </a:r>
+            <a:r>
+              <a:rPr lang="zh-CN" altLang="en-US" sz="1800" dirty="0"/>
+              <a:t>后，再依据</a:t>
+            </a:r>
+            <a:r>
+              <a:rPr lang="en-US" altLang="zh-CN" sz="1800" dirty="0" err="1"/>
+              <a:t>qname</a:t>
+            </a:r>
+            <a:r>
+              <a:rPr lang="zh-CN" altLang="en-US" sz="1800" dirty="0"/>
+              <a:t>与路径间的映射获取具体内容，直到</a:t>
+            </a:r>
+            <a:r>
+              <a:rPr lang="en-US" altLang="zh-CN" sz="1800" dirty="0" err="1"/>
+              <a:t>llm</a:t>
+            </a:r>
+            <a:r>
+              <a:rPr lang="zh-CN" altLang="en-US" sz="1800" dirty="0"/>
+              <a:t>理解这一个</a:t>
+            </a:r>
+            <a:r>
+              <a:rPr lang="en-US" altLang="zh-CN" sz="1800" dirty="0" err="1"/>
+              <a:t>func</a:t>
+            </a:r>
+            <a:r>
+              <a:rPr lang="zh-CN" altLang="en-US" sz="1800" dirty="0"/>
+              <a:t>为止。然后达到对</a:t>
+            </a:r>
+            <a:r>
+              <a:rPr lang="en-US" altLang="zh-CN" sz="1800" dirty="0" err="1"/>
+              <a:t>func</a:t>
+            </a:r>
+            <a:r>
+              <a:rPr lang="zh-CN" altLang="en-US" sz="1800" dirty="0"/>
+              <a:t>整体的理解。</a:t>
+            </a:r>
+            <a:endParaRPr lang="en-US" altLang="zh-CN" sz="1800" dirty="0"/>
+          </a:p>
+          <a:p>
+            <a:pPr marL="514350" indent="-514350">
+              <a:buAutoNum type="arabicPeriod"/>
+            </a:pPr>
+            <a:endParaRPr lang="en-US" altLang="zh-CN" sz="1800" dirty="0"/>
+          </a:p>
+          <a:p>
+            <a:pPr marL="514350" indent="-514350">
+              <a:buAutoNum type="arabicPeriod"/>
+            </a:pPr>
+            <a:endParaRPr lang="en-US" altLang="zh-CN" sz="1800" dirty="0"/>
+          </a:p>
+          <a:p>
+            <a:pPr marL="0" indent="0">
+              <a:buNone/>
+            </a:pPr>
+            <a:r>
+              <a:rPr lang="en-US" altLang="zh-CN" sz="1800" dirty="0"/>
+              <a:t>2. </a:t>
+            </a:r>
+            <a:r>
+              <a:rPr lang="zh-CN" altLang="en-US" sz="1800" dirty="0"/>
+              <a:t>数据清洗问题、</a:t>
+            </a:r>
+            <a:r>
+              <a:rPr lang="en-US" altLang="zh-CN" sz="1800" dirty="0"/>
+              <a:t>review comment</a:t>
+            </a:r>
+            <a:r>
+              <a:rPr lang="zh-CN" altLang="en-US" sz="1800" dirty="0"/>
+              <a:t>不规范问题，</a:t>
+            </a:r>
+            <a:r>
+              <a:rPr lang="en-US" altLang="zh-CN" sz="1800" dirty="0" err="1"/>
+              <a:t>clearCRC</a:t>
+            </a:r>
+            <a:endParaRPr lang="en-US" altLang="zh-CN" sz="1800" dirty="0"/>
+          </a:p>
+          <a:p>
+            <a:pPr marL="514350" indent="-514350">
+              <a:buAutoNum type="arabicPeriod"/>
+            </a:pPr>
+            <a:endParaRPr lang="en-US" altLang="zh-CN" sz="1800" dirty="0"/>
+          </a:p>
+          <a:p>
+            <a:pPr marL="514350" indent="-514350">
+              <a:buAutoNum type="arabicPeriod"/>
+            </a:pPr>
+            <a:endParaRPr lang="en-US" altLang="zh-CN" sz="1800" dirty="0"/>
+          </a:p>
+          <a:p>
+            <a:pPr marL="514350" indent="-514350">
+              <a:buAutoNum type="arabicPeriod"/>
+            </a:pPr>
+            <a:endParaRPr lang="en-US" altLang="zh-CN" sz="1800" dirty="0"/>
+          </a:p>
+          <a:p>
+            <a:pPr marL="514350" indent="-514350">
+              <a:buAutoNum type="arabicPeriod"/>
+            </a:pPr>
+            <a:endParaRPr lang="en-US" altLang="zh-CN" sz="1800" dirty="0"/>
+          </a:p>
+          <a:p>
+            <a:pPr marL="0" indent="0">
+              <a:buNone/>
+            </a:pPr>
+            <a:r>
+              <a:rPr lang="en-US" altLang="zh-CN" sz="1800" dirty="0"/>
+              <a:t>3.function-level</a:t>
+            </a:r>
+            <a:r>
+              <a:rPr lang="zh-CN" altLang="en-US" sz="1800" dirty="0"/>
+              <a:t>的，那么</a:t>
+            </a:r>
+            <a:r>
+              <a:rPr lang="en-US" altLang="zh-CN" sz="1800" dirty="0"/>
+              <a:t>function</a:t>
+            </a:r>
+            <a:r>
+              <a:rPr lang="zh-CN" altLang="en-US" sz="1800" dirty="0"/>
+              <a:t>、</a:t>
+            </a:r>
+            <a:r>
+              <a:rPr lang="en-US" altLang="zh-CN" sz="1800" dirty="0"/>
+              <a:t>security</a:t>
+            </a:r>
+            <a:r>
+              <a:rPr lang="zh-CN" altLang="en-US" sz="1800" dirty="0"/>
+              <a:t>、</a:t>
+            </a:r>
+            <a:r>
+              <a:rPr lang="en-US" altLang="zh-CN" sz="1800" dirty="0"/>
+              <a:t>performance agent</a:t>
+            </a:r>
+            <a:r>
+              <a:rPr lang="zh-CN" altLang="en-US" sz="1800" dirty="0"/>
+              <a:t>应该初步尝试加</a:t>
+            </a:r>
+            <a:r>
+              <a:rPr lang="en-US" altLang="zh-CN" sz="1800" dirty="0"/>
+              <a:t>execute</a:t>
+            </a:r>
+            <a:r>
+              <a:rPr lang="zh-CN" altLang="en-US" sz="1800" dirty="0"/>
+              <a:t>工具、动态执行验证下模型的思考，就比如前面的</a:t>
+            </a:r>
+            <a:r>
+              <a:rPr lang="en-US" altLang="zh-CN" sz="1800" dirty="0" err="1">
+                <a:solidFill>
+                  <a:srgbClr val="00B0F0"/>
+                </a:solidFill>
+              </a:rPr>
+              <a:t>cpu_weight</a:t>
+            </a:r>
+            <a:r>
+              <a:rPr lang="en-US" altLang="zh-CN" sz="1800" dirty="0">
+                <a:solidFill>
+                  <a:srgbClr val="00B0F0"/>
+                </a:solidFill>
+              </a:rPr>
+              <a:t> is None or </a:t>
+            </a:r>
+            <a:r>
+              <a:rPr lang="en-US" altLang="zh-CN" sz="1800" dirty="0" err="1">
+                <a:solidFill>
+                  <a:srgbClr val="00B0F0"/>
+                </a:solidFill>
+              </a:rPr>
+              <a:t>gpu_weight</a:t>
+            </a:r>
+            <a:r>
+              <a:rPr lang="en-US" altLang="zh-CN" sz="1800" dirty="0">
+                <a:solidFill>
+                  <a:srgbClr val="00B0F0"/>
+                </a:solidFill>
+              </a:rPr>
+              <a:t> is None</a:t>
+            </a:r>
+            <a:endParaRPr lang="zh-CN" altLang="en-US" sz="1800" dirty="0"/>
+          </a:p>
+        </p:txBody>
+      </p:sp>
+      <p:pic>
+        <p:nvPicPr>
+          <p:cNvPr id="5" name="图片 4">
+            <a:extLst>
+              <a:ext uri="{FF2B5EF4-FFF2-40B4-BE49-F238E27FC236}">
+                <a16:creationId xmlns:a16="http://schemas.microsoft.com/office/drawing/2014/main" id="{31F6E04C-7A51-100D-2A4A-8B4F76F6D588}"/>
+              </a:ext>
+            </a:extLst>
+          </p:cNvPr>
+          <p:cNvPicPr>
+            <a:picLocks noChangeAspect="1"/>
+          </p:cNvPicPr>
+          <p:nvPr/>
+        </p:nvPicPr>
+        <p:blipFill>
+          <a:blip r:embed="rId2"/>
+          <a:stretch>
+            <a:fillRect/>
+          </a:stretch>
+        </p:blipFill>
+        <p:spPr>
+          <a:xfrm>
+            <a:off x="6850498" y="3123247"/>
+            <a:ext cx="5265876" cy="2004234"/>
+          </a:xfrm>
+          <a:prstGeom prst="rect">
+            <a:avLst/>
+          </a:prstGeom>
+        </p:spPr>
+      </p:pic>
+    </p:spTree>
+    <p:extLst>
+      <p:ext uri="{BB962C8B-B14F-4D97-AF65-F5344CB8AC3E}">
+        <p14:creationId xmlns:p14="http://schemas.microsoft.com/office/powerpoint/2010/main" val="218144116"/>
+      </p:ext>
+    </p:extLst>
+  </p:cSld>
+  <p:clrMapOvr>
+    <a:masterClrMapping/>
+  </p:clrMapOvr>
+</p:sld>
+</file>
+
+<file path=ppt/slides/slide21.xml><?xml version="1.0" encoding="utf-8"?>
+<p:sld xmlns:a="http://schemas.openxmlformats.org/drawingml/2006/main" xmlns:r="http://schemas.openxmlformats.org/officeDocument/2006/relationships" xmlns:p="http://schemas.openxmlformats.org/presentationml/2006/main">
+  <p:cSld>
+    <p:spTree>
+      <p:nvGrpSpPr>
+        <p:cNvPr id="1" name=""/>
+        <p:cNvGrpSpPr/>
+        <p:nvPr/>
+      </p:nvGrpSpPr>
+      <p:grpSpPr>
+        <a:xfrm>
+          <a:off x="0" y="0"/>
+          <a:ext cx="0" cy="0"/>
+          <a:chOff x="0" y="0"/>
+          <a:chExt cx="0" cy="0"/>
+        </a:xfrm>
+      </p:grpSpPr>
+    </p:spTree>
+    <p:extLst>
+      <p:ext uri="{BB962C8B-B14F-4D97-AF65-F5344CB8AC3E}">
+        <p14:creationId xmlns:p14="http://schemas.microsoft.com/office/powerpoint/2010/main" val="1160863331"/>
+      </p:ext>
+    </p:extLst>
+  </p:cSld>
+  <p:clrMapOvr>
+    <a:masterClrMapping/>
+  </p:clrMapOvr>
+</p:sld>
+</file>
+
+<file path=ppt/slides/slide22.xml><?xml version="1.0" encoding="utf-8"?>
+<p:sld xmlns:a="http://schemas.openxmlformats.org/drawingml/2006/main" xmlns:r="http://schemas.openxmlformats.org/officeDocument/2006/relationships" xmlns:p="http://schemas.openxmlformats.org/presentationml/2006/main">
+  <p:cSld>
+    <p:spTree>
+      <p:nvGrpSpPr>
+        <p:cNvPr id="1" name=""/>
+        <p:cNvGrpSpPr/>
+        <p:nvPr/>
+      </p:nvGrpSpPr>
+      <p:grpSpPr>
+        <a:xfrm>
+          <a:off x="0" y="0"/>
+          <a:ext cx="0" cy="0"/>
+          <a:chOff x="0" y="0"/>
+          <a:chExt cx="0" cy="0"/>
+        </a:xfrm>
+      </p:grpSpPr>
+      <p:sp>
+        <p:nvSpPr>
+          <p:cNvPr id="5" name="文本框 4">
+            <a:extLst>
+              <a:ext uri="{FF2B5EF4-FFF2-40B4-BE49-F238E27FC236}">
+                <a16:creationId xmlns:a16="http://schemas.microsoft.com/office/drawing/2014/main" id="{5DA527D4-5421-CC87-14BD-BC59A438F103}"/>
+              </a:ext>
+            </a:extLst>
+          </p:cNvPr>
+          <p:cNvSpPr txBox="1"/>
+          <p:nvPr/>
+        </p:nvSpPr>
+        <p:spPr>
+          <a:xfrm>
+            <a:off x="415636" y="355662"/>
+            <a:ext cx="6564457" cy="1569660"/>
+          </a:xfrm>
+          <a:prstGeom prst="rect">
+            <a:avLst/>
+          </a:prstGeom>
+          <a:noFill/>
+        </p:spPr>
+        <p:txBody>
+          <a:bodyPr wrap="square">
+            <a:spAutoFit/>
+          </a:bodyPr>
+          <a:lstStyle/>
+          <a:p>
+            <a:r>
+              <a:rPr lang="zh-CN" altLang="en-US" sz="1200" dirty="0"/>
+              <a:t>@@ -1151,17 +1152,21 @@ </a:t>
+            </a:r>
+            <a:r>
+              <a:rPr lang="zh-CN" altLang="en-US" sz="1200" dirty="0">
+                <a:solidFill>
+                  <a:srgbClr val="00B050"/>
+                </a:solidFill>
+              </a:rPr>
+              <a:t>def compare_cpu_gpu(outputs_cpu, outputs_gpu):</a:t>
+            </a:r>
+          </a:p>
+          <a:p>
+            <a:r>
+              <a:rPr lang="zh-CN" altLang="en-US" sz="1200" dirty="0"/>
+              <a:t>             # check grad weights separately, as nested dict</a:t>
+            </a:r>
+          </a:p>
+          <a:p>
+            <a:r>
+              <a:rPr lang="zh-CN" altLang="en-US" sz="1200" dirty="0"/>
+              <a:t>             for cpu_layer_weight, gpu_layer_weight in zip(outputs_cpu['weights'], outputs_gpu['weights']):</a:t>
+            </a:r>
+          </a:p>
+          <a:p>
+            <a:r>
+              <a:rPr lang="zh-CN" altLang="en-US" sz="1200" dirty="0"/>
+              <a:t>                 for (cpu_weight, gpu_weight) in zip(cpu_layer_weight, gpu_layer_weight):</a:t>
+            </a:r>
+          </a:p>
+          <a:p>
+            <a:r>
+              <a:rPr lang="zh-CN" altLang="en-US" sz="1200" dirty="0">
+                <a:solidFill>
+                  <a:srgbClr val="FF0000"/>
+                </a:solidFill>
+              </a:rPr>
+              <a:t>-                    self.assertEqual(cpu_weight.grad.data, gpu_weight.grad.data, prec=5e-5)</a:t>
+            </a:r>
+          </a:p>
+          <a:p>
+            <a:r>
+              <a:rPr lang="zh-CN" altLang="en-US" sz="1200" dirty="0">
+                <a:solidFill>
+                  <a:srgbClr val="FF0000"/>
+                </a:solidFill>
+              </a:rPr>
+              <a:t>+                    if cpu_weight is not None and gpu_weight is not None:</a:t>
+            </a:r>
+          </a:p>
+          <a:p>
+            <a:r>
+              <a:rPr lang="zh-CN" altLang="en-US" sz="1200" dirty="0">
+                <a:solidFill>
+                  <a:srgbClr val="FF0000"/>
+                </a:solidFill>
+              </a:rPr>
+              <a:t>+                        self.assertEqual(cpu_weight.grad.data, gpu_weight.grad.data, prec=5e-5) </a:t>
+            </a:r>
+          </a:p>
+        </p:txBody>
+      </p:sp>
+      <p:sp>
+        <p:nvSpPr>
+          <p:cNvPr id="6" name="文本框 5">
+            <a:extLst>
+              <a:ext uri="{FF2B5EF4-FFF2-40B4-BE49-F238E27FC236}">
+                <a16:creationId xmlns:a16="http://schemas.microsoft.com/office/drawing/2014/main" id="{44DFB3A4-9F40-0F32-245C-BC4C811C24BB}"/>
+              </a:ext>
+            </a:extLst>
+          </p:cNvPr>
+          <p:cNvSpPr txBox="1"/>
+          <p:nvPr/>
+        </p:nvSpPr>
+        <p:spPr>
+          <a:xfrm>
+            <a:off x="415636" y="0"/>
+            <a:ext cx="1093569" cy="369332"/>
+          </a:xfrm>
+          <a:prstGeom prst="rect">
+            <a:avLst/>
+          </a:prstGeom>
+          <a:noFill/>
+        </p:spPr>
+        <p:txBody>
+          <a:bodyPr wrap="none" rtlCol="0">
+            <a:spAutoFit/>
+          </a:bodyPr>
+          <a:lstStyle/>
+          <a:p>
+            <a:r>
+              <a:rPr lang="en-US" altLang="zh-CN" dirty="0"/>
+              <a:t>Code diff</a:t>
+            </a:r>
+            <a:endParaRPr lang="zh-CN" altLang="en-US" dirty="0"/>
+          </a:p>
+        </p:txBody>
+      </p:sp>
+    </p:spTree>
+    <p:extLst>
+      <p:ext uri="{BB962C8B-B14F-4D97-AF65-F5344CB8AC3E}">
+        <p14:creationId xmlns:p14="http://schemas.microsoft.com/office/powerpoint/2010/main" val="3587788163"/>
       </p:ext>
     </p:extLst>
   </p:cSld>

--- a/docs/drawio画图/日记/review.pptx
+++ b/docs/drawio画图/日记/review.pptx
@@ -218,7 +218,7 @@
           <a:p>
             <a:fld id="{F025F477-E431-4287-BBCF-F0B82B99CDE8}" type="datetimeFigureOut">
               <a:rPr lang="zh-CN" altLang="en-US" smtClean="0"/>
-              <a:t>2025/9/28</a:t>
+              <a:t>2025/10/14</a:t>
             </a:fld>
             <a:endParaRPr lang="zh-CN" altLang="en-US"/>
           </a:p>
@@ -716,7 +716,7 @@
           <a:p>
             <a:fld id="{57E0CF9C-0FB6-4165-824A-A36BB34C0D04}" type="datetimeFigureOut">
               <a:rPr lang="zh-CN" altLang="en-US" smtClean="0"/>
-              <a:t>2025/9/28</a:t>
+              <a:t>2025/10/14</a:t>
             </a:fld>
             <a:endParaRPr lang="zh-CN" altLang="en-US"/>
           </a:p>
@@ -914,7 +914,7 @@
           <a:p>
             <a:fld id="{57E0CF9C-0FB6-4165-824A-A36BB34C0D04}" type="datetimeFigureOut">
               <a:rPr lang="zh-CN" altLang="en-US" smtClean="0"/>
-              <a:t>2025/9/28</a:t>
+              <a:t>2025/10/14</a:t>
             </a:fld>
             <a:endParaRPr lang="zh-CN" altLang="en-US"/>
           </a:p>
@@ -1122,7 +1122,7 @@
           <a:p>
             <a:fld id="{57E0CF9C-0FB6-4165-824A-A36BB34C0D04}" type="datetimeFigureOut">
               <a:rPr lang="zh-CN" altLang="en-US" smtClean="0"/>
-              <a:t>2025/9/28</a:t>
+              <a:t>2025/10/14</a:t>
             </a:fld>
             <a:endParaRPr lang="zh-CN" altLang="en-US"/>
           </a:p>
@@ -1320,7 +1320,7 @@
           <a:p>
             <a:fld id="{57E0CF9C-0FB6-4165-824A-A36BB34C0D04}" type="datetimeFigureOut">
               <a:rPr lang="zh-CN" altLang="en-US" smtClean="0"/>
-              <a:t>2025/9/28</a:t>
+              <a:t>2025/10/14</a:t>
             </a:fld>
             <a:endParaRPr lang="zh-CN" altLang="en-US"/>
           </a:p>
@@ -1595,7 +1595,7 @@
           <a:p>
             <a:fld id="{57E0CF9C-0FB6-4165-824A-A36BB34C0D04}" type="datetimeFigureOut">
               <a:rPr lang="zh-CN" altLang="en-US" smtClean="0"/>
-              <a:t>2025/9/28</a:t>
+              <a:t>2025/10/14</a:t>
             </a:fld>
             <a:endParaRPr lang="zh-CN" altLang="en-US"/>
           </a:p>
@@ -1860,7 +1860,7 @@
           <a:p>
             <a:fld id="{57E0CF9C-0FB6-4165-824A-A36BB34C0D04}" type="datetimeFigureOut">
               <a:rPr lang="zh-CN" altLang="en-US" smtClean="0"/>
-              <a:t>2025/9/28</a:t>
+              <a:t>2025/10/14</a:t>
             </a:fld>
             <a:endParaRPr lang="zh-CN" altLang="en-US"/>
           </a:p>
@@ -2272,7 +2272,7 @@
           <a:p>
             <a:fld id="{57E0CF9C-0FB6-4165-824A-A36BB34C0D04}" type="datetimeFigureOut">
               <a:rPr lang="zh-CN" altLang="en-US" smtClean="0"/>
-              <a:t>2025/9/28</a:t>
+              <a:t>2025/10/14</a:t>
             </a:fld>
             <a:endParaRPr lang="zh-CN" altLang="en-US"/>
           </a:p>
@@ -2413,7 +2413,7 @@
           <a:p>
             <a:fld id="{57E0CF9C-0FB6-4165-824A-A36BB34C0D04}" type="datetimeFigureOut">
               <a:rPr lang="zh-CN" altLang="en-US" smtClean="0"/>
-              <a:t>2025/9/28</a:t>
+              <a:t>2025/10/14</a:t>
             </a:fld>
             <a:endParaRPr lang="zh-CN" altLang="en-US"/>
           </a:p>
@@ -2526,7 +2526,7 @@
           <a:p>
             <a:fld id="{57E0CF9C-0FB6-4165-824A-A36BB34C0D04}" type="datetimeFigureOut">
               <a:rPr lang="zh-CN" altLang="en-US" smtClean="0"/>
-              <a:t>2025/9/28</a:t>
+              <a:t>2025/10/14</a:t>
             </a:fld>
             <a:endParaRPr lang="zh-CN" altLang="en-US"/>
           </a:p>
@@ -2837,7 +2837,7 @@
           <a:p>
             <a:fld id="{57E0CF9C-0FB6-4165-824A-A36BB34C0D04}" type="datetimeFigureOut">
               <a:rPr lang="zh-CN" altLang="en-US" smtClean="0"/>
-              <a:t>2025/9/28</a:t>
+              <a:t>2025/10/14</a:t>
             </a:fld>
             <a:endParaRPr lang="zh-CN" altLang="en-US"/>
           </a:p>
@@ -3125,7 +3125,7 @@
           <a:p>
             <a:fld id="{57E0CF9C-0FB6-4165-824A-A36BB34C0D04}" type="datetimeFigureOut">
               <a:rPr lang="zh-CN" altLang="en-US" smtClean="0"/>
-              <a:t>2025/9/28</a:t>
+              <a:t>2025/10/14</a:t>
             </a:fld>
             <a:endParaRPr lang="zh-CN" altLang="en-US"/>
           </a:p>
@@ -3366,7 +3366,7 @@
           <a:p>
             <a:fld id="{57E0CF9C-0FB6-4165-824A-A36BB34C0D04}" type="datetimeFigureOut">
               <a:rPr lang="zh-CN" altLang="en-US" smtClean="0"/>
-              <a:t>2025/9/28</a:t>
+              <a:t>2025/10/14</a:t>
             </a:fld>
             <a:endParaRPr lang="zh-CN" altLang="en-US"/>
           </a:p>
